--- a/assets/finance/D09_Governance_Capital_Structure.pptx
+++ b/assets/finance/D09_Governance_Capital_Structure.pptx
@@ -535,7 +535,11 @@
           <a:p>
             <a:r>
               <a:rPr lang="en-US" dirty="0"/>
-              <a:t/>
+              <a:t>ANGLE — Two hours. First half is who controls the firm; second half is what its money costs.
+•  Say up front: sections 4 and 5 are the exam-heavy ones. Sections 1-3 are the vocabulary.
+•  Flag that this deck is closest to what I actually do for a living.
+•  One promise to the room: by the end you can build a WACC and defend every input.
+NEXT — Roadmap.</a:t>
             </a:r>
             <a:endParaRPr lang="en-US" dirty="0"/>
           </a:p>
@@ -623,7 +627,15 @@
           <a:p>
             <a:r>
               <a:rPr lang="en-US" dirty="0"/>
-              <a:t/>
+              <a:t>ANGLE — A CFA example, not an illustration — the numbers are the curriculum's. Make them compute it live.
+•  Put up the base case only. Ask for the 60% before showing it. Someone will divide by 100.
+•  Then hand them the downside and wait. The minus sign is the lesson.
+•  Spell out the condition: leverage adds to ROE only while ROA beats the cost of debt. 30% vs 20% here.
+•  Downside is −20% ROE: a fifth of book equity gone in one period. Not a wipeout, but the covenant is now live.
+•  The CFA ignores tax here. We reintroduce it in section 4 and it changes the conclusion.
+FROM THE DESK — Sponsors run exactly this table in the IC memo, on EBITDA rather than revenue. What both versions hide is that the interest cost is not fixed as leverage rises — pushing debt from 75 to 85 does not leave the 20% rate alone. That feedback is the entire content of MM Proposition II.
+ASK THE ROOM — If ROA had been 15% rather than 30%, what does the debt-financed column look like?
+NEXT — Shareholders and lenders are only two claimants. Who else has a stake?</a:t>
             </a:r>
             <a:endParaRPr lang="en-US" dirty="0"/>
           </a:p>
@@ -711,7 +723,13 @@
           <a:p>
             <a:r>
               <a:rPr lang="en-US" dirty="0"/>
-              <a:t/>
+              <a:t>ANGLE — The map is not the point. Every pair on it is a potential conflict — and that is section 3.
+•  Read the table down the "what they want" column, not across. The conflicts jump out.
+•  Friedman 1970 is in the curriculum and more nuanced than its reputation — a long-horizon shareholder view converges with the stakeholder view.
+•  Name the four challenges of stakeholder theory: balancing objectives, measuring them, competing globally, direct cost.
+•  Do not editorialise on ESG here. That is the next slide.
+FROM THE DESK — On a live deal the stakeholder that moves the timetable is almost never on a textbook list — it is the works council, the antitrust regulator, or one anchor lender. Board packs that treat stakeholders as a slide rather than a critical path get surprised.
+NEXT — Three of these groups have been repriced hardest in the last decade. That is what ESG is.</a:t>
             </a:r>
             <a:endParaRPr lang="en-US" dirty="0"/>
           </a:p>
@@ -799,7 +817,14 @@
           <a:p>
             <a:r>
               <a:rPr lang="en-US" dirty="0"/>
-              <a:t/>
+              <a:t>ANGLE — ESG earns a slide in a finance course only if it changes a number. Show which number.
+•  Two transmission channels and only two: the cash-flow forecast, and the discount rate.
+•  CFA's own examples: raise a hotel group's costs for staff turnover; lower a food group's discount rate for a secure sustainable input.
+•  Governance is the most quantifiable leg — board composition and pay are disclosed and comparable.
+•  Three cases, three letters, three real price moves. Equity fell immediately in all three; ratings followed.
+•  Do not moralise. The claim is materiality, not virtue.
+FROM THE DESK — On the debt side this is now mechanical: agency ESG credit indicators, and sustainability-linked margin ratchets worth 25bp on a covenant test. The honest version is that E and S mostly matter through tail risk and through access — the number of funds that simply cannot buy your paper.
+NEXT — Governance was the quantifiable leg. Section 3 takes it apart properly.</a:t>
             </a:r>
             <a:endParaRPr lang="en-US" dirty="0"/>
           </a:p>
@@ -887,7 +912,11 @@
           <a:p>
             <a:r>
               <a:rPr lang="en-US" dirty="0"/>
-              <a:t/>
+              <a:t>ANGLE — Six slides, 30 minutes, then the break. Students find this section soft — so make it numerical early.
+•  Open with the principal-agent chain, then immediately price an agency cost.
+•  The mechanisms table is reference material — do not read it out.
+•  End on the three failure cases. They are what gets remembered.
+NEXT — Every layer of the corporation is a principal hiring an agent.</a:t>
             </a:r>
             <a:endParaRPr lang="en-US" dirty="0"/>
           </a:p>
@@ -975,7 +1004,13 @@
           <a:p>
             <a:r>
               <a:rPr lang="en-US" dirty="0"/>
-              <a:t/>
+              <a:t>ANGLE — Agency cost is not a metaphor. It is monitoring spend plus value that never appears — both real money.
+•  Draw the chain. Note the board is agent to one party and principal to another.
+•  Five conflicts, five names. Make them learn the names — the exam uses them verbatim.
+•  Best question: which conflict does an all-cash pay package cause? Answer: risk aversion, not greed.
+•  Point at the italic line — three conflict axes in total, not one.
+FROM THE DESK — The agency cost that actually shows up in a valuation is not the jet, it is the conglomerate discount. A CEO paid on revenue keeps buying, and the market marks the platform down 15-20% for it. That discount is the agency cost capitalised, and it is why break-up activism works.
+NEXT — Put a number on one of them.</a:t>
             </a:r>
             <a:endParaRPr lang="en-US" dirty="0"/>
           </a:p>
@@ -1063,7 +1098,15 @@
           <a:p>
             <a:r>
               <a:rPr lang="en-US" dirty="0"/>
-              <a:t/>
+              <a:t>ANGLE — The arithmetic is trivial. The point is the conversion: a recurring perk is a permanent claim on the equity.
+•  Be explicit that this is my illustration, not a CFA example. They should be able to tell the difference.
+•  Keep the tax treatment consistent — after tax on both the cost and the recovery. That is where students slip.
+•  Discount at the COST OF EQUITY, not WACC: the loss falls entirely on shareholders.
+•  USD 2.00 a share is the line that lands. Compare it with a plausible share price.
+•  Name it: this is the indirect, forgone-value half of the formula on the previous slide.
+FROM THE DESK — No board ever debates the jet. They debate the proxy adviser's recommendation on the pay vote, and the jet is in the proxy. That is the real transmission mechanism — disclosure, then a say-on-pay result below 80%, then a compensation chair who suddenly wants a reimbursement policy.
+ASK THE ROOM — Why discount at the cost of equity rather than at WACC?
+NEXT — Perks are small. Control is not — who actually votes?</a:t>
             </a:r>
             <a:endParaRPr lang="en-US" dirty="0"/>
           </a:p>
@@ -1151,7 +1194,13 @@
           <a:p>
             <a:r>
               <a:rPr lang="en-US" dirty="0"/>
-              <a:t/>
+              <a:t>ANGLE — Control and economics come apart. Once they do, the conflict is not manager versus owner — it is owner versus owner.
+•  Ask for the ratio before revealing it: 3% of the economics, 75% of the votes. Let it sit.
+•  CAD 870m is the price of undoing it — a governance structure, quantified.
+•  Not all concentration is bad. A long-horizon family owner can be an antidote to short-termism.
+•  Exam point: with a 55% controlling holder the conflict is controlling ↔ minority, not shareholder ↔ bondholder.
+FROM THE DESK — On a sell-side mandate the share register is page one of the deal: a dual-class line decides whether you are running an auction or a negotiation with one person. Index providers excluding non-voting shares has made founders slightly more willing to sunset them. Slightly.
+NEXT — So what are the tools that hold all of this in check?</a:t>
             </a:r>
             <a:endParaRPr lang="en-US" dirty="0"/>
           </a:p>
@@ -1239,7 +1288,14 @@
           <a:p>
             <a:r>
               <a:rPr lang="en-US" dirty="0"/>
-              <a:t/>
+              <a:t>ANGLE — Reference slide. Use it to show each mechanism answers a named conflict — do not read it out.
+•  Seven categories, not five. The curriculum includes employees and commercial counterparties.
+•  AGM versus EGM is a classic item: auditor and accounts at the AGM; bylaw changes and M&amp;A at the EGM.
+•  Ad hoc creditor committee is the one they will not know — bondholders organising before a default.
+•  Staggered boards weaken governance: at 25% a year an activist needs three years to take the board.
+•  Comply-or-explain versus the US model. One line each.
+FROM THE DESK — On a leveraged credit the mechanism with teeth is none of the equity ones — it is the covenant package and the ad hoc group behind it. Boards discover their lenders' governance rights when a maintenance test is about to trip, and that is when the real balance of power shows.
+NEXT — Zoom in on the mechanism doing most of the day-to-day work: the board's committees.</a:t>
             </a:r>
             <a:endParaRPr lang="en-US" dirty="0"/>
           </a:p>
@@ -1327,7 +1383,14 @@
           <a:p>
             <a:r>
               <a:rPr lang="en-US" dirty="0"/>
-              <a:t/>
+              <a:t>ANGLE — Three committees, three mandates. The exam question is always "whose job is this?" — so drill the boundary.
+•  Classic trap: adopting the governance code belongs to NOMINATING/GOVERNANCE, not to Audit.
+•  Audit owns the auditor relationship — selection, fee, private session. That is the independence that matters most.
+•  Compensation must be fully independent because management cannot mark its own homework.
+•  CFA's preferred incentive design: shares not options, multi-year vesting, holding requirements.
+•  Mention risk committees (banks) and investment committees (insurers) as the common fourth.
+FROM THE DESK — A rating advisory conversation often starts at the audit committee: restatement risk and the quality of internal audit drive how much of management's guidance an agency will underwrite. A weak audit committee costs the issuer real basis points long before anything goes wrong.
+NEXT — And when it does go wrong, what does it cost?</a:t>
             </a:r>
             <a:endParaRPr lang="en-US" dirty="0"/>
           </a:p>
@@ -1415,7 +1478,14 @@
           <a:p>
             <a:r>
               <a:rPr lang="en-US" dirty="0"/>
-              <a:t/>
+              <a:t>ANGLE — Three cases, and each damages a different part of the capital stack. That is why there are three columns.
+•  Theranos kills the equity outright. VW is a cash-flow and reputation event. Kobe is a cost-of-debt event.
+•  Kobe is the one that connects to section 4 — governance failure straight into the discount rate.
+•  The Kobe remedy list reads like a checklist of everything on the committees slide.
+•  One sentence on the footnote so they know the claim is evidenced, not rhetorical.
+FROM THE DESK — Agencies have no "governance" line item, but they have outlooks and management-and-governance modifiers, and both move first. The honest sequence is: governance event, negative outlook, spreads widen, then a downgrade eighteen months later. The market prices the outlook, not the downgrade.
+ASK THE ROOM — Kobe's cost of debt hit record highs. Trace that through to its WACC and its investment decisions.
+NEXT — Break. Then we build that discount rate properly.</a:t>
             </a:r>
             <a:endParaRPr lang="en-US" dirty="0"/>
           </a:p>
@@ -1503,7 +1573,11 @@
           <a:p>
             <a:r>
               <a:rPr lang="en-US" dirty="0"/>
-              <a:t/>
+              <a:t>ANGLE — Sell the shape of the morning, do not narrate it. Forty-five seconds.
+•  Rough clock: 20 / 25 / 30 / 40 / 25 minutes. Break after section 3.
+•  Point at sections 4 and 5 — the exam marks and the day job both live there.
+•  Warn them: the numbers in section 4 are CFA numbers, worth learning by heart.
+NEXT — Objectives, then straight in.</a:t>
             </a:r>
             <a:endParaRPr lang="en-US" dirty="0"/>
           </a:p>
@@ -1591,7 +1665,11 @@
           <a:p>
             <a:r>
               <a:rPr lang="en-US" dirty="0"/>
-              <a:t/>
+              <a:t>ANGLE — Eight slides, 40 minutes. Heart of the deck and of the exam. Slow, numerical, no anecdotes until MM is done.
+•  Order matters: WACC mechanics first, then the theory explaining why the mix moves it.
+•  Gerhardt gets worked twice — once without tax, once with. Same firm, same numbers. That is the module's design.
+•  Warn them now: MM I vs II, with vs without taxes, is a four-cell grid. They will be asked which cell.
+NEXT — Start with the number everything else feeds into.</a:t>
             </a:r>
             <a:endParaRPr lang="en-US" dirty="0"/>
           </a:p>
@@ -1679,7 +1757,14 @@
           <a:p>
             <a:r>
               <a:rPr lang="en-US" dirty="0"/>
-              <a:t/>
+              <a:t>ANGLE — Three uses, one number. If they leave with one formula from this deck, it is this one.
+•  Say the three uses out loud: NPV discount rate, IRR hurdle, investors' blended required return.
+•  Two standard errors: forgetting (1 − t), and using book weights. Flag both now.
+•  The costs of debt and equity are NOT chosen by management — markets set them. Tested true/false.
+•  This is a real CFA knowledge check. The 7.23% is theirs, not mine.
+FROM THE DESK — In a live process WACC is negotiated, not computed. Two banks pitching the same asset 20% apart on value are rarely disagreeing about EBITDA — they disagree about beta, the ERP, and whether to use spot or target leverage. Whoever controls the WACC page controls the valuation.
+ASK THE ROOM — If ABC's tax rate went to zero, what happens to its WACC — and why is that not automatically bad news?
+NEXT — Now do it properly, with a balance sheet and two sets of weights.</a:t>
             </a:r>
             <a:endParaRPr lang="en-US" dirty="0"/>
           </a:p>
@@ -1767,7 +1852,14 @@
           <a:p>
             <a:r>
               <a:rPr lang="en-US" dirty="0"/>
-              <a:t/>
+              <a:t>ANGLE — Two weightings, two answers, 48 basis points apart. Make them see where the gap comes from.
+•  The gap exists only because equity trades at 1.5x book. At book the two answers coincide.
+•  Book understates WACC here because it under-weights the expensive component — equity.
+•  Do NOT use the 5% coupon anywhere. The 4% YTM is the cost of debt. Say it before they ask.
+•  Read the footnote out: market weights for the WACC, book values for targets, covenants and rating ratios.
+•  CFA runs the same comparison in its Question Set — point them at it.
+FROM THE DESK — Both are used, for different audiences. The valuation model runs on market weights; the capital-structure policy the board signs runs on net debt / EBITDA and a target rating, which are book and cash-flow measures. An analyst who cannot switch frames sounds junior in a board meeting.
+NEXT — Those weights are not chosen in a vacuum. Where a company sits in its life cycle largely sets them.</a:t>
             </a:r>
             <a:endParaRPr lang="en-US" dirty="0"/>
           </a:p>
@@ -1855,7 +1947,14 @@
           <a:p>
             <a:r>
               <a:rPr lang="en-US" dirty="0"/>
-              <a:t/>
+              <a:t>ANGLE — The debt-type row is the exam row. Convertible, secured, unsecured — in that order, and they must know why.
+•  Why convertible at startup? No cash flow to service interest, so the lender takes equity upside instead.
+•  Why secured in growth? Free cash flow is still negative — the lender wants an asset, not a promise.
+•  Why unsecured when mature? Cash flow is predictable, so a ratio covenant replaces a lien.
+•  Growth-stage FCF is "rising but often still negative". Do not let them write "positive".
+•  Regulated capital structures: banks and utilities are forced toward equity, which RAISES their WACC.
+FROM THE DESK — The pattern runs in reverse too, and that is where the fees are. A mature investment-grade issuer levering up for a buyback is walking back down this table, and the covenant package it accepts on the way tells you whether the board really intends to deleverage.
+NEXT — So far the mix looks like a real choice. Modigliani and Miller said it is not.</a:t>
             </a:r>
             <a:endParaRPr lang="en-US" dirty="0"/>
           </a:p>
@@ -1943,7 +2042,15 @@
           <a:p>
             <a:r>
               <a:rPr lang="en-US" dirty="0"/>
-              <a:t/>
+              <a:t>ANGLE — MM I is a benchmark, not a description. Right about what matters — cash flows — and wrong about everything it assumes away.
+•  Homemade leverage first, formula second. The intuition is the argument.
+•  Read the callout's second sentence twice: MM allowed bankruptcy, they priced it at zero. Everyone gets this wrong.
+•  Assumption 3 fails hardest — no individual borrows at the risk-free rate.
+•  Prop I conclusions verbatim: V_L = V_U, value comes from cash flows, and without taxes WACC is unaffected.
+•  Do not let them leave thinking capital structure never matters. It matters — just far less than the cash flows.
+FROM THE DESK — The irrelevance result is the right starting point because it forces the next question: which friction is doing the work? Tax, distress, agency, signalling, or access. Every financing recommendation I have written is an argument about one of those five, whether or not it says so.
+ASK THE ROOM — Which of the five assumptions is violated when a company issues equity and the share price drops?
+NEXT — Relax nothing yet — just look at what leverage does to the cost of equity.</a:t>
             </a:r>
             <a:endParaRPr lang="en-US" dirty="0"/>
           </a:p>
@@ -2031,7 +2138,14 @@
           <a:p>
             <a:r>
               <a:rPr lang="en-US" dirty="0"/>
-              <a:t/>
+              <a:t>ANGLE — The see-saw. Cheap debt in, expensive equity out, and the fulcrum does not move.
+•  Compute the new cost of equity with them. 15/35, not 15/50 — the denominator is EQUITY.
+•  Then let them predict the WACC before you show it. Half will expect it to fall.
+•  The cross-check is worth doing: it proves nothing was created out of the financing.
+•  CFA Exhibit 4 in one sentence: r_e is a straight line in D/E; WACC is flat.
+•  These exact numbers reappear next slide with tax added. Tell them to keep them.
+FROM THE DESK — The mechanism is real even though the conclusion is not. Every levered recap raises the equity beta and holders do demand more — they just do not demand exactly enough, because of the tax shield, and they demand far more than enough once distress is in view.
+NEXT — Now let the government into the room.</a:t>
             </a:r>
             <a:endParaRPr lang="en-US" dirty="0"/>
           </a:p>
@@ -2119,7 +2233,15 @@
           <a:p>
             <a:r>
               <a:rPr lang="en-US" dirty="0"/>
-              <a:t/>
+              <a:t>ANGLE — One term changes — (1 − t) — and the conclusion inverts. Show them it is the same firm as the last slide.
+•  Start by noting V_U fell from 50,000 to 37,500. Tax destroys value; debt claws some back.
+•  The value gain is EXACTLY t·D = 3,750. Not approximately. That identity is the proposition.
+•  The cost of equity lands on 12.143% again — a coincidence of these numbers, not a rule. Say so or they generalise.
+•  Check the WACC two ways: weighted average, and 3,750 / 0.09091 = 41,250. Both must agree.
+•  Then say the uncomfortable part out loud: this model says borrow 100%. Which is why the next slide exists.
+FROM THE DESK — The shield is worth less than t·D in practice and the market knows it: it needs taxable profit to shelter, interest deductibility is capped in most jurisdictions now, and the debt is not perpetual. Treat t·D as the ceiling on the benefit, never the estimate of it.
+ASK THE ROOM — A loss-making company issues debt. What is its tax shield worth this year?
+NEXT — Add the one cost MM priced at zero, and the answer stops being 100%.</a:t>
             </a:r>
             <a:endParaRPr lang="en-US" dirty="0"/>
           </a:p>
@@ -2207,7 +2329,15 @@
           <a:p>
             <a:r>
               <a:rPr lang="en-US" dirty="0"/>
-              <a:t/>
+              <a:t>ANGLE — The inverted U. Do not draw it — build it one row at a time and let them see where it turns.
+•  Cover the V_L column and walk down the first two rows. The shield is linear; distress costs are not.
+•  Ask where the optimum is BEFORE revealing D*. Several will say 15.
+•  Between 20 and 25 the shield adds 1.5 and distress adds 4.5. That single comparison is the theory.
+•  Distress costs are direct (legal, administrative) plus indirect (lost customers, suppliers, staff, agency costs of debt).
+•  They are lower where assets have a resale market — aircraft, ships, real estate — higher for pharma, tech, services.
+FROM THE DESK — No board has seen this table. What they see is a rating grid: net debt / EBITDA at 2.5x to hold BBB, 3.5x and you are on negative outlook. That grid IS the distress-cost curve translated into something a treasurer can be measured on — and the reason boards defend a rating band is that the curve is steep going down and flat coming back.
+ASK THE ROOM — Two firms, same tax rate: an airline and a software company. Which has the higher D*?
+NEXT — Trade-off theory gives a target. The next theory says firms do not aim at one at all.</a:t>
             </a:r>
             <a:endParaRPr lang="en-US" dirty="0"/>
           </a:p>
@@ -2295,7 +2425,14 @@
           <a:p>
             <a:r>
               <a:rPr lang="en-US" dirty="0"/>
-              <a:t/>
+              <a:t>ANGLE — Two theories, two different claims. Trade-off says there is an optimum; pecking order says there is only a history.
+•  Do not let them state the order backwards. Internal, then private debt, then public debt, then equity.
+•  The private-before-public step is the detail everyone drops, and it is in the curriculum.
+•  Signal directions: debt issuance mildly positive, equity issuance negative. Ask why before explaining.
+•  CFA Example 5: the biotech that expands its credit line in July before announcing trial results in August. Signalling whether or not it was intended.
+•  Jensen closes the loop back to section 3 — leverage is itself a governance mechanism.
+FROM THE DESK — Watch what companies do and pecking order describes it better than trade-off does. Equity gets raised at the top of the market or under duress, almost never in between, and treasurers will burn years of balance-sheet flexibility to avoid a dilutive print. The board discussion is about the share price today, not about D*.
+NEXT — Section 5. We have used a cost of equity three times without ever computing one.</a:t>
             </a:r>
             <a:endParaRPr lang="en-US" dirty="0"/>
           </a:p>
@@ -2383,7 +2520,11 @@
           <a:p>
             <a:r>
               <a:rPr lang="en-US" dirty="0"/>
-              <a:t/>
+              <a:t>ANGLE — Four slides, 25 minutes. Assemble every input we have been assuming, then build one WACC end to end.
+•  Say clearly that CAPM belongs to Vol 9 and that relevering beta is not on the Level I syllabus at all.
+•  Justify including them anyway: you cannot compute a real WACC without both.
+•  Leave ten minutes for the Aurelia slide — that is the one they replicate in the exercise.
+NEXT — The cost of equity, at last.</a:t>
             </a:r>
             <a:endParaRPr lang="en-US" dirty="0"/>
           </a:p>
@@ -2471,7 +2612,11 @@
           <a:p>
             <a:r>
               <a:rPr lang="en-US" dirty="0"/>
-              <a:t/>
+              <a:t>ANGLE — Six objectives, one per block. Objectives 4 and 5 carry most of the exam weight.
+•  Read 4 and 5 aloud. Summarise the rest in one sentence.
+•  Objective 6 is not on the Level I syllabus — say so now, and say why we do it anyway.
+•  Do not linger. Ninety seconds.
+NEXT — Section 1 — who legally owns a business.</a:t>
             </a:r>
             <a:endParaRPr lang="en-US" dirty="0"/>
           </a:p>
@@ -2559,7 +2704,14 @@
           <a:p>
             <a:r>
               <a:rPr lang="en-US" dirty="0"/>
-              <a:t/>
+              <a:t>ANGLE — Three inputs, one of which is observable. Be honest about which two are arguments.
+•  r_f is observable. ERP and beta are estimates, and reasonable people differ by 200bp on the ERP alone.
+•  β × ERP is the STOCK'S risk premium; the ERP alone is the market's. Do not let them merge the two.
+•  Sensitivity line: 0.10 of beta is 60bp here. That is why beta gets argued over.
+•  Say where beta comes from: a regression of the stock on the index — and it reflects that company's leverage.
+•  Which is exactly the problem the next slide fixes.
+FROM THE DESK — ERP and beta are the two levers on the WACC page and both are defensible over a wide range. That is not cynicism — it is why the discussion belongs at the top of a valuation rather than in an appendix, and why a good analyst shows WACC as a range with a sensitivity grid.
+NEXT — The peer's beta reflects the peer's balance sheet. Strip it out.</a:t>
             </a:r>
             <a:endParaRPr lang="en-US" dirty="0"/>
           </a:p>
@@ -2647,7 +2799,14 @@
           <a:p>
             <a:r>
               <a:rPr lang="en-US" dirty="0"/>
-              <a:t/>
+              <a:t>ANGLE — Business risk versus financial risk. The whole slide is one distinction, made operational.
+•  Say it plainly: the asset beta is the business; the equity beta is the business plus the balance sheet.
+•  This is MM Proposition II in beta form — same idea, different units. Point back at slide 25.
+•  Only the beta changed. Same industry, same cash flows, +1.96pp on the cost of equity.
+•  Flag the (1 − t): it is there because the tax shield absorbs part of the risk the debt adds.
+•  Repeat that this is outside the Level I syllabus. They should know when they are off-piste.
+FROM THE DESK — The real fight is never the algebra, it is the comp set. Five peers give you five asset betas spanning 0.4, and the median you pick decides the answer more than the formula does. Also use target leverage, not spot, or a company mid-recap gets a WACC that reprices every quarter.
+NEXT — One input left — the cost of debt.</a:t>
             </a:r>
             <a:endParaRPr lang="en-US" dirty="0"/>
           </a:p>
@@ -2735,7 +2894,14 @@
           <a:p>
             <a:r>
               <a:rPr lang="en-US" dirty="0"/>
-              <a:t/>
+              <a:t>ANGLE — Marginal cost, not historic cost. Everything on this slide follows from that one word.
+•  Ask which is the cost of debt for a bond with a 5% coupon trading at a 7% yield. Wait for both answers.
+•  The table is a ladder: credit quality is the price of debt. Walk it once, A to CCC.
+•  Note the tax columns: a higher tax rate makes debt cheaper after tax — the shield, seen from the WACC side.
+•  CFA also allows recent comparable borrowings as a forward-looking proxy. Useful for private issuers.
+•  Warn on the CCC line: at those yields the shield is worthless, because there is no taxable profit to shelter.
+FROM THE DESK — For an unlisted borrower the honest answer is the last term sheet, not a curve. A bank quotes a margin over base plus fees, and the all-in cost includes commitment, upfront and ticking fees. Analysts who use the headline margin understate the cost of debt by 30 to 50 basis points as a matter of routine.
+NEXT — Every input is now on the table. Assemble one.</a:t>
             </a:r>
             <a:endParaRPr lang="en-US" dirty="0"/>
           </a:p>
@@ -2823,7 +2989,15 @@
           <a:p>
             <a:r>
               <a:rPr lang="en-US" dirty="0"/>
-              <a:t/>
+              <a:t>ANGLE — Every input from the last four slides, assembled once. Make them do it, then debrief the choices.
+•  Hand them the assumptions and give them five minutes. Do not walk them through it first.
+•  Common slips: relevering with D/V instead of D/E, dropping (1 − t) on the debt, using the coupon.
+•  The TARGET structure was used, not the current one. Ask why that is the right choice.
+•  Then stress it live: ERP of 5% instead of 6% takes the WACC to about 6.6%. Show the swing.
+•  Close on the caveat — 7.17% is for average-risk Aurelia projects; a riskier project needs a premium on top.
+FROM THE DESK — This is the page every banker builds and almost nobody defends properly. Two questions decide the answer: which peers you unlevered, and whether you used target or spot leverage. Both are judgement calls made in about ninety seconds. Write them into the footnotes — you will be asked in six months.
+ASK THE ROOM — Aurelia levers up to 60% debt. Does its WACC rise, fall, or both — and over what range?
+NEXT — Wrap up.</a:t>
             </a:r>
             <a:endParaRPr lang="en-US" dirty="0"/>
           </a:p>
@@ -2911,7 +3085,12 @@
           <a:p>
             <a:r>
               <a:rPr lang="en-US" dirty="0"/>
-              <a:t/>
+              <a:t>ANGLE — Eight lines. Read four, point at the rest, stop.
+•  Three that must survive the week: the ROE condition, V_L = V_U + tD, and market weights with an after-tax cost of debt.
+•  Remind them which pieces sat outside Level I: relevering beta, and CAPM itself (Vol 9).
+•  Set the exercise: rebuild the Aurelia WACC from a blank sheet, then flex the ERP and the target leverage.
+•  Preview: next session takes this discount rate into working capital and capital investment.
+NEXT — Questions, then break.</a:t>
             </a:r>
             <a:endParaRPr lang="en-US" dirty="0"/>
           </a:p>
@@ -2999,7 +3178,11 @@
           <a:p>
             <a:r>
               <a:rPr lang="en-US" dirty="0"/>
-              <a:t/>
+              <a:t>ANGLE — Three slides, 20 minutes. Vocabulary block — get through it briskly.
+•  Resist teaching tax law. Five attributes, one table, move on.
+•  Only thing that must land: limited liability plus owner-manager separation is what opens capital markets.
+•  Keep the Simon Property Group example — it is the one they remember.
+NEXT — The three legal forms.</a:t>
             </a:r>
             <a:endParaRPr lang="en-US" dirty="0"/>
           </a:p>
@@ -3087,7 +3270,13 @@
           <a:p>
             <a:r>
               <a:rPr lang="en-US" dirty="0"/>
-              <a:t/>
+              <a:t>ANGLE — Five attributes, three forms. The table is the whole slide — interrogate it, do not add to it.
+•  Walk the LIABILITY row first, not the top row. That row explains all the others.
+•  Taxation is the corporate form's only real disadvantage — but retained profits escape the second layer.
+•  "Access to financing: unbounded" is the line that sets up the rest of the deck.
+•  Footnote matters: a private limited company is not the same thing as a private company.
+FROM THE DESK — The legal form is chosen by tax and legal long before finance is in the room. Where it bites us is diligence — a target held through an LP or a GmbH &amp; Co. KG changes who can pledge what, and that surfaces as covenant drafting, not strategy.
+NEXT — Take the corporate form apart — what exactly are its features?</a:t>
             </a:r>
             <a:endParaRPr lang="en-US" dirty="0"/>
           </a:p>
@@ -3175,7 +3364,14 @@
           <a:p>
             <a:r>
               <a:rPr lang="en-US" dirty="0"/>
-              <a:t/>
+              <a:t>ANGLE — The five features are exam vocabulary. Simon is the picture that makes them stick.
+•  Left column: read the five headings only. The detail is for their notes.
+•  Draw the three-layer chain on the board — shareholders / board / management. It is the spine of section 3.
+•  Simon: ask where the liability stops before revealing it. Most answer backwards.
+•  Land it: a general partner with unlimited liability is harmless if the GP is itself a limited company.
+FROM THE DESK — This stack is the standard shape of REITs, fund sponsors and infrastructure platforms. When you underwrite one, the covenants sit at the LP where the assets are, and the listed entity above can be structurally subordinated. Missing that is how you mis-rate a deal.
+ASK THE ROOM — If the GP has unlimited liability, why would anyone agree to be the GP?
+NEXT — Same corporate form, two very different lives: listed or not.</a:t>
             </a:r>
             <a:endParaRPr lang="en-US" dirty="0"/>
           </a:p>
@@ -3263,7 +3459,13 @@
           <a:p>
             <a:r>
               <a:rPr lang="en-US" dirty="0"/>
-              <a:t/>
+              <a:t>ANGLE — Public versus private is about liquidity and disclosure, not legal form. Say that twice.
+•  Correct the standard error before it happens: interim statements are REVIEWED, annual statements are AUDITED.
+•  Free float is worth 30 seconds — L'Oreal is 44% float with the family at 33% and Nestle at 23%.
+•  Three routes to go public. A SPAC sits under "acquisition"; it is not a separate fourth route.
+•  Trend worth naming: listings shrinking in developed markets, growing in emerging ones. Private capital is why.
+FROM THE DESK — The listing decision is pitched to boards as a capital-raising decision. It is mostly a liquidity decision for existing holders, and a governance decision they under-price. The first activist letter usually arrives before the first follow-on offering.
+NEXT — Section 2 — the two claims on the firm, and everyone else with a stake in it.</a:t>
             </a:r>
             <a:endParaRPr lang="en-US" dirty="0"/>
           </a:p>
@@ -3351,7 +3553,11 @@
           <a:p>
             <a:r>
               <a:rPr lang="en-US" dirty="0"/>
-              <a:t/>
+              <a:t>ANGLE — Four slides, 25 minutes. The ROE example has to land — budget ten minutes for it alone.
+•  Debt vs equity table: fast. They half-know it already.
+•  Slow right down on the leverage arithmetic. Make them compute the downside case themselves.
+•  Stakeholder map and ESG: brisk. Anchor ESG on the three real cases, not on the taxonomy.
+NEXT — Two claims on one pool of cash flow.</a:t>
             </a:r>
             <a:endParaRPr lang="en-US" dirty="0"/>
           </a:p>
@@ -3439,7 +3645,14 @@
           <a:p>
             <a:r>
               <a:rPr lang="en-US" dirty="0"/>
-              <a:t/>
+              <a:t>ANGLE — Every row follows from one thing: debt is a promise, equity is a leftover.
+•  Do not read the table. Pick three rows: priority, tax treatment, voting.
+•  Last two rows are the exam trap — debt riskier for the ISSUER, equity riskier for the INVESTOR.
+•  Tax deductibility of interest seeds the whole MM-with-taxes result. Plant it here.
+•  Private lenders see non-public information; bondholders do not. Different information, different behaviour.
+FROM THE DESK — Every restructuring I have worked on is a fight over exactly one row of this table: priority. Everything else gets negotiated; seniority gets litigated.
+ASK THE ROOM — A bond and a share in the same company — which is riskier? Careful, the question is incomplete.
+NEXT — Now put numbers on it. What does leverage actually do to a shareholder's return?</a:t>
             </a:r>
             <a:endParaRPr lang="en-US" dirty="0"/>
           </a:p>
@@ -4173,7 +4386,7 @@
                 <a:ea typeface="Trebuchet MS" pitchFamily="34" charset="-122"/>
                 <a:cs typeface="Trebuchet MS" pitchFamily="34" charset="-120"/>
               </a:rPr>
-              <a:t>A worked ROE example shows how financial leverage amplifies both return and risk — the fundamental debt-equity trade-off</a:t>
+              <a:t>Leverage amplifies both return and risk — the same mechanism does both, and CFA Example 1 proves it in three lines</a:t>
             </a:r>
             <a:endParaRPr lang="en-US" sz="1700" dirty="0"/>
           </a:p>
@@ -4277,7 +4490,7 @@
                 <a:ea typeface="Calibri" pitchFamily="34" charset="-122"/>
                 <a:cs typeface="Calibri" pitchFamily="34" charset="-120"/>
               </a:rPr>
-              <a:t>Source: CFA Institute, Curriculum Vol 3, Learning Module 2, Example 1 paraphrased, pp. 42–44.</a:t>
+              <a:t>Source: CFA Institute, Curriculum Vol 3, Learning Module 2, Example 1 "Equity- versus Debt-Based Balance Sheet Financing", pp. 42–43. Income taxes ignored, as in the source.</a:t>
             </a:r>
             <a:endParaRPr lang="en-US" sz="750" dirty="0"/>
           </a:p>
@@ -4319,7 +4532,7 @@
                 <a:ea typeface="Calibri" pitchFamily="34" charset="-122"/>
                 <a:cs typeface="Calibri" pitchFamily="34" charset="-120"/>
               </a:rPr>
-              <a:t>Same operating business, two capital structures, three revenue scenarios. Leverage turns a 30% return on assets into 60% ROE — and a 20% revenue drop into a −20% loss.</a:t>
+              <a:t>Same operating business, two capital structures, three revenue scenarios. Leverage turns a 30% return on assets into a 60% ROE — and a 20% revenue drop into a loss.</a:t>
             </a:r>
             <a:endParaRPr lang="en-US" sz="1300" dirty="0"/>
           </a:p>
@@ -4421,7 +4634,7 @@
                           <a:ea typeface="Trebuchet MS" pitchFamily="34" charset="-122"/>
                           <a:cs typeface="Trebuchet MS" pitchFamily="34" charset="-120"/>
                         </a:rPr>
-                        <a:t>Equity-financed (100% E)</a:t>
+                        <a:t>Equity-financed (E 100)</a:t>
                       </a:r>
                       <a:endParaRPr lang="en-US" sz="1100" dirty="0">
                         <a:latin typeface="Trebuchet MS" charset="0"/>
@@ -4471,7 +4684,7 @@
                           <a:ea typeface="Trebuchet MS" pitchFamily="34" charset="-122"/>
                           <a:cs typeface="Trebuchet MS" pitchFamily="34" charset="-120"/>
                         </a:rPr>
-                        <a:t>Debt-financed (75% D, 25% E, interest 15)</a:t>
+                        <a:t>Debt-financed (D 75 / E 25, int. 15)</a:t>
                       </a:r>
                       <a:endParaRPr lang="en-US" sz="1100" dirty="0">
                         <a:latin typeface="Trebuchet MS" charset="0"/>
@@ -4573,7 +4786,7 @@
                           <a:ea typeface="Calibri" pitchFamily="34" charset="-122"/>
                           <a:cs typeface="Calibri" pitchFamily="34" charset="-120"/>
                         </a:rPr>
-                        <a:t>Base: Rev 100, OpEx 70</a:t>
+                        <a:t>Base — Rev 100, OpEx 70</a:t>
                       </a:r>
                       <a:endParaRPr lang="en-US" sz="1100" dirty="0">
                         <a:latin typeface="Calibri" charset="0"/>
@@ -4673,7 +4886,7 @@
                           <a:ea typeface="Consolas" pitchFamily="34" charset="-122"/>
                           <a:cs typeface="Consolas" pitchFamily="34" charset="-120"/>
                         </a:rPr>
-                        <a:t>NI 30−15=15 / E 25 = 60%</a:t>
+                        <a:t>NI 30−15 = 15 / E 25 = 60%</a:t>
                       </a:r>
                       <a:endParaRPr lang="en-US" sz="1100" dirty="0">
                         <a:latin typeface="Consolas" charset="0"/>
@@ -4775,7 +4988,7 @@
                           <a:ea typeface="Calibri" pitchFamily="34" charset="-122"/>
                           <a:cs typeface="Calibri" pitchFamily="34" charset="-120"/>
                         </a:rPr>
-                        <a:t>Upside: Rev 120 (+20%)</a:t>
+                        <a:t>Upside — Rev 120 (+20%)</a:t>
                       </a:r>
                       <a:endParaRPr lang="en-US" sz="1100" dirty="0">
                         <a:latin typeface="Calibri" charset="0"/>
@@ -4875,7 +5088,7 @@
                           <a:ea typeface="Consolas" pitchFamily="34" charset="-122"/>
                           <a:cs typeface="Consolas" pitchFamily="34" charset="-120"/>
                         </a:rPr>
-                        <a:t>NI 50−15=35 / E 25 = 140%</a:t>
+                        <a:t>NI 50−15 = 35 / E 25 = 140%</a:t>
                       </a:r>
                       <a:endParaRPr lang="en-US" sz="1100" dirty="0">
                         <a:latin typeface="Consolas" charset="0"/>
@@ -4977,7 +5190,7 @@
                           <a:ea typeface="Calibri" pitchFamily="34" charset="-122"/>
                           <a:cs typeface="Calibri" pitchFamily="34" charset="-120"/>
                         </a:rPr>
-                        <a:t>Downside: Rev 80 (−20%)</a:t>
+                        <a:t>Downside — Rev 80 (−20%)</a:t>
                       </a:r>
                       <a:endParaRPr lang="en-US" sz="1100" dirty="0">
                         <a:latin typeface="Calibri" charset="0"/>
@@ -5077,7 +5290,7 @@
                           <a:ea typeface="Consolas" pitchFamily="34" charset="-122"/>
                           <a:cs typeface="Consolas" pitchFamily="34" charset="-120"/>
                         </a:rPr>
-                        <a:t>NI 10−15=−5 / E 25 = −20%</a:t>
+                        <a:t>NI 10−15 = −5 / E 25 = −20%</a:t>
                       </a:r>
                       <a:endParaRPr lang="en-US" sz="1100" dirty="0">
                         <a:latin typeface="Consolas" charset="0"/>
@@ -5173,8 +5386,8 @@
         </p:nvSpPr>
         <p:spPr>
           <a:xfrm>
-            <a:off x="320040" y="2606040"/>
-            <a:ext cx="8503920" cy="1691640"/>
+            <a:off x="320040" y="2395728"/>
+            <a:ext cx="8503920" cy="1463040"/>
           </a:xfrm>
           <a:prstGeom prst="rect">
             <a:avLst/>
@@ -5193,8 +5406,8 @@
         </p:nvSpPr>
         <p:spPr>
           <a:xfrm>
-            <a:off x="320040" y="2606040"/>
-            <a:ext cx="73152" cy="1691640"/>
+            <a:off x="320040" y="2395728"/>
+            <a:ext cx="73152" cy="1463040"/>
           </a:xfrm>
           <a:prstGeom prst="rect">
             <a:avLst/>
@@ -5213,7 +5426,7 @@
         </p:nvSpPr>
         <p:spPr>
           <a:xfrm>
-            <a:off x="457200" y="2651760"/>
+            <a:off x="457200" y="2441448"/>
             <a:ext cx="8275320" cy="256032"/>
           </a:xfrm>
           <a:prstGeom prst="rect">
@@ -5241,7 +5454,7 @@
                 <a:ea typeface="Trebuchet MS" pitchFamily="34" charset="-122"/>
                 <a:cs typeface="Trebuchet MS" pitchFamily="34" charset="-120"/>
               </a:rPr>
-              <a:t>INTERPRETATION</a:t>
+              <a:t>WHY IT WORKS — AND WHERE IT BREAKS</a:t>
             </a:r>
             <a:endParaRPr lang="en-US" sz="1100" dirty="0"/>
           </a:p>
@@ -5255,8 +5468,8 @@
         </p:nvSpPr>
         <p:spPr>
           <a:xfrm>
-            <a:off x="457200" y="2926080"/>
-            <a:ext cx="8275320" cy="1325880"/>
+            <a:off x="457200" y="2715768"/>
+            <a:ext cx="8275320" cy="1097280"/>
           </a:xfrm>
           <a:prstGeom prst="rect">
             <a:avLst/>
@@ -5283,7 +5496,7 @@
                 <a:ea typeface="Calibri" pitchFamily="34" charset="-122"/>
                 <a:cs typeface="Calibri" pitchFamily="34" charset="-120"/>
               </a:rPr>
-              <a:t>Leverage works when the firm's return on assets (30%) exceeds its cost of debt (15/75 = 20%). In the upside, leverage amplifies the 50% all-equity return to 140% on equity. In the downside, the same mechanism turns a positive 10% return into a net loss and destroys ~80% of book equity. A higher tax rate further favours debt (interest is tax-deductible), which is why capital-intensive firms lever up. Volatility, not level, is what debt truly amplifies.</a:t>
+              <a:t>Leverage pays only while the return on assets beats the cost of debt: here return on assets is 30/100 = 30% against an interest rate of 15/75 = 20%. On the upside the same gearing turns a 50% all-equity return into 140% on equity. On the downside a still-profitable business — assets earning 10% — produces a net loss of 5 on 25 of equity: a −20% ROE that removes a fifth of book equity in a single period and puts the next interest payment in question. Leverage does not raise the average return. It widens the distribution around it.</a:t>
             </a:r>
             <a:endParaRPr lang="en-US" sz="1200" dirty="0"/>
           </a:p>
@@ -5390,7 +5603,7 @@
                 <a:ea typeface="Trebuchet MS" pitchFamily="34" charset="-122"/>
                 <a:cs typeface="Trebuchet MS" pitchFamily="34" charset="-120"/>
               </a:rPr>
-              <a:t>Eight stakeholder groups each bring a distinct set of claims, incentives, and conflict potential with the corporation</a:t>
+              <a:t>Eight stakeholder groups each bring a distinct set of claims, incentives and conflict potential with the corporation</a:t>
             </a:r>
             <a:endParaRPr lang="en-US" sz="1700" dirty="0"/>
           </a:p>
@@ -5494,7 +5707,7 @@
                 <a:ea typeface="Calibri" pitchFamily="34" charset="-122"/>
                 <a:cs typeface="Calibri" pitchFamily="34" charset="-120"/>
               </a:rPr>
-              <a:t>Source: CFA Institute, Curriculum Vol 3, Learning Module 2, Exhibit 6, pp. 48–54.</a:t>
+              <a:t>Source: CFA Institute, Curriculum Vol 3, Learning Module 2, §3 "Corporate Stakeholders and Governance", Exhibit 6, pp. 48–53.</a:t>
             </a:r>
             <a:endParaRPr lang="en-US" sz="750" dirty="0"/>
           </a:p>
@@ -5536,7 +5749,7 @@
                 <a:ea typeface="Calibri" pitchFamily="34" charset="-122"/>
                 <a:cs typeface="Calibri" pitchFamily="34" charset="-120"/>
               </a:rPr>
-              <a:t>Shareholder-theory focuses only on residual claimants. Stakeholder-theory broadens the lens to every group with a vested interest — ESG analysis is a direct implication.</a:t>
+              <a:t>Shareholder theory counts only the residual claimants. Stakeholder theory widens the lens to everyone with a vested interest — and ESG analysis follows directly from it.</a:t>
             </a:r>
             <a:endParaRPr lang="en-US" sz="1300" dirty="0"/>
           </a:p>
@@ -5687,7 +5900,7 @@
                           <a:ea typeface="Trebuchet MS" pitchFamily="34" charset="-122"/>
                           <a:cs typeface="Trebuchet MS" pitchFamily="34" charset="-120"/>
                         </a:rPr>
-                        <a:t>What they seek from the firm</a:t>
+                        <a:t>What they want from the firm</a:t>
                       </a:r>
                       <a:endParaRPr lang="en-US" sz="1100" dirty="0">
                         <a:latin typeface="Trebuchet MS" charset="0"/>
@@ -5839,7 +6052,7 @@
                           <a:ea typeface="Consolas" pitchFamily="34" charset="-122"/>
                           <a:cs typeface="Consolas" pitchFamily="34" charset="-120"/>
                         </a:rPr>
-                        <a:t>Residual return, voting rights, capital appreciation</a:t>
+                        <a:t>Residual return, votes, appreciation</a:t>
                       </a:r>
                       <a:endParaRPr lang="en-US" sz="1100" dirty="0">
                         <a:latin typeface="Consolas" charset="0"/>
@@ -5891,7 +6104,7 @@
                           <a:ea typeface="Calibri" pitchFamily="34" charset="-122"/>
                           <a:cs typeface="Calibri" pitchFamily="34" charset="-120"/>
                         </a:rPr>
-                        <a:t>Debtholders (banks &amp; bond-)</a:t>
+                        <a:t>Debtholders / creditors</a:t>
                       </a:r>
                       <a:endParaRPr lang="en-US" sz="1100" dirty="0">
                         <a:latin typeface="Calibri" charset="0"/>
@@ -5991,7 +6204,7 @@
                           <a:ea typeface="Consolas" pitchFamily="34" charset="-122"/>
                           <a:cs typeface="Consolas" pitchFamily="34" charset="-120"/>
                         </a:rPr>
-                        <a:t>Timely interest &amp; principal; covenant protection</a:t>
+                        <a:t>Interest, principal, covenant cover</a:t>
                       </a:r>
                       <a:endParaRPr lang="en-US" sz="1100" dirty="0">
                         <a:latin typeface="Consolas" charset="0"/>
@@ -6093,7 +6306,7 @@
                           <a:ea typeface="Consolas" pitchFamily="34" charset="-122"/>
                           <a:cs typeface="Consolas" pitchFamily="34" charset="-120"/>
                         </a:rPr>
-                        <a:t>Stewardship &amp; oversight</a:t>
+                        <a:t>Stewardship and oversight</a:t>
                       </a:r>
                       <a:endParaRPr lang="en-US" sz="1100" dirty="0">
                         <a:latin typeface="Consolas" charset="0"/>
@@ -6143,7 +6356,7 @@
                           <a:ea typeface="Consolas" pitchFamily="34" charset="-122"/>
                           <a:cs typeface="Consolas" pitchFamily="34" charset="-120"/>
                         </a:rPr>
-                        <a:t>Fiduciary duty to shareholders, fee, reputation</a:t>
+                        <a:t>Fiduciary duty, fees, reputation</a:t>
                       </a:r>
                       <a:endParaRPr lang="en-US" sz="1100" dirty="0">
                         <a:latin typeface="Consolas" charset="0"/>
@@ -6245,7 +6458,7 @@
                           <a:ea typeface="Consolas" pitchFamily="34" charset="-122"/>
                           <a:cs typeface="Consolas" pitchFamily="34" charset="-120"/>
                         </a:rPr>
-                        <a:t>Human capital &amp; strategy</a:t>
+                        <a:t>Human capital and strategy</a:t>
                       </a:r>
                       <a:endParaRPr lang="en-US" sz="1100" dirty="0">
                         <a:latin typeface="Consolas" charset="0"/>
@@ -6295,7 +6508,7 @@
                           <a:ea typeface="Consolas" pitchFamily="34" charset="-122"/>
                           <a:cs typeface="Consolas" pitchFamily="34" charset="-120"/>
                         </a:rPr>
-                        <a:t>Compensation, status, tenure, career options</a:t>
+                        <a:t>Pay, status, tenure, career options</a:t>
                       </a:r>
                       <a:endParaRPr lang="en-US" sz="1100" dirty="0">
                         <a:latin typeface="Consolas" charset="0"/>
@@ -6397,7 +6610,7 @@
                           <a:ea typeface="Consolas" pitchFamily="34" charset="-122"/>
                           <a:cs typeface="Consolas" pitchFamily="34" charset="-120"/>
                         </a:rPr>
-                        <a:t>Labour, skills, human capital</a:t>
+                        <a:t>Labour and skills</a:t>
                       </a:r>
                       <a:endParaRPr lang="en-US" sz="1100" dirty="0">
                         <a:latin typeface="Consolas" charset="0"/>
@@ -6447,7 +6660,7 @@
                           <a:ea typeface="Consolas" pitchFamily="34" charset="-122"/>
                           <a:cs typeface="Consolas" pitchFamily="34" charset="-120"/>
                         </a:rPr>
-                        <a:t>Fair pay, safety, development, job security</a:t>
+                        <a:t>Fair pay, safety, job security</a:t>
                       </a:r>
                       <a:endParaRPr lang="en-US" sz="1100" dirty="0">
                         <a:latin typeface="Consolas" charset="0"/>
@@ -6599,7 +6812,7 @@
                           <a:ea typeface="Consolas" pitchFamily="34" charset="-122"/>
                           <a:cs typeface="Consolas" pitchFamily="34" charset="-120"/>
                         </a:rPr>
-                        <a:t>Value, safety, service, stable supply</a:t>
+                        <a:t>Value, service, safety, supply</a:t>
                       </a:r>
                       <a:endParaRPr lang="en-US" sz="1100" dirty="0">
                         <a:latin typeface="Consolas" charset="0"/>
@@ -6701,7 +6914,7 @@
                           <a:ea typeface="Consolas" pitchFamily="34" charset="-122"/>
                           <a:cs typeface="Consolas" pitchFamily="34" charset="-120"/>
                         </a:rPr>
-                        <a:t>Inputs &amp; trade credit</a:t>
+                        <a:t>Inputs and trade credit</a:t>
                       </a:r>
                       <a:endParaRPr lang="en-US" sz="1100" dirty="0">
                         <a:latin typeface="Consolas" charset="0"/>
@@ -6751,7 +6964,7 @@
                           <a:ea typeface="Consolas" pitchFamily="34" charset="-122"/>
                           <a:cs typeface="Consolas" pitchFamily="34" charset="-120"/>
                         </a:rPr>
-                        <a:t>Timely payment; long-term relationship</a:t>
+                        <a:t>Timely payment, long relationship</a:t>
                       </a:r>
                       <a:endParaRPr lang="en-US" sz="1100" dirty="0">
                         <a:latin typeface="Consolas" charset="0"/>
@@ -6903,7 +7116,7 @@
                           <a:ea typeface="Consolas" pitchFamily="34" charset="-122"/>
                           <a:cs typeface="Consolas" pitchFamily="34" charset="-120"/>
                         </a:rPr>
-                        <a:t>Tax revenue, compliance, externality management</a:t>
+                        <a:t>Tax, compliance, externalities</a:t>
                       </a:r>
                       <a:endParaRPr lang="en-US" sz="1100" dirty="0">
                         <a:latin typeface="Consolas" charset="0"/>
@@ -6941,6 +7154,130 @@
           </a:graphicData>
         </a:graphic>
       </p:graphicFrame>
+      <p:sp>
+        <p:nvSpPr>
+          <p:cNvPr id="10" name="Shape 7"/>
+          <p:cNvSpPr/>
+          <p:nvPr/>
+        </p:nvSpPr>
+        <p:spPr>
+          <a:xfrm>
+            <a:off x="320040" y="3749040"/>
+            <a:ext cx="8503920" cy="594360"/>
+          </a:xfrm>
+          <a:prstGeom prst="rect">
+            <a:avLst/>
+          </a:prstGeom>
+          <a:solidFill>
+            <a:srgbClr val="FEF0E7"/>
+          </a:solidFill>
+          <a:ln/>
+        </p:spPr>
+      </p:sp>
+      <p:sp>
+        <p:nvSpPr>
+          <p:cNvPr id="11" name="Shape 8"/>
+          <p:cNvSpPr/>
+          <p:nvPr/>
+        </p:nvSpPr>
+        <p:spPr>
+          <a:xfrm>
+            <a:off x="320040" y="3749040"/>
+            <a:ext cx="73152" cy="594360"/>
+          </a:xfrm>
+          <a:prstGeom prst="rect">
+            <a:avLst/>
+          </a:prstGeom>
+          <a:solidFill>
+            <a:srgbClr val="E8600A"/>
+          </a:solidFill>
+          <a:ln/>
+        </p:spPr>
+      </p:sp>
+      <p:sp>
+        <p:nvSpPr>
+          <p:cNvPr id="12" name="Text 9"/>
+          <p:cNvSpPr txBox="1"/>
+          <p:nvPr/>
+        </p:nvSpPr>
+        <p:spPr>
+          <a:xfrm>
+            <a:off x="457200" y="3794760"/>
+            <a:ext cx="8275320" cy="256032"/>
+          </a:xfrm>
+          <a:prstGeom prst="rect">
+            <a:avLst/>
+          </a:prstGeom>
+          <a:noFill/>
+          <a:ln/>
+        </p:spPr>
+        <p:txBody>
+          <a:bodyPr wrap="square" lIns="508" tIns="508" rIns="508" bIns="508" rtlCol="0" anchor="ctr">
+            <a:normAutofit/>
+            <a:spAutoFit/>
+          </a:bodyPr>
+          <a:lstStyle/>
+          <a:p>
+            <a:pPr algn="l" indent="0" marL="0">
+              <a:buNone/>
+            </a:pPr>
+            <a:r>
+              <a:rPr lang="en-US" sz="1100" b="1" spc="400" kern="0" dirty="0">
+                <a:solidFill>
+                  <a:srgbClr val="E8600A"/>
+                </a:solidFill>
+                <a:latin typeface="Trebuchet MS" pitchFamily="34" charset="0"/>
+                <a:ea typeface="Trebuchet MS" pitchFamily="34" charset="-122"/>
+                <a:cs typeface="Trebuchet MS" pitchFamily="34" charset="-120"/>
+              </a:rPr>
+              <a:t>SHAREHOLDER THEORY VS STAKEHOLDER THEORY</a:t>
+            </a:r>
+            <a:endParaRPr lang="en-US" sz="1100" dirty="0"/>
+          </a:p>
+        </p:txBody>
+      </p:sp>
+      <p:sp>
+        <p:nvSpPr>
+          <p:cNvPr id="13" name="Text 10"/>
+          <p:cNvSpPr txBox="1"/>
+          <p:nvPr/>
+        </p:nvSpPr>
+        <p:spPr>
+          <a:xfrm>
+            <a:off x="457200" y="4069080"/>
+            <a:ext cx="8275320" cy="228600"/>
+          </a:xfrm>
+          <a:prstGeom prst="rect">
+            <a:avLst/>
+          </a:prstGeom>
+          <a:noFill/>
+          <a:ln/>
+        </p:spPr>
+        <p:txBody>
+          <a:bodyPr wrap="square" lIns="508" tIns="508" rIns="508" bIns="508" rtlCol="0" anchor="t">
+            <a:normAutofit/>
+            <a:spAutoFit/>
+          </a:bodyPr>
+          <a:lstStyle/>
+          <a:p>
+            <a:pPr algn="l" indent="0" marL="0">
+              <a:buNone/>
+            </a:pPr>
+            <a:r>
+              <a:rPr lang="en-US" sz="1200" dirty="0">
+                <a:solidFill>
+                  <a:srgbClr val="334155"/>
+                </a:solidFill>
+                <a:latin typeface="Calibri" pitchFamily="34" charset="0"/>
+                <a:ea typeface="Calibri" pitchFamily="34" charset="-122"/>
+                <a:cs typeface="Calibri" pitchFamily="34" charset="-120"/>
+              </a:rPr>
+              <a:t>Shareholder theory counts other groups only where they affect shareholder value; stakeholder theory makes them objectives in their own right.</a:t>
+            </a:r>
+            <a:endParaRPr lang="en-US" sz="1200" dirty="0"/>
+          </a:p>
+        </p:txBody>
+      </p:sp>
     </p:spTree>
   </p:cSld>
   <p:clrMapOvr>
@@ -7042,7 +7379,7 @@
                 <a:ea typeface="Trebuchet MS" pitchFamily="34" charset="-122"/>
                 <a:cs typeface="Trebuchet MS" pitchFamily="34" charset="-120"/>
               </a:rPr>
-              <a:t>ESG factors are increasingly quantifiable and material — analysts bake them into cash-flow forecasts and discount rates</a:t>
+              <a:t>ESG factors are increasingly quantifiable and material — analysts push them into cash-flow forecasts and into the discount rate</a:t>
             </a:r>
             <a:endParaRPr lang="en-US" sz="1700" dirty="0"/>
           </a:p>
@@ -7146,7 +7483,7 @@
                 <a:ea typeface="Calibri" pitchFamily="34" charset="-122"/>
                 <a:cs typeface="Calibri" pitchFamily="34" charset="-120"/>
               </a:rPr>
-              <a:t>Source: CFA Institute, Curriculum Vol 3, Learning Module 2, Exhibit 7, pp. 55–61.</a:t>
+              <a:t>Source: CFA Institute, Curriculum Vol 3, Learning Module 2, §4 "Corporate ESG Considerations", Exhibit 7 and case boxes, pp. 54–61.</a:t>
             </a:r>
             <a:endParaRPr lang="en-US" sz="750" dirty="0"/>
           </a:p>
@@ -7188,7 +7525,7 @@
                 <a:ea typeface="Calibri" pitchFamily="34" charset="-122"/>
                 <a:cs typeface="Calibri" pitchFamily="34" charset="-120"/>
               </a:rPr>
-              <a:t>Vale's Brumadinho dam (2019), Equifax's 2017 breach, and Siemens' pre-2008 bribery culture all show how ESG mismanagement feeds directly into share-price drops and credit downgrades.</a:t>
+              <a:t>Equity is hit first and hardest because it is the residual claim. Debt follows only if payment capacity is impaired — yet all three companies below were downgraded.</a:t>
             </a:r>
             <a:endParaRPr lang="en-US" sz="1300" dirty="0"/>
           </a:p>
@@ -7202,8 +7539,8 @@
         </p:nvSpPr>
         <p:spPr>
           <a:xfrm>
-            <a:off x="320040" y="1188720"/>
-            <a:ext cx="2743200" cy="2194560"/>
+            <a:off x="320040" y="1170432"/>
+            <a:ext cx="2743200" cy="2103120"/>
           </a:xfrm>
           <a:prstGeom prst="rect">
             <a:avLst/>
@@ -7222,8 +7559,8 @@
         </p:nvSpPr>
         <p:spPr>
           <a:xfrm>
-            <a:off x="320040" y="1188720"/>
-            <a:ext cx="73152" cy="2194560"/>
+            <a:off x="320040" y="1170432"/>
+            <a:ext cx="73152" cy="2103120"/>
           </a:xfrm>
           <a:prstGeom prst="rect">
             <a:avLst/>
@@ -7242,7 +7579,7 @@
         </p:nvSpPr>
         <p:spPr>
           <a:xfrm>
-            <a:off x="457200" y="1234440"/>
+            <a:off x="457200" y="1216152"/>
             <a:ext cx="2514600" cy="256032"/>
           </a:xfrm>
           <a:prstGeom prst="rect">
@@ -7284,8 +7621,8 @@
         </p:nvSpPr>
         <p:spPr>
           <a:xfrm>
-            <a:off x="457200" y="1508760"/>
-            <a:ext cx="2514600" cy="1828800"/>
+            <a:off x="457200" y="1490472"/>
+            <a:ext cx="2514600" cy="1737360"/>
           </a:xfrm>
           <a:prstGeom prst="rect">
             <a:avLst/>
@@ -7312,7 +7649,7 @@
                 <a:ea typeface="Calibri" pitchFamily="34" charset="-122"/>
                 <a:cs typeface="Calibri" pitchFamily="34" charset="-120"/>
               </a:rPr>
-              <a:t>Climate (physical &amp; transition risk) · pollution &amp; waste · resource &amp; land use · biodiversity · stranded assets</a:t>
+              <a:t>Climate — physical and transition risk · pollution and waste · resource and land use · biodiversity · stranded assets</a:t>
             </a:r>
             <a:endParaRPr lang="en-US" sz="1200" dirty="0"/>
           </a:p>
@@ -7335,7 +7672,7 @@
                 <a:ea typeface="Calibri" pitchFamily="34" charset="-122"/>
                 <a:cs typeface="Calibri" pitchFamily="34" charset="-120"/>
               </a:rPr>
-              <a:t>Material for utilities, O&amp;G, mining, autos, airlines, food.</a:t>
+              <a:t>Most material in utilities, oil and gas, mining, autos, airlines, food.</a:t>
             </a:r>
             <a:endParaRPr lang="en-US" sz="1200" dirty="0"/>
           </a:p>
@@ -7349,8 +7686,8 @@
         </p:nvSpPr>
         <p:spPr>
           <a:xfrm>
-            <a:off x="3200400" y="1188720"/>
-            <a:ext cx="2743200" cy="2194560"/>
+            <a:off x="3200400" y="1170432"/>
+            <a:ext cx="2743200" cy="2103120"/>
           </a:xfrm>
           <a:prstGeom prst="rect">
             <a:avLst/>
@@ -7369,8 +7706,8 @@
         </p:nvSpPr>
         <p:spPr>
           <a:xfrm>
-            <a:off x="3200400" y="1188720"/>
-            <a:ext cx="73152" cy="2194560"/>
+            <a:off x="3200400" y="1170432"/>
+            <a:ext cx="73152" cy="2103120"/>
           </a:xfrm>
           <a:prstGeom prst="rect">
             <a:avLst/>
@@ -7389,7 +7726,7 @@
         </p:nvSpPr>
         <p:spPr>
           <a:xfrm>
-            <a:off x="3337560" y="1234440"/>
+            <a:off x="3337560" y="1216152"/>
             <a:ext cx="2514600" cy="256032"/>
           </a:xfrm>
           <a:prstGeom prst="rect">
@@ -7431,8 +7768,8 @@
         </p:nvSpPr>
         <p:spPr>
           <a:xfrm>
-            <a:off x="3337560" y="1508760"/>
-            <a:ext cx="2514600" cy="1828800"/>
+            <a:off x="3337560" y="1490472"/>
+            <a:ext cx="2514600" cy="1737360"/>
           </a:xfrm>
           <a:prstGeom prst="rect">
             <a:avLst/>
@@ -7459,7 +7796,7 @@
                 <a:ea typeface="Calibri" pitchFamily="34" charset="-122"/>
                 <a:cs typeface="Calibri" pitchFamily="34" charset="-120"/>
               </a:rPr>
-              <a:t>Human capital · data privacy · product safety · community relations · labour standards</a:t>
+              <a:t>Human capital · data privacy and security · product safety · community relations · labour standards</a:t>
             </a:r>
             <a:endParaRPr lang="en-US" sz="1200" dirty="0"/>
           </a:p>
@@ -7482,7 +7819,7 @@
                 <a:ea typeface="Calibri" pitchFamily="34" charset="-122"/>
                 <a:cs typeface="Calibri" pitchFamily="34" charset="-120"/>
               </a:rPr>
-              <a:t>Material for tech, healthcare, consumer, pharma.</a:t>
+              <a:t>Most material in tech, healthcare, consumer, pharma.</a:t>
             </a:r>
             <a:endParaRPr lang="en-US" sz="1200" dirty="0"/>
           </a:p>
@@ -7496,8 +7833,8 @@
         </p:nvSpPr>
         <p:spPr>
           <a:xfrm>
-            <a:off x="6080760" y="1188720"/>
-            <a:ext cx="2743200" cy="2194560"/>
+            <a:off x="6080760" y="1170432"/>
+            <a:ext cx="2743200" cy="2103120"/>
           </a:xfrm>
           <a:prstGeom prst="rect">
             <a:avLst/>
@@ -7516,8 +7853,8 @@
         </p:nvSpPr>
         <p:spPr>
           <a:xfrm>
-            <a:off x="6080760" y="1188720"/>
-            <a:ext cx="73152" cy="2194560"/>
+            <a:off x="6080760" y="1170432"/>
+            <a:ext cx="73152" cy="2103120"/>
           </a:xfrm>
           <a:prstGeom prst="rect">
             <a:avLst/>
@@ -7536,7 +7873,7 @@
         </p:nvSpPr>
         <p:spPr>
           <a:xfrm>
-            <a:off x="6217920" y="1234440"/>
+            <a:off x="6217920" y="1216152"/>
             <a:ext cx="2514600" cy="256032"/>
           </a:xfrm>
           <a:prstGeom prst="rect">
@@ -7578,8 +7915,8 @@
         </p:nvSpPr>
         <p:spPr>
           <a:xfrm>
-            <a:off x="6217920" y="1508760"/>
-            <a:ext cx="2514600" cy="1828800"/>
+            <a:off x="6217920" y="1490472"/>
+            <a:ext cx="2514600" cy="1737360"/>
           </a:xfrm>
           <a:prstGeom prst="rect">
             <a:avLst/>
@@ -7606,7 +7943,7 @@
                 <a:ea typeface="Calibri" pitchFamily="34" charset="-122"/>
                 <a:cs typeface="Calibri" pitchFamily="34" charset="-120"/>
               </a:rPr>
-              <a:t>Board independence · audit committee · executive pay · voting rights · bribery &amp; corruption</a:t>
+              <a:t>Board composition · audit committee · executive pay · voting rights · bribery and corruption</a:t>
             </a:r>
             <a:endParaRPr lang="en-US" sz="1200" dirty="0"/>
           </a:p>
@@ -7629,7 +7966,7 @@
                 <a:ea typeface="Calibri" pitchFamily="34" charset="-122"/>
                 <a:cs typeface="Calibri" pitchFamily="34" charset="-120"/>
               </a:rPr>
-              <a:t>Material for ALL issuers — and typically the most quantifiable of the three.</a:t>
+              <a:t>Material for every issuer, and the most quantifiable of the three — which is why analysts priced it first.</a:t>
             </a:r>
             <a:endParaRPr lang="en-US" sz="1200" dirty="0"/>
           </a:p>
@@ -7650,7 +7987,7 @@
           </p:nvPr>
         </p:nvGraphicFramePr>
         <p:xfrm>
-          <a:off x="320040" y="3520440"/>
+          <a:off x="320040" y="3383280"/>
           <a:ext cx="8503920" cy="914400"/>
         </p:xfrm>
         <a:graphic>
@@ -7658,9 +7995,9 @@
             <a:tbl>
               <a:tblPr/>
               <a:tblGrid>
-                <a:gridCol w="2560320"/>
-                <a:gridCol w="1645920"/>
-                <a:gridCol w="4297680"/>
+                <a:gridCol w="2377440"/>
+                <a:gridCol w="1463040"/>
+                <a:gridCol w="4663440"/>
               </a:tblGrid>
               <a:tr h="274320">
                 <a:tc>
@@ -7680,7 +8017,7 @@
                           <a:ea typeface="Trebuchet MS" pitchFamily="34" charset="-122"/>
                           <a:cs typeface="Trebuchet MS" pitchFamily="34" charset="-120"/>
                         </a:rPr>
-                        <a:t>Vignette</a:t>
+                        <a:t>Case in the curriculum</a:t>
                       </a:r>
                       <a:endParaRPr lang="en-US" sz="1100" dirty="0">
                         <a:latin typeface="Trebuchet MS" charset="0"/>
@@ -7730,7 +8067,7 @@
                           <a:ea typeface="Trebuchet MS" pitchFamily="34" charset="-122"/>
                           <a:cs typeface="Trebuchet MS" pitchFamily="34" charset="-120"/>
                         </a:rPr>
-                        <a:t>ESG category</a:t>
+                        <a:t>Factor</a:t>
                       </a:r>
                       <a:endParaRPr lang="en-US" sz="1100" dirty="0">
                         <a:latin typeface="Trebuchet MS" charset="0"/>
@@ -7780,7 +8117,7 @@
                           <a:ea typeface="Trebuchet MS" pitchFamily="34" charset="-122"/>
                           <a:cs typeface="Trebuchet MS" pitchFamily="34" charset="-120"/>
                         </a:rPr>
-                        <a:t>Financial impact</a:t>
+                        <a:t>What it cost</a:t>
                       </a:r>
                       <a:endParaRPr lang="en-US" sz="1100" dirty="0">
                         <a:latin typeface="Trebuchet MS" charset="0"/>
@@ -7932,7 +8269,7 @@
                           <a:ea typeface="Consolas" pitchFamily="34" charset="-122"/>
                           <a:cs typeface="Consolas" pitchFamily="34" charset="-120"/>
                         </a:rPr>
-                        <a:t>270 deaths · USD 7B settlement · debt briefly to speculative grade</a:t>
+                        <a:t>270 deaths, USD 7bn settlement, rating cut to junk</a:t>
                       </a:r>
                       <a:endParaRPr lang="en-US" sz="1100" dirty="0">
                         <a:latin typeface="Consolas" charset="0"/>
@@ -8084,7 +8421,7 @@
                           <a:ea typeface="Consolas" pitchFamily="34" charset="-122"/>
                           <a:cs typeface="Consolas" pitchFamily="34" charset="-120"/>
                         </a:rPr>
-                        <a:t>140M records stolen · hundreds of USD M in costs · multi-year lawsuits</a:t>
+                        <a:t>140m records stolen, hundreds of USD m in costs</a:t>
                       </a:r>
                       <a:endParaRPr lang="en-US" sz="1100" dirty="0">
                         <a:latin typeface="Consolas" charset="0"/>
@@ -8136,7 +8473,7 @@
                           <a:ea typeface="Calibri" pitchFamily="34" charset="-122"/>
                           <a:cs typeface="Calibri" pitchFamily="34" charset="-120"/>
                         </a:rPr>
-                        <a:t>Siemens — bribery, pre-2008</a:t>
+                        <a:t>Siemens — bribery, to 2008</a:t>
                       </a:r>
                       <a:endParaRPr lang="en-US" sz="1100" dirty="0">
                         <a:latin typeface="Calibri" charset="0"/>
@@ -8236,7 +8573,7 @@
                           <a:ea typeface="Consolas" pitchFamily="34" charset="-122"/>
                           <a:cs typeface="Consolas" pitchFamily="34" charset="-120"/>
                         </a:rPr>
-                        <a:t>EUR 3B+ fines &amp; disgorgement · board + CEO replaced · policy overhaul</a:t>
+                        <a:t>EUR 3bn+ fines, both board chairmen resigned</a:t>
                       </a:r>
                       <a:endParaRPr lang="en-US" sz="1100" dirty="0">
                         <a:latin typeface="Consolas" charset="0"/>
@@ -8603,7 +8940,7 @@
                 <a:ea typeface="Trebuchet MS" pitchFamily="34" charset="-122"/>
                 <a:cs typeface="Trebuchet MS" pitchFamily="34" charset="-120"/>
               </a:rPr>
-              <a:t>The corporation is a chain of principal–agent relationships — every link opens a potential conflict of interest and agency cost</a:t>
+              <a:t>The corporation is a chain of principal-agent relationships — every link opens a conflict of interest and an agency cost</a:t>
             </a:r>
             <a:endParaRPr lang="en-US" sz="1700" dirty="0"/>
           </a:p>
@@ -8707,7 +9044,7 @@
                 <a:ea typeface="Calibri" pitchFamily="34" charset="-122"/>
                 <a:cs typeface="Calibri" pitchFamily="34" charset="-120"/>
               </a:rPr>
-              <a:t>Source: CFA Institute, Curriculum Vol 3, Learning Module 3, pp. 70–76.</a:t>
+              <a:t>Source: CFA Institute, Curriculum Vol 3, Learning Module 3, §2 "Stakeholder Conflicts and Management", Exhibit 1, pp. 70–75.</a:t>
             </a:r>
             <a:endParaRPr lang="en-US" sz="750" dirty="0"/>
           </a:p>
@@ -8749,7 +9086,7 @@
                 <a:ea typeface="Calibri" pitchFamily="34" charset="-122"/>
                 <a:cs typeface="Calibri" pitchFamily="34" charset="-120"/>
               </a:rPr>
-              <a:t>Shareholders (principal) elect directors (agent); directors (now principal) hire managers (agent); each agent has information the principal does not. Agency costs fill the gap.</a:t>
+              <a:t>Shareholders (principal) elect directors (agent); directors (now principal) hire managers (agent). At every link the agent knows more than the principal.</a:t>
             </a:r>
             <a:endParaRPr lang="en-US" sz="1300" dirty="0"/>
           </a:p>
@@ -8763,8 +9100,8 @@
         </p:nvSpPr>
         <p:spPr>
           <a:xfrm>
-            <a:off x="320040" y="1234440"/>
-            <a:ext cx="8503920" cy="566928"/>
+            <a:off x="320040" y="1188720"/>
+            <a:ext cx="8503920" cy="502920"/>
           </a:xfrm>
           <a:prstGeom prst="rect">
             <a:avLst/>
@@ -8783,8 +9120,8 @@
         </p:nvSpPr>
         <p:spPr>
           <a:xfrm>
-            <a:off x="411480" y="1234440"/>
-            <a:ext cx="8321040" cy="566928"/>
+            <a:off x="411480" y="1188720"/>
+            <a:ext cx="8321040" cy="502920"/>
           </a:xfrm>
           <a:prstGeom prst="rect">
             <a:avLst/>
@@ -8811,7 +9148,7 @@
                 <a:ea typeface="Consolas" pitchFamily="34" charset="-122"/>
                 <a:cs typeface="Consolas" pitchFamily="34" charset="-120"/>
               </a:rPr>
-              <a:t>Agency cost  =  Direct monitoring cost  +  Forgone value (indirect)</a:t>
+              <a:t>Agency cost = direct monitoring cost + indirect forgone value</a:t>
             </a:r>
             <a:endParaRPr lang="en-US" sz="1800" dirty="0"/>
           </a:p>
@@ -8825,7 +9162,7 @@
         </p:nvSpPr>
         <p:spPr>
           <a:xfrm>
-            <a:off x="320040" y="1920240"/>
+            <a:off x="320040" y="1847088"/>
             <a:ext cx="8503920" cy="457200"/>
           </a:xfrm>
           <a:prstGeom prst="rect">
@@ -8845,7 +9182,7 @@
         </p:nvSpPr>
         <p:spPr>
           <a:xfrm>
-            <a:off x="320040" y="1920240"/>
+            <a:off x="320040" y="1847088"/>
             <a:ext cx="91440" cy="457200"/>
           </a:xfrm>
           <a:prstGeom prst="rect">
@@ -8865,7 +9202,7 @@
         </p:nvSpPr>
         <p:spPr>
           <a:xfrm>
-            <a:off x="502920" y="1920240"/>
+            <a:off x="502920" y="1847088"/>
             <a:ext cx="365760" cy="457200"/>
           </a:xfrm>
           <a:prstGeom prst="rect">
@@ -8907,7 +9244,7 @@
         </p:nvSpPr>
         <p:spPr>
           <a:xfrm>
-            <a:off x="868680" y="1956816"/>
+            <a:off x="868680" y="1883664"/>
             <a:ext cx="7863840" cy="205740"/>
           </a:xfrm>
           <a:prstGeom prst="rect">
@@ -8949,7 +9286,7 @@
         </p:nvSpPr>
         <p:spPr>
           <a:xfrm>
-            <a:off x="868680" y="2125980"/>
+            <a:off x="868680" y="2052828"/>
             <a:ext cx="7863840" cy="251460"/>
           </a:xfrm>
           <a:prstGeom prst="rect">
@@ -8977,7 +9314,7 @@
                 <a:ea typeface="Calibri" pitchFamily="34" charset="-122"/>
                 <a:cs typeface="Calibri" pitchFamily="34" charset="-120"/>
               </a:rPr>
-              <a:t>Managers shirk — too little monitoring, avoid hard decisions, distracted by side projects or charitable activities.</a:t>
+              <a:t>Shirking: too little monitoring, hard decisions ducked, attention split across outside boards and side projects.</a:t>
             </a:r>
             <a:endParaRPr lang="en-US" sz="1200" dirty="0"/>
           </a:p>
@@ -8991,7 +9328,7 @@
         </p:nvSpPr>
         <p:spPr>
           <a:xfrm>
-            <a:off x="320040" y="2414016"/>
+            <a:off x="320040" y="2340864"/>
             <a:ext cx="8503920" cy="457200"/>
           </a:xfrm>
           <a:prstGeom prst="rect">
@@ -9011,7 +9348,7 @@
         </p:nvSpPr>
         <p:spPr>
           <a:xfrm>
-            <a:off x="320040" y="2414016"/>
+            <a:off x="320040" y="2340864"/>
             <a:ext cx="91440" cy="457200"/>
           </a:xfrm>
           <a:prstGeom prst="rect">
@@ -9031,7 +9368,7 @@
         </p:nvSpPr>
         <p:spPr>
           <a:xfrm>
-            <a:off x="502920" y="2414016"/>
+            <a:off x="502920" y="2340864"/>
             <a:ext cx="365760" cy="457200"/>
           </a:xfrm>
           <a:prstGeom prst="rect">
@@ -9073,7 +9410,7 @@
         </p:nvSpPr>
         <p:spPr>
           <a:xfrm>
-            <a:off x="868680" y="2450592"/>
+            <a:off x="868680" y="2377440"/>
             <a:ext cx="7863840" cy="205740"/>
           </a:xfrm>
           <a:prstGeom prst="rect">
@@ -9115,7 +9452,7 @@
         </p:nvSpPr>
         <p:spPr>
           <a:xfrm>
-            <a:off x="868680" y="2619756"/>
+            <a:off x="868680" y="2546604"/>
             <a:ext cx="7863840" cy="251460"/>
           </a:xfrm>
           <a:prstGeom prst="rect">
@@ -9143,7 +9480,7 @@
                 <a:ea typeface="Calibri" pitchFamily="34" charset="-122"/>
                 <a:cs typeface="Calibri" pitchFamily="34" charset="-120"/>
               </a:rPr>
-              <a:t>All-cash pay → too risk-averse. Options-heavy pay → excessive risk-taking (asymmetric upside for the manager).</a:t>
+              <a:t>All-cash pay makes managers too cautious; options-heavy pay makes them reckless — the upside is theirs, not the downside.</a:t>
             </a:r>
             <a:endParaRPr lang="en-US" sz="1200" dirty="0"/>
           </a:p>
@@ -9157,7 +9494,7 @@
         </p:nvSpPr>
         <p:spPr>
           <a:xfrm>
-            <a:off x="320040" y="2907792"/>
+            <a:off x="320040" y="2834640"/>
             <a:ext cx="8503920" cy="457200"/>
           </a:xfrm>
           <a:prstGeom prst="rect">
@@ -9177,7 +9514,7 @@
         </p:nvSpPr>
         <p:spPr>
           <a:xfrm>
-            <a:off x="320040" y="2907792"/>
+            <a:off x="320040" y="2834640"/>
             <a:ext cx="91440" cy="457200"/>
           </a:xfrm>
           <a:prstGeom prst="rect">
@@ -9197,7 +9534,7 @@
         </p:nvSpPr>
         <p:spPr>
           <a:xfrm>
-            <a:off x="502920" y="2907792"/>
+            <a:off x="502920" y="2834640"/>
             <a:ext cx="365760" cy="457200"/>
           </a:xfrm>
           <a:prstGeom prst="rect">
@@ -9239,7 +9576,7 @@
         </p:nvSpPr>
         <p:spPr>
           <a:xfrm>
-            <a:off x="868680" y="2944368"/>
+            <a:off x="868680" y="2871216"/>
             <a:ext cx="7863840" cy="205740"/>
           </a:xfrm>
           <a:prstGeom prst="rect">
@@ -9281,7 +9618,7 @@
         </p:nvSpPr>
         <p:spPr>
           <a:xfrm>
-            <a:off x="868680" y="3113532"/>
+            <a:off x="868680" y="3040380"/>
             <a:ext cx="7863840" cy="251460"/>
           </a:xfrm>
           <a:prstGeom prst="rect">
@@ -9309,7 +9646,7 @@
                 <a:ea typeface="Calibri" pitchFamily="34" charset="-122"/>
                 <a:cs typeface="Calibri" pitchFamily="34" charset="-120"/>
               </a:rPr>
-              <a:t>Compensation tied to firm size ⇒ growth for growth's sake — acquisitions that destroy value but enlarge the CEO's fiefdom.</a:t>
+              <a:t>Pay and status track company size, so growth becomes the objective — acquisitions that enlarge the firm and destroy value.</a:t>
             </a:r>
             <a:endParaRPr lang="en-US" sz="1200" dirty="0"/>
           </a:p>
@@ -9323,7 +9660,7 @@
         </p:nvSpPr>
         <p:spPr>
           <a:xfrm>
-            <a:off x="320040" y="3401568"/>
+            <a:off x="320040" y="3328416"/>
             <a:ext cx="8503920" cy="457200"/>
           </a:xfrm>
           <a:prstGeom prst="rect">
@@ -9343,7 +9680,7 @@
         </p:nvSpPr>
         <p:spPr>
           <a:xfrm>
-            <a:off x="320040" y="3401568"/>
+            <a:off x="320040" y="3328416"/>
             <a:ext cx="91440" cy="457200"/>
           </a:xfrm>
           <a:prstGeom prst="rect">
@@ -9363,7 +9700,7 @@
         </p:nvSpPr>
         <p:spPr>
           <a:xfrm>
-            <a:off x="502920" y="3401568"/>
+            <a:off x="502920" y="3328416"/>
             <a:ext cx="365760" cy="457200"/>
           </a:xfrm>
           <a:prstGeom prst="rect">
@@ -9405,7 +9742,7 @@
         </p:nvSpPr>
         <p:spPr>
           <a:xfrm>
-            <a:off x="868680" y="3438144"/>
+            <a:off x="868680" y="3364992"/>
             <a:ext cx="7863840" cy="205740"/>
           </a:xfrm>
           <a:prstGeom prst="rect">
@@ -9447,7 +9784,7 @@
         </p:nvSpPr>
         <p:spPr>
           <a:xfrm>
-            <a:off x="868680" y="3607308"/>
+            <a:off x="868680" y="3534156"/>
             <a:ext cx="7863840" cy="251460"/>
           </a:xfrm>
           <a:prstGeom prst="rect">
@@ -9475,7 +9812,7 @@
                 <a:ea typeface="Calibri" pitchFamily="34" charset="-122"/>
                 <a:cs typeface="Calibri" pitchFamily="34" charset="-120"/>
               </a:rPr>
-              <a:t>Managers protect their jobs — poison pills, staggered boards, copying peers to avoid standing out, overly complex transactions.</a:t>
+              <a:t>Job protection: poison pills, staggered boards, copying peers, deals complex enough that only the incumbent can run them.</a:t>
             </a:r>
             <a:endParaRPr lang="en-US" sz="1200" dirty="0"/>
           </a:p>
@@ -9489,7 +9826,7 @@
         </p:nvSpPr>
         <p:spPr>
           <a:xfrm>
-            <a:off x="320040" y="3895344"/>
+            <a:off x="320040" y="3822192"/>
             <a:ext cx="8503920" cy="457200"/>
           </a:xfrm>
           <a:prstGeom prst="rect">
@@ -9509,7 +9846,7 @@
         </p:nvSpPr>
         <p:spPr>
           <a:xfrm>
-            <a:off x="320040" y="3895344"/>
+            <a:off x="320040" y="3822192"/>
             <a:ext cx="91440" cy="457200"/>
           </a:xfrm>
           <a:prstGeom prst="rect">
@@ -9529,7 +9866,7 @@
         </p:nvSpPr>
         <p:spPr>
           <a:xfrm>
-            <a:off x="502920" y="3895344"/>
+            <a:off x="502920" y="3822192"/>
             <a:ext cx="365760" cy="457200"/>
           </a:xfrm>
           <a:prstGeom prst="rect">
@@ -9571,7 +9908,7 @@
         </p:nvSpPr>
         <p:spPr>
           <a:xfrm>
-            <a:off x="868680" y="3931920"/>
+            <a:off x="868680" y="3858768"/>
             <a:ext cx="7863840" cy="205740"/>
           </a:xfrm>
           <a:prstGeom prst="rect">
@@ -9613,7 +9950,7 @@
         </p:nvSpPr>
         <p:spPr>
           <a:xfrm>
-            <a:off x="868680" y="4101084"/>
+            <a:off x="868680" y="4027932"/>
             <a:ext cx="7863840" cy="251460"/>
           </a:xfrm>
           <a:prstGeom prst="rect">
@@ -9641,9 +9978,51 @@
                 <a:ea typeface="Calibri" pitchFamily="34" charset="-122"/>
                 <a:cs typeface="Calibri" pitchFamily="34" charset="-120"/>
               </a:rPr>
-              <a:t>Corporate jets, club memberships, personal security, related-party transactions — cost borne by shareholders, enjoyed by the CEO.</a:t>
+              <a:t>Excessive perquisites — jets, clubs, personal security — and related-party deals. Owners pay, the manager consumes.</a:t>
             </a:r>
             <a:endParaRPr lang="en-US" sz="1200" dirty="0"/>
+          </a:p>
+        </p:txBody>
+      </p:sp>
+      <p:sp>
+        <p:nvSpPr>
+          <p:cNvPr id="36" name="Text 34"/>
+          <p:cNvSpPr txBox="1"/>
+          <p:nvPr/>
+        </p:nvSpPr>
+        <p:spPr>
+          <a:xfrm>
+            <a:off x="320040" y="4334256"/>
+            <a:ext cx="8503920" cy="237744"/>
+          </a:xfrm>
+          <a:prstGeom prst="rect">
+            <a:avLst/>
+          </a:prstGeom>
+          <a:noFill/>
+          <a:ln/>
+        </p:spPr>
+        <p:txBody>
+          <a:bodyPr wrap="square" lIns="508" tIns="508" rIns="508" bIns="508" rtlCol="0" anchor="ctr">
+            <a:normAutofit/>
+            <a:spAutoFit/>
+          </a:bodyPr>
+          <a:lstStyle/>
+          <a:p>
+            <a:pPr algn="l" indent="0" marL="0">
+              <a:buNone/>
+            </a:pPr>
+            <a:r>
+              <a:rPr lang="en-US" sz="1100" i="1" dirty="0">
+                <a:solidFill>
+                  <a:srgbClr val="6B7A8D"/>
+                </a:solidFill>
+                <a:latin typeface="Calibri" pitchFamily="34" charset="0"/>
+                <a:ea typeface="Calibri" pitchFamily="34" charset="-122"/>
+                <a:cs typeface="Calibri" pitchFamily="34" charset="-120"/>
+              </a:rPr>
+              <a:t>These five are the manager ↔ shareholder conflicts. Two further axes follow: controlling ↔ minority shareholders (next slide) and shareholders ↔ creditors.</a:t>
+            </a:r>
+            <a:endParaRPr lang="en-US" sz="1100" dirty="0"/>
           </a:p>
         </p:txBody>
       </p:sp>
@@ -9748,7 +10127,7 @@
                 <a:ea typeface="Trebuchet MS" pitchFamily="34" charset="-122"/>
                 <a:cs typeface="Trebuchet MS" pitchFamily="34" charset="-120"/>
               </a:rPr>
-              <a:t>Worked agency-cost example quantifies the cost of a corporate-jet habit — translating soft governance talk into a number</a:t>
+              <a:t>Pricing one perk turns soft governance talk into a valuation number — and shows why boards fix it for free</a:t>
             </a:r>
             <a:endParaRPr lang="en-US" sz="1700" dirty="0"/>
           </a:p>
@@ -9852,7 +10231,7 @@
                 <a:ea typeface="Calibri" pitchFamily="34" charset="-122"/>
                 <a:cs typeface="Calibri" pitchFamily="34" charset="-120"/>
               </a:rPr>
-              <a:t>Source: Illustrative firm ("Atlas Industrial"); agency-cost framework from CFA Vol 3 LM 3, pp. 70–76.</a:t>
+              <a:t>Source: Illustrative company ("Atlas Industrial"), built on the agency-cost framework in CFA Vol 3, Learning Module 3, pp. 70–71. Not a curriculum example.</a:t>
             </a:r>
             <a:endParaRPr lang="en-US" sz="750" dirty="0"/>
           </a:p>
@@ -9894,7 +10273,7 @@
                 <a:ea typeface="Calibri" pitchFamily="34" charset="-122"/>
                 <a:cs typeface="Calibri" pitchFamily="34" charset="-120"/>
               </a:rPr>
-              <a:t>Perks that look small on a P&amp;L capitalise into surprisingly large destroyers of shareholder value. A governance problem is a valuation problem.</a:t>
+              <a:t>Perks that look immaterial on a P&amp;L capitalise into large numbers. A governance problem is a valuation problem in disguise.</a:t>
             </a:r>
             <a:endParaRPr lang="en-US" sz="1300" dirty="0"/>
           </a:p>
@@ -9961,7 +10340,7 @@
                 <a:ea typeface="Trebuchet MS" pitchFamily="34" charset="-122"/>
                 <a:cs typeface="Trebuchet MS" pitchFamily="34" charset="-120"/>
               </a:rPr>
-              <a:t>ATLAS INDUSTRIAL — CEO PRIVATE-JET PERK</a:t>
+              <a:t>ATLAS INDUSTRIAL — PRICING A SELF-DEALING PERK</a:t>
             </a:r>
             <a:endParaRPr lang="en-US" sz="1100" dirty="0"/>
           </a:p>
@@ -10003,7 +10382,7 @@
                 <a:ea typeface="Calibri" pitchFamily="34" charset="-122"/>
                 <a:cs typeface="Calibri" pitchFamily="34" charset="-120"/>
               </a:rPr>
-              <a:t>Atlas CEO uses a company-leased private jet for personal travel. The board does not require him to reimburse. Atlas' cost of equity is 10%; marginal tax rate 25%. Estimate the present value cost to shareholders — the agency cost of debt-free empire-building.</a:t>
+              <a:t>The CEO of Atlas uses a company-leased jet for personal travel and the board does not require reimbursement. This is self-dealing — excessive perquisites — not empire building. Atlas' cost of equity is 10% and its marginal tax rate 25%. What is the perk worth to shareholders?</a:t>
             </a:r>
             <a:endParaRPr lang="en-US" sz="1200" dirty="0"/>
           </a:p>
@@ -10065,7 +10444,7 @@
                 <a:ea typeface="Calibri" pitchFamily="34" charset="-122"/>
                 <a:cs typeface="Calibri" pitchFamily="34" charset="-120"/>
               </a:rPr>
-              <a:t>Annual jet cost: lease USD 3.2M + fuel &amp; crew USD 0.8M = USD 4.0M pre-tax
+              <a:t>Annual cost: USD 3.2m lease + USD 0.8m fuel and crew = USD 4.0m pre-tax
 </a:t>
             </a:r>
             <a:pPr indent="0" marL="0">
@@ -10100,7 +10479,7 @@
                 <a:ea typeface="Calibri" pitchFamily="34" charset="-122"/>
                 <a:cs typeface="Calibri" pitchFamily="34" charset="-120"/>
               </a:rPr>
-              <a:t>After-tax cost to shareholders: 4.0 × (1 − 0.25) = USD 3.0M per year
+              <a:t>The company deducts it, so owners bear 4.0 × (1 − 0.25) = USD 3.0m a year after tax
 </a:t>
             </a:r>
             <a:pPr indent="0" marL="0">
@@ -10135,7 +10514,7 @@
                 <a:ea typeface="Calibri" pitchFamily="34" charset="-122"/>
                 <a:cs typeface="Calibri" pitchFamily="34" charset="-120"/>
               </a:rPr>
-              <a:t>Capitalize the perpetuity at cost of equity 10%: PV = 3.0 / 0.10 = USD 30M
+              <a:t>Capitalise the perpetuity at the cost of equity: PV = 3.0 / 0.10 = USD 30m
 </a:t>
             </a:r>
             <a:pPr indent="0" marL="0">
@@ -10170,7 +10549,7 @@
                 <a:ea typeface="Calibri" pitchFamily="34" charset="-122"/>
                 <a:cs typeface="Calibri" pitchFamily="34" charset="-120"/>
               </a:rPr>
-              <a:t>If Atlas has 15M shares outstanding, the perk destroys USD 2.00 per share of intrinsic value
+              <a:t>On 15m shares that is USD 2.00 per share transferred from owners to one executive
 </a:t>
             </a:r>
             <a:pPr indent="0" marL="0">
@@ -10205,7 +10584,7 @@
                 <a:ea typeface="Calibri" pitchFamily="34" charset="-122"/>
                 <a:cs typeface="Calibri" pitchFamily="34" charset="-120"/>
               </a:rPr>
-              <a:t>Board adds a clause requiring CEO to reimburse personal flights at charter rates → USD 2.5M/yr recovered → USD 25M of value restored</a:t>
+              <a:t>Fix: charge personal legs at charter rates — 2.5m pre-tax is 1.875m after tax, PV 18.75m, USD 1.25 a share</a:t>
             </a:r>
             <a:endParaRPr lang="en-US" sz="1200" dirty="0"/>
           </a:p>
@@ -10267,7 +10646,7 @@
                 <a:ea typeface="Consolas" pitchFamily="34" charset="-122"/>
                 <a:cs typeface="Consolas" pitchFamily="34" charset="-120"/>
               </a:rPr>
-              <a:t>PV agency cost ≈ USD 30M — a governance fix with zero operational downside.</a:t>
+              <a:t>PV of the agency cost is about USD 30m; the fix recovers USD 18.8m of it.</a:t>
             </a:r>
             <a:endParaRPr lang="en-US" sz="1150" dirty="0"/>
           </a:p>
@@ -10374,7 +10753,7 @@
                 <a:ea typeface="Trebuchet MS" pitchFamily="34" charset="-122"/>
                 <a:cs typeface="Trebuchet MS" pitchFamily="34" charset="-120"/>
               </a:rPr>
-              <a:t>Concentrated ownership, dual-class shares, and staggered boards each shift power toward insiders — sometimes at the expense of minority holders</a:t>
+              <a:t>Concentrated ownership and dual-class shares shift power to insiders — and move the conflict from manager-versus-owner to majority-versus-minority</a:t>
             </a:r>
             <a:endParaRPr lang="en-US" sz="1600" dirty="0"/>
           </a:p>
@@ -10478,7 +10857,7 @@
                 <a:ea typeface="Calibri" pitchFamily="34" charset="-122"/>
                 <a:cs typeface="Calibri" pitchFamily="34" charset="-120"/>
               </a:rPr>
-              <a:t>Source: CFA Institute, Curriculum Vol 3, Learning Module 3, "Controlling and Minority Shareholder Relationships", pp. 72–74.</a:t>
+              <a:t>Source: CFA Institute, Curriculum Vol 3, Learning Module 3, "Controlling and Minority Shareholder Relationships", pp. 72–73.</a:t>
             </a:r>
             <a:endParaRPr lang="en-US" sz="750" dirty="0"/>
           </a:p>
@@ -10520,7 +10899,7 @@
                 <a:ea typeface="Calibri" pitchFamily="34" charset="-122"/>
                 <a:cs typeface="Calibri" pitchFamily="34" charset="-120"/>
               </a:rPr>
-              <a:t>CFA Institute has long advocated against dual-class structures — they hand one group disproportionate power over the will of the majority.</a:t>
+              <a:t>CFA Institute has long advocated against dual-class structures: they let one group override the will of the majority. Where they are legal, it demands clear disclosure.</a:t>
             </a:r>
             <a:endParaRPr lang="en-US" sz="1300" dirty="0"/>
           </a:p>
@@ -10644,7 +11023,7 @@
                 <a:ea typeface="Calibri" pitchFamily="34" charset="-122"/>
                 <a:cs typeface="Calibri" pitchFamily="34" charset="-120"/>
               </a:rPr>
-              <a:t>No single shareholder controls. Main agency conflict is shareholder ↔ manager. Activists can force change via proxy contest.</a:t>
+              <a:t>No single holder controls. The live conflict is shareholder ↔ manager. An activist can force change through a proxy contest.</a:t>
             </a:r>
             <a:endParaRPr lang="en-US" sz="1200" dirty="0"/>
           </a:p>
@@ -10768,7 +11147,7 @@
                 <a:ea typeface="Calibri" pitchFamily="34" charset="-122"/>
                 <a:cs typeface="Calibri" pitchFamily="34" charset="-120"/>
               </a:rPr>
-              <a:t>Founder / family / PE holds &gt; 30%. Main conflict shifts to majority ↔ minority shareholders. Buffers the firm from hostile takeover.</a:t>
+              <a:t>A founder, family, PE house or the state holds a controlling stake. The conflict shifts to controlling ↔ minority. It also buffers the firm from a hostile bid.</a:t>
             </a:r>
             <a:endParaRPr lang="en-US" sz="1200" dirty="0"/>
           </a:p>
@@ -10892,7 +11271,7 @@
                 <a:ea typeface="Calibri" pitchFamily="34" charset="-122"/>
                 <a:cs typeface="Calibri" pitchFamily="34" charset="-120"/>
               </a:rPr>
-              <a:t>Class A (public): 1 vote / share. Class B (insiders): 10+ votes / share. Small economic stake controls corporate destiny.</a:t>
+              <a:t>Class A, listed, one vote. Class B, insiders, many votes. A small economic stake controls the company — and once adopted the structure is very hard to unwind.</a:t>
             </a:r>
             <a:endParaRPr lang="en-US" sz="1200" dirty="0"/>
           </a:p>
@@ -10959,7 +11338,7 @@
                 <a:ea typeface="Trebuchet MS" pitchFamily="34" charset="-122"/>
                 <a:cs typeface="Trebuchet MS" pitchFamily="34" charset="-120"/>
               </a:rPr>
-              <a:t>MAGNA INTERNATIONAL — HOW 3% CAN CONTROL 75%</a:t>
+              <a:t>MAGNA INTERNATIONAL — HOW 3% OF THE SHARES CONTROLLED 75% OF THE VOTES</a:t>
             </a:r>
             <a:endParaRPr lang="en-US" sz="1100" dirty="0"/>
           </a:p>
@@ -11001,7 +11380,7 @@
                 <a:ea typeface="Calibri" pitchFamily="34" charset="-122"/>
                 <a:cs typeface="Calibri" pitchFamily="34" charset="-120"/>
               </a:rPr>
-              <a:t>Frank Stronach's family owned ~3% of Magna's total shares but 75% of voting rights via Class B shares (500 votes/share).</a:t>
+              <a:t>Class A carried one vote, Class B carried 500. Frank Stronach and his family held about 3% of Magna's shares and 75% of the votes, while drawing consulting fees, salaries, bonuses and options through a weak share price.</a:t>
             </a:r>
             <a:endParaRPr lang="en-US" sz="1200" dirty="0"/>
           </a:p>
@@ -11063,7 +11442,7 @@
                 <a:ea typeface="Consolas" pitchFamily="34" charset="-122"/>
                 <a:cs typeface="Consolas" pitchFamily="34" charset="-120"/>
               </a:rPr>
-              <a:t>Shareholders bought the founder out for CAD 870M over 5 years to collapse the dual-class structure.</a:t>
+              <a:t>Shareholders voted to collapse to one class — and paid CAD 870m over five years.</a:t>
             </a:r>
             <a:endParaRPr lang="en-US" sz="1150" dirty="0"/>
           </a:p>
@@ -11170,7 +11549,7 @@
                 <a:ea typeface="Trebuchet MS" pitchFamily="34" charset="-122"/>
                 <a:cs typeface="Trebuchet MS" pitchFamily="34" charset="-120"/>
               </a:rPr>
-              <a:t>Governance mechanisms divide into five categories — each addressing a specific principal–agent conflict</a:t>
+              <a:t>Governance mechanisms fall into seven categories — each one built for a specific principal-agent conflict</a:t>
             </a:r>
             <a:endParaRPr lang="en-US" sz="1700" dirty="0"/>
           </a:p>
@@ -11274,7 +11653,7 @@
                 <a:ea typeface="Calibri" pitchFamily="34" charset="-122"/>
                 <a:cs typeface="Calibri" pitchFamily="34" charset="-120"/>
               </a:rPr>
-              <a:t>Source: CFA Institute, Curriculum Vol 3, Learning Module 3, "Corporate Governance Mechanisms", pp. 76–84.</a:t>
+              <a:t>Source: CFA Institute, Curriculum Vol 3, Learning Module 3, §3 "Corporate Governance Mechanisms", pp. 76–83.</a:t>
             </a:r>
             <a:endParaRPr lang="en-US" sz="750" dirty="0"/>
           </a:p>
@@ -11316,7 +11695,7 @@
                 <a:ea typeface="Calibri" pitchFamily="34" charset="-122"/>
                 <a:cs typeface="Calibri" pitchFamily="34" charset="-120"/>
               </a:rPr>
-              <a:t>Reporting shrinks information asymmetry; shareholder &amp; creditor mechanisms police the contract; board &amp; government mechanisms set the rules of the game.</a:t>
+              <a:t>Reporting shrinks information asymmetry; shareholder, creditor and employee mechanisms police the contract; board and government mechanisms set the rules of the game.</a:t>
             </a:r>
             <a:endParaRPr lang="en-US" sz="1300" dirty="0"/>
           </a:p>
@@ -11337,7 +11716,7 @@
           </p:nvPr>
         </p:nvGraphicFramePr>
         <p:xfrm>
-          <a:off x="320040" y="1188720"/>
+          <a:off x="320040" y="1170432"/>
           <a:ext cx="8503920" cy="914400"/>
         </p:xfrm>
         <a:graphic>
@@ -11346,8 +11725,8 @@
               <a:tblPr/>
               <a:tblGrid>
                 <a:gridCol w="2103120"/>
-                <a:gridCol w="4297680"/>
-                <a:gridCol w="2103120"/>
+                <a:gridCol w="4206240"/>
+                <a:gridCol w="2194560"/>
               </a:tblGrid>
               <a:tr h="274320">
                 <a:tc>
@@ -11467,7 +11846,7 @@
                           <a:ea typeface="Trebuchet MS" pitchFamily="34" charset="-122"/>
                           <a:cs typeface="Trebuchet MS" pitchFamily="34" charset="-120"/>
                         </a:rPr>
-                        <a:t>Targets which conflict?</a:t>
+                        <a:t>Conflict it targets</a:t>
                       </a:r>
                       <a:endParaRPr lang="en-US" sz="1100" dirty="0">
                         <a:latin typeface="Trebuchet MS" charset="0"/>
@@ -11569,7 +11948,7 @@
                           <a:ea typeface="Consolas" pitchFamily="34" charset="-122"/>
                           <a:cs typeface="Consolas" pitchFamily="34" charset="-120"/>
                         </a:rPr>
-                        <a:t>Audited F/S · proxy · disclosures · IR</a:t>
+                        <a:t>Audited accounts, proxy, disclosure, IR</a:t>
                       </a:r>
                       <a:endParaRPr lang="en-US" sz="1100" dirty="0">
                         <a:latin typeface="Consolas" charset="0"/>
@@ -11721,7 +12100,7 @@
                           <a:ea typeface="Consolas" pitchFamily="34" charset="-122"/>
                           <a:cs typeface="Consolas" pitchFamily="34" charset="-120"/>
                         </a:rPr>
-                        <a:t>AGM · EGM · proxy contest · say-on-pay · derivative lawsuit · activism</a:t>
+                        <a:t>AGM, EGM, proxy contest, say-on-pay, activism</a:t>
                       </a:r>
                       <a:endParaRPr lang="en-US" sz="1100" dirty="0">
                         <a:latin typeface="Consolas" charset="0"/>
@@ -11873,7 +12252,7 @@
                           <a:ea typeface="Consolas" pitchFamily="34" charset="-122"/>
                           <a:cs typeface="Consolas" pitchFamily="34" charset="-120"/>
                         </a:rPr>
-                        <a:t>Bond indenture · covenants · ad hoc committee · trustee</a:t>
+                        <a:t>Indenture, covenants, trustee, ad hoc cttee</a:t>
                       </a:r>
                       <a:endParaRPr lang="en-US" sz="1100" dirty="0">
                         <a:latin typeface="Consolas" charset="0"/>
@@ -11923,7 +12302,7 @@
                           <a:ea typeface="Consolas" pitchFamily="34" charset="-122"/>
                           <a:cs typeface="Consolas" pitchFamily="34" charset="-120"/>
                         </a:rPr>
-                        <a:t>Shareholder ↔ debtholder</a:t>
+                        <a:t>Shareholder ↔ creditor</a:t>
                       </a:r>
                       <a:endParaRPr lang="en-US" sz="1100" dirty="0">
                         <a:latin typeface="Consolas" charset="0"/>
@@ -12025,7 +12404,7 @@
                           <a:ea typeface="Consolas" pitchFamily="34" charset="-122"/>
                           <a:cs typeface="Consolas" pitchFamily="34" charset="-120"/>
                         </a:rPr>
-                        <a:t>Audit / Nom / Comp committees · LTIPs · independent chairman</a:t>
+                        <a:t>Audit / Nom / Comp committees, LTIPs</a:t>
                       </a:r>
                       <a:endParaRPr lang="en-US" sz="1100" dirty="0">
                         <a:latin typeface="Consolas" charset="0"/>
@@ -12076,6 +12455,310 @@
                           <a:cs typeface="Consolas" pitchFamily="34" charset="-120"/>
                         </a:rPr>
                         <a:t>Manager ↔ shareholder</a:t>
+                      </a:r>
+                      <a:endParaRPr lang="en-US" sz="1100" dirty="0">
+                        <a:latin typeface="Consolas" charset="0"/>
+                        <a:ea typeface="Consolas" charset="0"/>
+                        <a:cs typeface="Consolas" charset="0"/>
+                      </a:endParaRPr>
+                    </a:p>
+                  </a:txBody>
+                  <a:tcPr marL="91440" marR="91440" marT="45720" marB="45720" anchor="ctr">
+                    <a:lnL w="0" cap="flat" cmpd="sng" algn="ctr">
+                      <a:noFill/>
+                    </a:lnL>
+                    <a:lnR w="0" cap="flat" cmpd="sng" algn="ctr">
+                      <a:noFill/>
+                    </a:lnR>
+                    <a:lnT w="0" cap="flat" cmpd="sng" algn="ctr">
+                      <a:noFill/>
+                    </a:lnT>
+                    <a:lnB w="3175" cap="flat" cmpd="sng" algn="ctr">
+                      <a:solidFill>
+                        <a:srgbClr val="D0D8E8"/>
+                      </a:solidFill>
+                      <a:prstDash val="solid"/>
+                      <a:round/>
+                      <a:headEnd type="none" w="med" len="med"/>
+                      <a:tailEnd type="none" w="med" len="med"/>
+                    </a:lnB>
+                    <a:solidFill>
+                      <a:srgbClr val="F5F7FA"/>
+                    </a:solidFill>
+                  </a:tcPr>
+                </a:tc>
+              </a:tr>
+              <a:tr h="274320">
+                <a:tc>
+                  <a:txBody>
+                    <a:bodyPr/>
+                    <a:lstStyle/>
+                    <a:p>
+                      <a:pPr algn="l" indent="0" marL="0">
+                        <a:buNone/>
+                      </a:pPr>
+                      <a:r>
+                        <a:rPr lang="en-US" sz="1100" dirty="0">
+                          <a:solidFill>
+                            <a:srgbClr val="334155"/>
+                          </a:solidFill>
+                          <a:latin typeface="Calibri" pitchFamily="34" charset="0"/>
+                          <a:ea typeface="Calibri" pitchFamily="34" charset="-122"/>
+                          <a:cs typeface="Calibri" pitchFamily="34" charset="-120"/>
+                        </a:rPr>
+                        <a:t>Employee mechanisms</a:t>
+                      </a:r>
+                      <a:endParaRPr lang="en-US" sz="1100" dirty="0">
+                        <a:latin typeface="Calibri" charset="0"/>
+                        <a:ea typeface="Calibri" charset="0"/>
+                        <a:cs typeface="Calibri" charset="0"/>
+                      </a:endParaRPr>
+                    </a:p>
+                  </a:txBody>
+                  <a:tcPr marL="91440" marR="91440" marT="45720" marB="45720" anchor="ctr">
+                    <a:lnL w="0" cap="flat" cmpd="sng" algn="ctr">
+                      <a:noFill/>
+                    </a:lnL>
+                    <a:lnR w="0" cap="flat" cmpd="sng" algn="ctr">
+                      <a:noFill/>
+                    </a:lnR>
+                    <a:lnT w="0" cap="flat" cmpd="sng" algn="ctr">
+                      <a:noFill/>
+                    </a:lnT>
+                    <a:lnB w="3175" cap="flat" cmpd="sng" algn="ctr">
+                      <a:solidFill>
+                        <a:srgbClr val="D0D8E8"/>
+                      </a:solidFill>
+                      <a:prstDash val="solid"/>
+                      <a:round/>
+                      <a:headEnd type="none" w="med" len="med"/>
+                      <a:tailEnd type="none" w="med" len="med"/>
+                    </a:lnB>
+                    <a:solidFill>
+                      <a:srgbClr val="FFFFFF"/>
+                    </a:solidFill>
+                  </a:tcPr>
+                </a:tc>
+                <a:tc>
+                  <a:txBody>
+                    <a:bodyPr/>
+                    <a:lstStyle/>
+                    <a:p>
+                      <a:pPr algn="ctr" indent="0" marL="0">
+                        <a:buNone/>
+                      </a:pPr>
+                      <a:r>
+                        <a:rPr lang="en-US" sz="1100" dirty="0">
+                          <a:solidFill>
+                            <a:srgbClr val="334155"/>
+                          </a:solidFill>
+                          <a:latin typeface="Consolas" pitchFamily="34" charset="0"/>
+                          <a:ea typeface="Consolas" pitchFamily="34" charset="-122"/>
+                          <a:cs typeface="Consolas" pitchFamily="34" charset="-120"/>
+                        </a:rPr>
+                        <a:t>Labour law, unions, contracts, ESOPs</a:t>
+                      </a:r>
+                      <a:endParaRPr lang="en-US" sz="1100" dirty="0">
+                        <a:latin typeface="Consolas" charset="0"/>
+                        <a:ea typeface="Consolas" charset="0"/>
+                        <a:cs typeface="Consolas" charset="0"/>
+                      </a:endParaRPr>
+                    </a:p>
+                  </a:txBody>
+                  <a:tcPr marL="91440" marR="91440" marT="45720" marB="45720" anchor="ctr">
+                    <a:lnL w="0" cap="flat" cmpd="sng" algn="ctr">
+                      <a:noFill/>
+                    </a:lnL>
+                    <a:lnR w="0" cap="flat" cmpd="sng" algn="ctr">
+                      <a:noFill/>
+                    </a:lnR>
+                    <a:lnT w="0" cap="flat" cmpd="sng" algn="ctr">
+                      <a:noFill/>
+                    </a:lnT>
+                    <a:lnB w="3175" cap="flat" cmpd="sng" algn="ctr">
+                      <a:solidFill>
+                        <a:srgbClr val="D0D8E8"/>
+                      </a:solidFill>
+                      <a:prstDash val="solid"/>
+                      <a:round/>
+                      <a:headEnd type="none" w="med" len="med"/>
+                      <a:tailEnd type="none" w="med" len="med"/>
+                    </a:lnB>
+                    <a:solidFill>
+                      <a:srgbClr val="FFFFFF"/>
+                    </a:solidFill>
+                  </a:tcPr>
+                </a:tc>
+                <a:tc>
+                  <a:txBody>
+                    <a:bodyPr/>
+                    <a:lstStyle/>
+                    <a:p>
+                      <a:pPr algn="ctr" indent="0" marL="0">
+                        <a:buNone/>
+                      </a:pPr>
+                      <a:r>
+                        <a:rPr lang="en-US" sz="1100" dirty="0">
+                          <a:solidFill>
+                            <a:srgbClr val="334155"/>
+                          </a:solidFill>
+                          <a:latin typeface="Consolas" pitchFamily="34" charset="0"/>
+                          <a:ea typeface="Consolas" pitchFamily="34" charset="-122"/>
+                          <a:cs typeface="Consolas" pitchFamily="34" charset="-120"/>
+                        </a:rPr>
+                        <a:t>Firm ↔ employees</a:t>
+                      </a:r>
+                      <a:endParaRPr lang="en-US" sz="1100" dirty="0">
+                        <a:latin typeface="Consolas" charset="0"/>
+                        <a:ea typeface="Consolas" charset="0"/>
+                        <a:cs typeface="Consolas" charset="0"/>
+                      </a:endParaRPr>
+                    </a:p>
+                  </a:txBody>
+                  <a:tcPr marL="91440" marR="91440" marT="45720" marB="45720" anchor="ctr">
+                    <a:lnL w="0" cap="flat" cmpd="sng" algn="ctr">
+                      <a:noFill/>
+                    </a:lnL>
+                    <a:lnR w="0" cap="flat" cmpd="sng" algn="ctr">
+                      <a:noFill/>
+                    </a:lnR>
+                    <a:lnT w="0" cap="flat" cmpd="sng" algn="ctr">
+                      <a:noFill/>
+                    </a:lnT>
+                    <a:lnB w="3175" cap="flat" cmpd="sng" algn="ctr">
+                      <a:solidFill>
+                        <a:srgbClr val="D0D8E8"/>
+                      </a:solidFill>
+                      <a:prstDash val="solid"/>
+                      <a:round/>
+                      <a:headEnd type="none" w="med" len="med"/>
+                      <a:tailEnd type="none" w="med" len="med"/>
+                    </a:lnB>
+                    <a:solidFill>
+                      <a:srgbClr val="FFFFFF"/>
+                    </a:solidFill>
+                  </a:tcPr>
+                </a:tc>
+              </a:tr>
+              <a:tr h="274320">
+                <a:tc>
+                  <a:txBody>
+                    <a:bodyPr/>
+                    <a:lstStyle/>
+                    <a:p>
+                      <a:pPr algn="l" indent="0" marL="0">
+                        <a:buNone/>
+                      </a:pPr>
+                      <a:r>
+                        <a:rPr lang="en-US" sz="1100" dirty="0">
+                          <a:solidFill>
+                            <a:srgbClr val="334155"/>
+                          </a:solidFill>
+                          <a:latin typeface="Calibri" pitchFamily="34" charset="0"/>
+                          <a:ea typeface="Calibri" pitchFamily="34" charset="-122"/>
+                          <a:cs typeface="Calibri" pitchFamily="34" charset="-120"/>
+                        </a:rPr>
+                        <a:t>Customer &amp; supplier</a:t>
+                      </a:r>
+                      <a:endParaRPr lang="en-US" sz="1100" dirty="0">
+                        <a:latin typeface="Calibri" charset="0"/>
+                        <a:ea typeface="Calibri" charset="0"/>
+                        <a:cs typeface="Calibri" charset="0"/>
+                      </a:endParaRPr>
+                    </a:p>
+                  </a:txBody>
+                  <a:tcPr marL="91440" marR="91440" marT="45720" marB="45720" anchor="ctr">
+                    <a:lnL w="0" cap="flat" cmpd="sng" algn="ctr">
+                      <a:noFill/>
+                    </a:lnL>
+                    <a:lnR w="0" cap="flat" cmpd="sng" algn="ctr">
+                      <a:noFill/>
+                    </a:lnR>
+                    <a:lnT w="0" cap="flat" cmpd="sng" algn="ctr">
+                      <a:noFill/>
+                    </a:lnT>
+                    <a:lnB w="3175" cap="flat" cmpd="sng" algn="ctr">
+                      <a:solidFill>
+                        <a:srgbClr val="D0D8E8"/>
+                      </a:solidFill>
+                      <a:prstDash val="solid"/>
+                      <a:round/>
+                      <a:headEnd type="none" w="med" len="med"/>
+                      <a:tailEnd type="none" w="med" len="med"/>
+                    </a:lnB>
+                    <a:solidFill>
+                      <a:srgbClr val="F5F7FA"/>
+                    </a:solidFill>
+                  </a:tcPr>
+                </a:tc>
+                <a:tc>
+                  <a:txBody>
+                    <a:bodyPr/>
+                    <a:lstStyle/>
+                    <a:p>
+                      <a:pPr algn="ctr" indent="0" marL="0">
+                        <a:buNone/>
+                      </a:pPr>
+                      <a:r>
+                        <a:rPr lang="en-US" sz="1100" dirty="0">
+                          <a:solidFill>
+                            <a:srgbClr val="334155"/>
+                          </a:solidFill>
+                          <a:latin typeface="Consolas" pitchFamily="34" charset="0"/>
+                          <a:ea typeface="Consolas" pitchFamily="34" charset="-122"/>
+                          <a:cs typeface="Consolas" pitchFamily="34" charset="-120"/>
+                        </a:rPr>
+                        <a:t>Commercial contracts, warranties, recourse</a:t>
+                      </a:r>
+                      <a:endParaRPr lang="en-US" sz="1100" dirty="0">
+                        <a:latin typeface="Consolas" charset="0"/>
+                        <a:ea typeface="Consolas" charset="0"/>
+                        <a:cs typeface="Consolas" charset="0"/>
+                      </a:endParaRPr>
+                    </a:p>
+                  </a:txBody>
+                  <a:tcPr marL="91440" marR="91440" marT="45720" marB="45720" anchor="ctr">
+                    <a:lnL w="0" cap="flat" cmpd="sng" algn="ctr">
+                      <a:noFill/>
+                    </a:lnL>
+                    <a:lnR w="0" cap="flat" cmpd="sng" algn="ctr">
+                      <a:noFill/>
+                    </a:lnR>
+                    <a:lnT w="0" cap="flat" cmpd="sng" algn="ctr">
+                      <a:noFill/>
+                    </a:lnT>
+                    <a:lnB w="3175" cap="flat" cmpd="sng" algn="ctr">
+                      <a:solidFill>
+                        <a:srgbClr val="D0D8E8"/>
+                      </a:solidFill>
+                      <a:prstDash val="solid"/>
+                      <a:round/>
+                      <a:headEnd type="none" w="med" len="med"/>
+                      <a:tailEnd type="none" w="med" len="med"/>
+                    </a:lnB>
+                    <a:solidFill>
+                      <a:srgbClr val="F5F7FA"/>
+                    </a:solidFill>
+                  </a:tcPr>
+                </a:tc>
+                <a:tc>
+                  <a:txBody>
+                    <a:bodyPr/>
+                    <a:lstStyle/>
+                    <a:p>
+                      <a:pPr algn="ctr" indent="0" marL="0">
+                        <a:buNone/>
+                      </a:pPr>
+                      <a:r>
+                        <a:rPr lang="en-US" sz="1100" dirty="0">
+                          <a:solidFill>
+                            <a:srgbClr val="334155"/>
+                          </a:solidFill>
+                          <a:latin typeface="Consolas" pitchFamily="34" charset="0"/>
+                          <a:ea typeface="Consolas" pitchFamily="34" charset="-122"/>
+                          <a:cs typeface="Consolas" pitchFamily="34" charset="-120"/>
+                        </a:rPr>
+                        <a:t>Firm ↔ counterparties</a:t>
                       </a:r>
                       <a:endParaRPr lang="en-US" sz="1100" dirty="0">
                         <a:latin typeface="Consolas" charset="0"/>
@@ -12177,7 +12860,7 @@
                           <a:ea typeface="Consolas" pitchFamily="34" charset="-122"/>
                           <a:cs typeface="Consolas" pitchFamily="34" charset="-120"/>
                         </a:rPr>
-                        <a:t>Securities law · comply-or-explain codes · listing rules · SOX</a:t>
+                        <a:t>Securities law, governance codes, SOX</a:t>
                       </a:r>
                       <a:endParaRPr lang="en-US" sz="1100" dirty="0">
                         <a:latin typeface="Consolas" charset="0"/>
@@ -12273,8 +12956,8 @@
         </p:nvSpPr>
         <p:spPr>
           <a:xfrm>
-            <a:off x="320040" y="3520440"/>
-            <a:ext cx="8503920" cy="822960"/>
+            <a:off x="320040" y="3474720"/>
+            <a:ext cx="8503920" cy="868680"/>
           </a:xfrm>
           <a:prstGeom prst="rect">
             <a:avLst/>
@@ -12293,8 +12976,8 @@
         </p:nvSpPr>
         <p:spPr>
           <a:xfrm>
-            <a:off x="320040" y="3520440"/>
-            <a:ext cx="73152" cy="822960"/>
+            <a:off x="320040" y="3474720"/>
+            <a:ext cx="73152" cy="868680"/>
           </a:xfrm>
           <a:prstGeom prst="rect">
             <a:avLst/>
@@ -12313,7 +12996,7 @@
         </p:nvSpPr>
         <p:spPr>
           <a:xfrm>
-            <a:off x="457200" y="3566160"/>
+            <a:off x="457200" y="3520440"/>
             <a:ext cx="8275320" cy="256032"/>
           </a:xfrm>
           <a:prstGeom prst="rect">
@@ -12341,7 +13024,7 @@
                 <a:ea typeface="Trebuchet MS" pitchFamily="34" charset="-122"/>
                 <a:cs typeface="Trebuchet MS" pitchFamily="34" charset="-120"/>
               </a:rPr>
-              <a:t>COMPLY-OR-EXPLAIN</a:t>
+              <a:t>COMPLY OR EXPLAIN</a:t>
             </a:r>
             <a:endParaRPr lang="en-US" sz="1100" dirty="0"/>
           </a:p>
@@ -12355,8 +13038,8 @@
         </p:nvSpPr>
         <p:spPr>
           <a:xfrm>
-            <a:off x="457200" y="3840480"/>
-            <a:ext cx="8275320" cy="457200"/>
+            <a:off x="457200" y="3794760"/>
+            <a:ext cx="8275320" cy="502920"/>
           </a:xfrm>
           <a:prstGeom prst="rect">
             <a:avLst/>
@@ -12383,7 +13066,7 @@
                 <a:ea typeface="Calibri" pitchFamily="34" charset="-122"/>
                 <a:cs typeface="Calibri" pitchFamily="34" charset="-120"/>
               </a:rPr>
-              <a:t>Most jurisdictions (UK, EU, Japan) use a "comply-or-explain" model — issuers either adopt the code or publicly justify departures. The US relies instead on SEC securities law, Delaware corporate law, and exchange listing rules.</a:t>
+              <a:t>Most jurisdictions run a "comply or explain" code — adopt the recommended practice, or publicly justify the departure. Japan, for instance, makes a company with no outside directors say why. The US has no national code at all: it relies on the Securities Act and Sarbanes-Oxley, SEC enforcement, exchange listing rules, and Delaware corporate law.</a:t>
             </a:r>
             <a:endParaRPr lang="en-US" sz="1200" dirty="0"/>
           </a:p>
@@ -12490,7 +13173,7 @@
                 <a:ea typeface="Trebuchet MS" pitchFamily="34" charset="-122"/>
                 <a:cs typeface="Trebuchet MS" pitchFamily="34" charset="-120"/>
               </a:rPr>
-              <a:t>Three core board committees — Audit, Nominating/Governance, Compensation — embed independence where it matters most</a:t>
+              <a:t>Three core board committees — Audit, Nominating/Governance, Compensation — put independence exactly where it is needed</a:t>
             </a:r>
             <a:endParaRPr lang="en-US" sz="1700" dirty="0"/>
           </a:p>
@@ -12594,7 +13277,7 @@
                 <a:ea typeface="Calibri" pitchFamily="34" charset="-122"/>
                 <a:cs typeface="Calibri" pitchFamily="34" charset="-120"/>
               </a:rPr>
-              <a:t>Source: CFA Institute, Curriculum Vol 3, Learning Module 3, Exhibit 2, pp. 80–82.</a:t>
+              <a:t>Source: CFA Institute, Curriculum Vol 3, Learning Module 3, "Board and Management Mechanisms", Exhibit 2, pp. 80–82.</a:t>
             </a:r>
             <a:endParaRPr lang="en-US" sz="750" dirty="0"/>
           </a:p>
@@ -12636,7 +13319,7 @@
                 <a:ea typeface="Calibri" pitchFamily="34" charset="-122"/>
                 <a:cs typeface="Calibri" pitchFamily="34" charset="-120"/>
               </a:rPr>
-              <a:t>Each committee reports to the full board but does the first-level work. Best practice on all three: majority independent directors; on Audit and Compensation, 100%.</a:t>
+              <a:t>Committees do the first-level work and report up; the board cannot delegate its ultimate responsibility. Best practice on all three: composed of independent directors.</a:t>
             </a:r>
             <a:endParaRPr lang="en-US" sz="1300" dirty="0"/>
           </a:p>
@@ -12760,7 +13443,7 @@
                 <a:ea typeface="Calibri" pitchFamily="34" charset="-122"/>
                 <a:cs typeface="Calibri" pitchFamily="34" charset="-120"/>
               </a:rPr>
-              <a:t>Mandate: financial reporting integrity, internal controls, external auditor selection &amp; fees, whistleblower channel.</a:t>
+              <a:t>Mandate: integrity of financial reporting, accounting policy, internal audit, appointment and fee of the external auditor, whistleblower channel — sometimes IT security too.</a:t>
             </a:r>
             <a:endParaRPr lang="en-US" sz="1200" dirty="0"/>
           </a:p>
@@ -12800,7 +13483,7 @@
                 <a:ea typeface="Calibri" pitchFamily="34" charset="-122"/>
                 <a:cs typeface="Calibri" pitchFamily="34" charset="-120"/>
               </a:rPr>
-              <a:t>• 100% independent directors</a:t>
+              <a:t>• Solely independent directors</a:t>
             </a:r>
             <a:endParaRPr lang="en-US" sz="1200" dirty="0"/>
           </a:p>
@@ -12817,7 +13500,7 @@
                 <a:ea typeface="Calibri" pitchFamily="34" charset="-122"/>
                 <a:cs typeface="Calibri" pitchFamily="34" charset="-120"/>
               </a:rPr>
-              <a:t>• ≥ 1 with accounting / financial expertise</a:t>
+              <a:t>• At least one with accounting or financial expertise</a:t>
             </a:r>
             <a:endParaRPr lang="en-US" sz="1200" dirty="0"/>
           </a:p>
@@ -12834,7 +13517,7 @@
                 <a:ea typeface="Calibri" pitchFamily="34" charset="-122"/>
                 <a:cs typeface="Calibri" pitchFamily="34" charset="-120"/>
               </a:rPr>
-              <a:t>• Private sessions with auditor (no management)</a:t>
+              <a:t>• Meets the auditor without management present</a:t>
             </a:r>
             <a:endParaRPr lang="en-US" sz="1200" dirty="0"/>
           </a:p>
@@ -12857,7 +13540,7 @@
                 <a:ea typeface="Calibri" pitchFamily="34" charset="-122"/>
                 <a:cs typeface="Calibri" pitchFamily="34" charset="-120"/>
               </a:rPr>
-              <a:t>Red flag: CFO or insider on committee.</a:t>
+              <a:t>Red flag: an executive sitting on it.</a:t>
             </a:r>
             <a:endParaRPr lang="en-US" sz="1200" dirty="0"/>
           </a:p>
@@ -12981,7 +13664,7 @@
                 <a:ea typeface="Calibri" pitchFamily="34" charset="-122"/>
                 <a:cs typeface="Calibri" pitchFamily="34" charset="-120"/>
               </a:rPr>
-              <a:t>Mandate: director selection, board composition, succession planning, corporate governance code, conflicts-of-interest policy.</a:t>
+              <a:t>Mandate: director selection and the board election process, board composition and balance, the governance code, the board charter, the code of ethics, the conflicts-of-interest policy.</a:t>
             </a:r>
             <a:endParaRPr lang="en-US" sz="1200" dirty="0"/>
           </a:p>
@@ -13021,7 +13704,7 @@
                 <a:ea typeface="Calibri" pitchFamily="34" charset="-122"/>
                 <a:cs typeface="Calibri" pitchFamily="34" charset="-120"/>
               </a:rPr>
-              <a:t>• Majority independent</a:t>
+              <a:t>• Independent members</a:t>
             </a:r>
             <a:endParaRPr lang="en-US" sz="1200" dirty="0"/>
           </a:p>
@@ -13078,7 +13761,7 @@
                 <a:ea typeface="Calibri" pitchFamily="34" charset="-122"/>
                 <a:cs typeface="Calibri" pitchFamily="34" charset="-120"/>
               </a:rPr>
-              <a:t>Red flag: CEO handpicking directors.</a:t>
+              <a:t>Red flag: the CEO picking the directors.</a:t>
             </a:r>
             <a:endParaRPr lang="en-US" sz="1200" dirty="0"/>
           </a:p>
@@ -13202,7 +13885,7 @@
                 <a:ea typeface="Calibri" pitchFamily="34" charset="-122"/>
                 <a:cs typeface="Calibri" pitchFamily="34" charset="-120"/>
               </a:rPr>
-              <a:t>Mandate: executive pay plan, performance metrics, equity grants, say-on-pay voting.</a:t>
+              <a:t>Mandate: pay policy for directors and key executives, performance criteria, equity grants, the say-on-pay vote.</a:t>
             </a:r>
             <a:endParaRPr lang="en-US" sz="1200" dirty="0"/>
           </a:p>
@@ -13242,7 +13925,7 @@
                 <a:ea typeface="Calibri" pitchFamily="34" charset="-122"/>
                 <a:cs typeface="Calibri" pitchFamily="34" charset="-120"/>
               </a:rPr>
-              <a:t>• 100% independent directors</a:t>
+              <a:t>• All members independent — management must not assess itself</a:t>
             </a:r>
             <a:endParaRPr lang="en-US" sz="1200" dirty="0"/>
           </a:p>
@@ -13259,7 +13942,7 @@
                 <a:ea typeface="Calibri" pitchFamily="34" charset="-122"/>
                 <a:cs typeface="Calibri" pitchFamily="34" charset="-120"/>
               </a:rPr>
-              <a:t>• LTIP with multi-year vesting</a:t>
+              <a:t>• Shares rather than options, vesting over years</a:t>
             </a:r>
             <a:endParaRPr lang="en-US" sz="1200" dirty="0"/>
           </a:p>
@@ -13284,6 +13967,12 @@
             <a:pPr algn="l" indent="0" marL="0">
               <a:buNone/>
             </a:pPr>
+            <a:endParaRPr lang="en-US" sz="1200" dirty="0"/>
+          </a:p>
+          <a:p>
+            <a:pPr algn="l" indent="0" marL="0">
+              <a:buNone/>
+            </a:pPr>
             <a:r>
               <a:rPr lang="en-US" sz="1200" dirty="0">
                 <a:solidFill>
@@ -13293,30 +13982,7 @@
                 <a:ea typeface="Calibri" pitchFamily="34" charset="-122"/>
                 <a:cs typeface="Calibri" pitchFamily="34" charset="-120"/>
               </a:rPr>
-              <a:t>• Peer-group benchmarking</a:t>
-            </a:r>
-            <a:endParaRPr lang="en-US" sz="1200" dirty="0"/>
-          </a:p>
-          <a:p>
-            <a:pPr algn="l" indent="0" marL="0">
-              <a:buNone/>
-            </a:pPr>
-            <a:endParaRPr lang="en-US" sz="1200" dirty="0"/>
-          </a:p>
-          <a:p>
-            <a:pPr algn="l" indent="0" marL="0">
-              <a:buNone/>
-            </a:pPr>
-            <a:r>
-              <a:rPr lang="en-US" sz="1200" dirty="0">
-                <a:solidFill>
-                  <a:srgbClr val="334155"/>
-                </a:solidFill>
-                <a:latin typeface="Calibri" pitchFamily="34" charset="0"/>
-                <a:ea typeface="Calibri" pitchFamily="34" charset="-122"/>
-                <a:cs typeface="Calibri" pitchFamily="34" charset="-120"/>
-              </a:rPr>
-              <a:t>Red flag: CEO-only metrics, single-year cash bonus.</a:t>
+              <a:t>Red flag: a one-year cash bonus on a single metric.</a:t>
             </a:r>
             <a:endParaRPr lang="en-US" sz="1200" dirty="0"/>
           </a:p>
@@ -13423,7 +14089,7 @@
                 <a:ea typeface="Trebuchet MS" pitchFamily="34" charset="-122"/>
                 <a:cs typeface="Trebuchet MS" pitchFamily="34" charset="-120"/>
               </a:rPr>
-              <a:t>Strong governance lowers the cost of capital — the Theranos, Volkswagen, and Kobe Steel cases show the price of getting it wrong</a:t>
+              <a:t>Weak governance raises the cost of capital — Theranos, Volkswagen and Kobe Steel each priced it differently</a:t>
             </a:r>
             <a:endParaRPr lang="en-US" sz="1700" dirty="0"/>
           </a:p>
@@ -13524,7 +14190,7 @@
                 <a:ea typeface="Calibri" pitchFamily="34" charset="-122"/>
                 <a:cs typeface="Calibri" pitchFamily="34" charset="-120"/>
               </a:rPr>
-              <a:t>¹ Academic evidence: Gompers, Ishii &amp; Metrick (2003) find a governance index explains a meaningful share of firm valuations; Bhojraj &amp; Sengupta (2003) link governance to credit ratings and bond yields.
+              <a:t>¹ Evidence cited by CFA: Gompers-Ishii-Metrick (2003) on governance and valuation; Bhojraj-Sengupta (2003) on bond ratings and yields.
 </a:t>
             </a:r>
             <a:endParaRPr lang="en-US" sz="1000" dirty="0"/>
@@ -13567,7 +14233,7 @@
                 <a:ea typeface="Calibri" pitchFamily="34" charset="-122"/>
                 <a:cs typeface="Calibri" pitchFamily="34" charset="-120"/>
               </a:rPr>
-              <a:t>Source: CFA Institute, Curriculum Vol 3, Learning Module 3, case vignettes, pp. 85–91.</a:t>
+              <a:t>Source: CFA Institute, Curriculum Vol 3, Learning Module 3, §4 case boxes, pp. 86–88; Kobe Steel is Practice Problems 1–5, pp. 92–94.</a:t>
             </a:r>
             <a:endParaRPr lang="en-US" sz="750" dirty="0"/>
           </a:p>
@@ -13609,7 +14275,7 @@
                 <a:ea typeface="Calibri" pitchFamily="34" charset="-122"/>
                 <a:cs typeface="Calibri" pitchFamily="34" charset="-120"/>
               </a:rPr>
-              <a:t>Every failure traces back to one of three root causes: inadequate oversight, captive board, or misaligned compensation.</a:t>
+              <a:t>Three failures, three transmission channels: a total equity loss, a legal and reputational bill, and a step change in the cost of debt.</a:t>
             </a:r>
             <a:endParaRPr lang="en-US" sz="1300" dirty="0"/>
           </a:p>
@@ -13691,7 +14357,7 @@
                 <a:ea typeface="Trebuchet MS" pitchFamily="34" charset="-122"/>
                 <a:cs typeface="Trebuchet MS" pitchFamily="34" charset="-120"/>
               </a:rPr>
-              <a:t>THERANOS (USA, 2015–18)</a:t>
+              <a:t>THERANOS  (US, 2003–18)</a:t>
             </a:r>
             <a:endParaRPr lang="en-US" sz="1100" dirty="0"/>
           </a:p>
@@ -13733,7 +14399,7 @@
                 <a:ea typeface="Calibri" pitchFamily="34" charset="-122"/>
                 <a:cs typeface="Calibri" pitchFamily="34" charset="-120"/>
               </a:rPr>
-              <a:t>Governance failure — celebrity board with no medical expertise dismissed whistleblowers.</a:t>
+              <a:t>A celebrated board with almost no medical-technology expertise, which dismissed whistleblowers and never hired an independent expert.</a:t>
             </a:r>
             <a:endParaRPr lang="en-US" sz="1100" dirty="0"/>
           </a:p>
@@ -13756,7 +14422,7 @@
                 <a:ea typeface="Calibri" pitchFamily="34" charset="-122"/>
                 <a:cs typeface="Calibri" pitchFamily="34" charset="-120"/>
               </a:rPr>
-              <a:t>• Peak valuation: USD 10B (2014)</a:t>
+              <a:t>• Raised over USD 700m; valued at USD 10bn in 2014</a:t>
             </a:r>
             <a:endParaRPr lang="en-US" sz="1100" dirty="0"/>
           </a:p>
@@ -13773,7 +14439,7 @@
                 <a:ea typeface="Calibri" pitchFamily="34" charset="-122"/>
                 <a:cs typeface="Calibri" pitchFamily="34" charset="-120"/>
               </a:rPr>
-              <a:t>• Final valuation: USD 0 (2018)</a:t>
+              <a:t>• Worth zero by 2018; operations ceased</a:t>
             </a:r>
             <a:endParaRPr lang="en-US" sz="1100" dirty="0"/>
           </a:p>
@@ -13790,7 +14456,7 @@
                 <a:ea typeface="Calibri" pitchFamily="34" charset="-122"/>
                 <a:cs typeface="Calibri" pitchFamily="34" charset="-120"/>
               </a:rPr>
-              <a:t>• CEO convicted of fraud (2022)</a:t>
+              <a:t>• Founder convicted on four counts of fraud, 2022</a:t>
             </a:r>
             <a:endParaRPr lang="en-US" sz="1100" dirty="0"/>
           </a:p>
@@ -13813,7 +14479,7 @@
                 <a:ea typeface="Calibri" pitchFamily="34" charset="-122"/>
                 <a:cs typeface="Calibri" pitchFamily="34" charset="-120"/>
               </a:rPr>
-              <a:t>Root cause: inadequate oversight.</a:t>
+              <a:t>Root cause: inadequate board composition and oversight.</a:t>
             </a:r>
             <a:endParaRPr lang="en-US" sz="1100" dirty="0"/>
           </a:p>
@@ -13895,7 +14561,7 @@
                 <a:ea typeface="Trebuchet MS" pitchFamily="34" charset="-122"/>
                 <a:cs typeface="Trebuchet MS" pitchFamily="34" charset="-120"/>
               </a:rPr>
-              <a:t>VOLKSWAGEN (DE, DIESELGATE)</a:t>
+              <a:t>VOLKSWAGEN  (DE, DIESELGATE)</a:t>
             </a:r>
             <a:endParaRPr lang="en-US" sz="1100" dirty="0"/>
           </a:p>
@@ -13937,7 +14603,7 @@
                 <a:ea typeface="Calibri" pitchFamily="34" charset="-122"/>
                 <a:cs typeface="Calibri" pitchFamily="34" charset="-120"/>
               </a:rPr>
-              <a:t>Governance failure — illegal emission "defeat devices" installed in 11M vehicles.</a:t>
+              <a:t>Illegal "defeat device" software fitted to as many as 11m VW and Audi cars, denied for a year before the 2015 admission.</a:t>
             </a:r>
             <a:endParaRPr lang="en-US" sz="1100" dirty="0"/>
           </a:p>
@@ -13960,7 +14626,7 @@
                 <a:ea typeface="Calibri" pitchFamily="34" charset="-122"/>
                 <a:cs typeface="Calibri" pitchFamily="34" charset="-120"/>
               </a:rPr>
-              <a:t>• Stock fell &gt; 33% in days</a:t>
+              <a:t>• Share price fell over a third within days</a:t>
             </a:r>
             <a:endParaRPr lang="en-US" sz="1100" dirty="0"/>
           </a:p>
@@ -13977,7 +14643,7 @@
                 <a:ea typeface="Calibri" pitchFamily="34" charset="-122"/>
                 <a:cs typeface="Calibri" pitchFamily="34" charset="-120"/>
               </a:rPr>
-              <a:t>• EUR 32B in fines, recalls, legal costs</a:t>
+              <a:t>• EUR 32bn of recalls, fines and legal costs</a:t>
             </a:r>
             <a:endParaRPr lang="en-US" sz="1100" dirty="0"/>
           </a:p>
@@ -13994,7 +14660,7 @@
                 <a:ea typeface="Calibri" pitchFamily="34" charset="-122"/>
                 <a:cs typeface="Calibri" pitchFamily="34" charset="-120"/>
               </a:rPr>
-              <a:t>• CEO indicted; criminal charges in US + DE</a:t>
+              <a:t>• CEO resigned, then indicted in the US and Germany</a:t>
             </a:r>
             <a:endParaRPr lang="en-US" sz="1100" dirty="0"/>
           </a:p>
@@ -14017,7 +14683,7 @@
                 <a:ea typeface="Calibri" pitchFamily="34" charset="-122"/>
                 <a:cs typeface="Calibri" pitchFamily="34" charset="-120"/>
               </a:rPr>
-              <a:t>Root cause: captive supervisory board dominated by founders.</a:t>
+              <a:t>Root cause: weak board independence and no oversight of the teams that installed it.</a:t>
             </a:r>
             <a:endParaRPr lang="en-US" sz="1100" dirty="0"/>
           </a:p>
@@ -14099,7 +14765,7 @@
                 <a:ea typeface="Trebuchet MS" pitchFamily="34" charset="-122"/>
                 <a:cs typeface="Trebuchet MS" pitchFamily="34" charset="-120"/>
               </a:rPr>
-              <a:t>KOBE STEEL (JP, 2017–18)</a:t>
+              <a:t>KOBE STEEL  (JP, 2017–18)</a:t>
             </a:r>
             <a:endParaRPr lang="en-US" sz="1100" dirty="0"/>
           </a:p>
@@ -14141,7 +14807,7 @@
                 <a:ea typeface="Calibri" pitchFamily="34" charset="-122"/>
                 <a:cs typeface="Calibri" pitchFamily="34" charset="-120"/>
               </a:rPr>
-              <a:t>Governance failure — decades of falsified quality data for steel, copper, aluminium products.</a:t>
+              <a:t>Strength and durability data falsified for aluminium, copper, steel and iron ore powder; admitted in March 2018.</a:t>
             </a:r>
             <a:endParaRPr lang="en-US" sz="1100" dirty="0"/>
           </a:p>
@@ -14164,7 +14830,7 @@
                 <a:ea typeface="Calibri" pitchFamily="34" charset="-122"/>
                 <a:cs typeface="Calibri" pitchFamily="34" charset="-120"/>
               </a:rPr>
-              <a:t>• Stock to 5-year low</a:t>
+              <a:t>• Stock to a five-year low</a:t>
             </a:r>
             <a:endParaRPr lang="en-US" sz="1100" dirty="0"/>
           </a:p>
@@ -14181,7 +14847,7 @@
                 <a:ea typeface="Calibri" pitchFamily="34" charset="-122"/>
                 <a:cs typeface="Calibri" pitchFamily="34" charset="-120"/>
               </a:rPr>
-              <a:t>• Cost of debt to record highs</a:t>
+              <a:t>• Cost of debt jumped to record levels</a:t>
             </a:r>
             <a:endParaRPr lang="en-US" sz="1100" dirty="0"/>
           </a:p>
@@ -14198,7 +14864,7 @@
                 <a:ea typeface="Calibri" pitchFamily="34" charset="-122"/>
                 <a:cs typeface="Calibri" pitchFamily="34" charset="-120"/>
               </a:rPr>
-              <a:t>• Board restructured: independent chair, 3 independent directors on audit committee</a:t>
+              <a:t>• Remedy: independent chair, a third of the board independent, three independents on a five-member audit committee</a:t>
             </a:r>
             <a:endParaRPr lang="en-US" sz="1100" dirty="0"/>
           </a:p>
@@ -14221,7 +14887,7 @@
                 <a:ea typeface="Calibri" pitchFamily="34" charset="-122"/>
                 <a:cs typeface="Calibri" pitchFamily="34" charset="-120"/>
               </a:rPr>
-              <a:t>Root cause: profit-over-quality culture, no quality-control oversight.</a:t>
+              <a:t>Root cause: a culture putting orders and deadlines ahead of quality, with no quality-control oversight.</a:t>
             </a:r>
             <a:endParaRPr lang="en-US" sz="1100" dirty="0"/>
           </a:p>
@@ -14598,7 +15264,7 @@
                 <a:ea typeface="Calibri" pitchFamily="34" charset="-122"/>
                 <a:cs typeface="Calibri" pitchFamily="34" charset="-120"/>
               </a:rPr>
-              <a:t>Sole proprietor · partnership · corporation · limited liability · Simon Property Group illustration</a:t>
+              <a:t>Sole proprietor · partnership · corporation · limited liability · Simon Property Group · public vs private</a:t>
             </a:r>
             <a:endParaRPr lang="en-US" sz="1100" dirty="0"/>
           </a:p>
@@ -14764,7 +15430,7 @@
                 <a:ea typeface="Calibri" pitchFamily="34" charset="-122"/>
                 <a:cs typeface="Calibri" pitchFamily="34" charset="-120"/>
               </a:rPr>
-              <a:t>Debt vs equity claims · ROE-with-leverage worked example · stakeholder map · ESG materiality</a:t>
+              <a:t>Debt vs equity claims · CFA LM2 Example 1 on leverage and ROE · stakeholder map · ESG materiality</a:t>
             </a:r>
             <a:endParaRPr lang="en-US" sz="1100" dirty="0"/>
           </a:p>
@@ -14930,7 +15596,7 @@
                 <a:ea typeface="Calibri" pitchFamily="34" charset="-122"/>
                 <a:cs typeface="Calibri" pitchFamily="34" charset="-120"/>
               </a:rPr>
-              <a:t>Principal-agent · agency-cost worked example · dual-class · 3 core committees · Theranos / VW / Kobe vignettes</a:t>
+              <a:t>Principal-agent · agency-cost arithmetic · dual-class (Magna) · 3 core committees · Theranos / VW / Kobe</a:t>
             </a:r>
             <a:endParaRPr lang="en-US" sz="1100" dirty="0"/>
           </a:p>
@@ -15096,7 +15762,7 @@
                 <a:ea typeface="Calibri" pitchFamily="34" charset="-122"/>
                 <a:cs typeface="Calibri" pitchFamily="34" charset="-120"/>
               </a:rPr>
-              <a:t>WACC mechanics · MM I and II · Gerhardt worked example · static trade-off · pecking order</a:t>
+              <a:t>WACC mechanics · MM I and II · Gerhardt worked twice · Boulder static trade-off · pecking order</a:t>
             </a:r>
             <a:endParaRPr lang="en-US" sz="1100" dirty="0"/>
           </a:p>
@@ -15262,7 +15928,7 @@
                 <a:ea typeface="Calibri" pitchFamily="34" charset="-122"/>
                 <a:cs typeface="Calibri" pitchFamily="34" charset="-120"/>
               </a:rPr>
-              <a:t>CAPM for equity · Hamada lever/unlever beta · after-tax cost of debt · Aurelia full WACC</a:t>
+              <a:t>CAPM for equity · relevering a comparable beta · after-tax cost of debt · a full WACC end to end</a:t>
             </a:r>
             <a:endParaRPr lang="en-US" sz="1100" dirty="0"/>
           </a:p>
@@ -15597,7 +16263,7 @@
                 <a:ea typeface="Trebuchet MS" pitchFamily="34" charset="-122"/>
                 <a:cs typeface="Trebuchet MS" pitchFamily="34" charset="-120"/>
               </a:rPr>
-              <a:t>WACC blends the after-tax cost of debt and the cost of equity — the single most important discount rate in corporate finance</a:t>
+              <a:t>WACC blends the after-tax cost of debt with the cost of equity — the single most important discount rate in corporate finance</a:t>
             </a:r>
             <a:endParaRPr lang="en-US" sz="1700" dirty="0"/>
           </a:p>
@@ -15673,6 +16339,46 @@
         </p:nvSpPr>
         <p:spPr>
           <a:xfrm>
+            <a:off x="320040" y="4471416"/>
+            <a:ext cx="8503920" cy="192024"/>
+          </a:xfrm>
+          <a:prstGeom prst="rect">
+            <a:avLst/>
+          </a:prstGeom>
+          <a:noFill/>
+          <a:ln/>
+        </p:spPr>
+        <p:txBody>
+          <a:bodyPr wrap="square" lIns="254" tIns="254" rIns="254" bIns="254" rtlCol="0" anchor="t"/>
+          <a:lstStyle/>
+          <a:p>
+            <a:pPr indent="0" marL="0">
+              <a:buNone/>
+            </a:pPr>
+            <a:r>
+              <a:rPr lang="en-US" sz="1000" dirty="0">
+                <a:solidFill>
+                  <a:srgbClr val="6B7A8D"/>
+                </a:solidFill>
+                <a:latin typeface="Calibri" pitchFamily="34" charset="0"/>
+                <a:ea typeface="Calibri" pitchFamily="34" charset="-122"/>
+                <a:cs typeface="Calibri" pitchFamily="34" charset="-120"/>
+              </a:rPr>
+              <a:t>¹ CFA Equation 1 states WACC without the tax term; the (1 − t) factor applies to the cost of debt wherever interest is deductible.
+</a:t>
+            </a:r>
+            <a:endParaRPr lang="en-US" sz="1000" dirty="0"/>
+          </a:p>
+        </p:txBody>
+      </p:sp>
+      <p:sp>
+        <p:nvSpPr>
+          <p:cNvPr id="8" name="Text 6"/>
+          <p:cNvSpPr txBox="1"/>
+          <p:nvPr/>
+        </p:nvSpPr>
+        <p:spPr>
+          <a:xfrm>
             <a:off x="320040" y="4663440"/>
             <a:ext cx="8503920" cy="201168"/>
           </a:xfrm>
@@ -15701,7 +16407,7 @@
                 <a:ea typeface="Calibri" pitchFamily="34" charset="-122"/>
                 <a:cs typeface="Calibri" pitchFamily="34" charset="-120"/>
               </a:rPr>
-              <a:t>Source: CFA Institute, Curriculum Vol 3, Learning Module 6, "The Cost of Capital", pp. 178–182.</a:t>
+              <a:t>Source: CFA Institute, Curriculum Vol 3, Learning Module 6, §2 "The Cost of Capital", Equation 1 and Knowledge Check: Computing WACC, pp. 178–182.</a:t>
             </a:r>
             <a:endParaRPr lang="en-US" sz="750" dirty="0"/>
           </a:p>
@@ -15709,7 +16415,7 @@
       </p:sp>
       <p:sp>
         <p:nvSpPr>
-          <p:cNvPr id="8" name="Text 6"/>
+          <p:cNvPr id="9" name="Text 7"/>
           <p:cNvSpPr txBox="1"/>
           <p:nvPr/>
         </p:nvSpPr>
@@ -15743,7 +16449,7 @@
                 <a:ea typeface="Calibri" pitchFamily="34" charset="-122"/>
                 <a:cs typeface="Calibri" pitchFamily="34" charset="-120"/>
               </a:rPr>
-              <a:t>WACC is simultaneously (i) the firm's discount rate for NPV analysis, (ii) the hurdle rate for IRR, and (iii) the investors' required return weighted by capital structure.</a:t>
+              <a:t>WACC is three things at once: the r in an NPV, the hurdle rate for an IRR, and the return investors require weighted by how the firm is financed.</a:t>
             </a:r>
             <a:endParaRPr lang="en-US" sz="1300" dirty="0"/>
           </a:p>
@@ -15751,14 +16457,14 @@
       </p:sp>
       <p:sp>
         <p:nvSpPr>
-          <p:cNvPr id="9" name="Shape 7"/>
+          <p:cNvPr id="10" name="Shape 8"/>
           <p:cNvSpPr/>
           <p:nvPr/>
         </p:nvSpPr>
         <p:spPr>
           <a:xfrm>
-            <a:off x="320040" y="1234440"/>
-            <a:ext cx="8503920" cy="749808"/>
+            <a:off x="320040" y="1170432"/>
+            <a:ext cx="8503920" cy="566928"/>
           </a:xfrm>
           <a:prstGeom prst="rect">
             <a:avLst/>
@@ -15771,14 +16477,14 @@
       </p:sp>
       <p:sp>
         <p:nvSpPr>
-          <p:cNvPr id="10" name="Text 8"/>
+          <p:cNvPr id="11" name="Text 9"/>
           <p:cNvSpPr txBox="1"/>
           <p:nvPr/>
         </p:nvSpPr>
         <p:spPr>
           <a:xfrm>
-            <a:off x="411480" y="1234440"/>
-            <a:ext cx="8321040" cy="749808"/>
+            <a:off x="411480" y="1170432"/>
+            <a:ext cx="8321040" cy="566928"/>
           </a:xfrm>
           <a:prstGeom prst="rect">
             <a:avLst/>
@@ -15813,13 +16519,13 @@
       </p:sp>
       <p:sp>
         <p:nvSpPr>
-          <p:cNvPr id="11" name="Text 9"/>
+          <p:cNvPr id="12" name="Text 10"/>
           <p:cNvSpPr txBox="1"/>
           <p:nvPr/>
         </p:nvSpPr>
         <p:spPr>
           <a:xfrm>
-            <a:off x="320040" y="2011680"/>
+            <a:off x="320040" y="1764792"/>
             <a:ext cx="8503920" cy="256032"/>
           </a:xfrm>
           <a:prstGeom prst="rect">
@@ -15847,7 +16553,7 @@
                 <a:ea typeface="Calibri" pitchFamily="34" charset="-122"/>
                 <a:cs typeface="Calibri" pitchFamily="34" charset="-120"/>
               </a:rPr>
-              <a:t>where: w_d, w_e = market-value (or target) weights of debt &amp; equity; r_d = pre-tax cost of debt (YTM); r_e = cost of equity (CAPM); t = marginal tax rate.</a:t>
+              <a:t>where: w_d, w_e = market-value weights, or management's target (usually set on book values); r_d = pre-tax cost of debt; r_e = cost of equity; t = marginal tax rate.</a:t>
             </a:r>
             <a:endParaRPr lang="en-US" sz="1100" dirty="0"/>
           </a:p>
@@ -15855,14 +16561,14 @@
       </p:sp>
       <p:sp>
         <p:nvSpPr>
-          <p:cNvPr id="12" name="Shape 10"/>
+          <p:cNvPr id="13" name="Shape 11"/>
           <p:cNvSpPr/>
           <p:nvPr/>
         </p:nvSpPr>
         <p:spPr>
           <a:xfrm>
-            <a:off x="320040" y="2423160"/>
-            <a:ext cx="8503920" cy="1874520"/>
+            <a:off x="320040" y="2084832"/>
+            <a:ext cx="8503920" cy="2212848"/>
           </a:xfrm>
           <a:prstGeom prst="rect">
             <a:avLst/>
@@ -15880,13 +16586,13 @@
       </p:sp>
       <p:sp>
         <p:nvSpPr>
-          <p:cNvPr id="13" name="Text 11"/>
+          <p:cNvPr id="14" name="Text 12"/>
           <p:cNvSpPr txBox="1"/>
           <p:nvPr/>
         </p:nvSpPr>
         <p:spPr>
           <a:xfrm>
-            <a:off x="457200" y="2468880"/>
+            <a:off x="457200" y="2130552"/>
             <a:ext cx="8229600" cy="256032"/>
           </a:xfrm>
           <a:prstGeom prst="rect">
@@ -15914,7 +16620,7 @@
                 <a:ea typeface="Trebuchet MS" pitchFamily="34" charset="-122"/>
                 <a:cs typeface="Trebuchet MS" pitchFamily="34" charset="-120"/>
               </a:rPr>
-              <a:t>QUICK CHECK — ABC CORPORATION</a:t>
+              <a:t>CFA KNOWLEDGE CHECK — ABC CORPORATION</a:t>
             </a:r>
             <a:endParaRPr lang="en-US" sz="1100" dirty="0"/>
           </a:p>
@@ -15922,13 +16628,13 @@
       </p:sp>
       <p:sp>
         <p:nvSpPr>
-          <p:cNvPr id="14" name="Text 12"/>
+          <p:cNvPr id="15" name="Text 13"/>
           <p:cNvSpPr txBox="1"/>
           <p:nvPr/>
         </p:nvSpPr>
         <p:spPr>
           <a:xfrm>
-            <a:off x="457200" y="2761488"/>
+            <a:off x="457200" y="2423160"/>
             <a:ext cx="8229600" cy="457200"/>
           </a:xfrm>
           <a:prstGeom prst="rect">
@@ -15956,7 +16662,7 @@
                 <a:ea typeface="Calibri" pitchFamily="34" charset="-122"/>
                 <a:cs typeface="Calibri" pitchFamily="34" charset="-120"/>
               </a:rPr>
-              <a:t>ABC: 40% debt / 60% equity at market value. Pre-tax r_d = 4%. r_e = 10%. Marginal tax rate t = 23%.</a:t>
+              <a:t>ABC is financed 40% debt / 60% equity and intends to keep those proportions. Debt investors require 4% before tax, equity investors 10%. The marginal tax rate is 23% and interest is deductible.</a:t>
             </a:r>
             <a:endParaRPr lang="en-US" sz="1200" dirty="0"/>
           </a:p>
@@ -15964,14 +16670,14 @@
       </p:sp>
       <p:sp>
         <p:nvSpPr>
-          <p:cNvPr id="15" name="Text 13"/>
+          <p:cNvPr id="16" name="Text 14"/>
           <p:cNvSpPr txBox="1"/>
           <p:nvPr/>
         </p:nvSpPr>
         <p:spPr>
           <a:xfrm>
-            <a:off x="457200" y="3273552"/>
-            <a:ext cx="8229600" cy="512064"/>
+            <a:off x="457200" y="2935224"/>
+            <a:ext cx="8229600" cy="850392"/>
           </a:xfrm>
           <a:prstGeom prst="rect">
             <a:avLst/>
@@ -15993,7 +16699,7 @@
               <a:buNone/>
             </a:pPr>
             <a:r>
-              <a:rPr lang="en-US" sz="1050" b="1" dirty="0">
+              <a:rPr lang="en-US" sz="1150" b="1" dirty="0">
                 <a:solidFill>
                   <a:srgbClr val="1B2A4A"/>
                 </a:solidFill>
@@ -16010,7 +16716,7 @@
               <a:buNone/>
             </a:pPr>
             <a:r>
-              <a:rPr lang="en-US" sz="1050" dirty="0">
+              <a:rPr lang="en-US" sz="1150" dirty="0">
                 <a:solidFill>
                   <a:srgbClr val="334155"/>
                 </a:solidFill>
@@ -16028,7 +16734,7 @@
               <a:buNone/>
             </a:pPr>
             <a:r>
-              <a:rPr lang="en-US" sz="1050" b="1" dirty="0">
+              <a:rPr lang="en-US" sz="1150" b="1" dirty="0">
                 <a:solidFill>
                   <a:srgbClr val="1B2A4A"/>
                 </a:solidFill>
@@ -16045,7 +16751,7 @@
               <a:buNone/>
             </a:pPr>
             <a:r>
-              <a:rPr lang="en-US" sz="1050" dirty="0">
+              <a:rPr lang="en-US" sz="1150" dirty="0">
                 <a:solidFill>
                   <a:srgbClr val="334155"/>
                 </a:solidFill>
@@ -16053,7 +16759,7 @@
                 <a:ea typeface="Calibri" pitchFamily="34" charset="-122"/>
                 <a:cs typeface="Calibri" pitchFamily="34" charset="-120"/>
               </a:rPr>
-              <a:t>Debt contribution: 0.40 × 3.08% = 1.232%
+              <a:t>Debt contribution: 0.40 × 3.08% = 1.23%
 </a:t>
             </a:r>
             <a:pPr indent="0" marL="0">
@@ -16063,7 +16769,7 @@
               <a:buNone/>
             </a:pPr>
             <a:r>
-              <a:rPr lang="en-US" sz="1050" b="1" dirty="0">
+              <a:rPr lang="en-US" sz="1150" b="1" dirty="0">
                 <a:solidFill>
                   <a:srgbClr val="1B2A4A"/>
                 </a:solidFill>
@@ -16080,7 +16786,7 @@
               <a:buNone/>
             </a:pPr>
             <a:r>
-              <a:rPr lang="en-US" sz="1050" dirty="0">
+              <a:rPr lang="en-US" sz="1150" dirty="0">
                 <a:solidFill>
                   <a:srgbClr val="334155"/>
                 </a:solidFill>
@@ -16098,7 +16804,7 @@
               <a:buNone/>
             </a:pPr>
             <a:r>
-              <a:rPr lang="en-US" sz="1050" b="1" dirty="0">
+              <a:rPr lang="en-US" sz="1150" b="1" dirty="0">
                 <a:solidFill>
                   <a:srgbClr val="1B2A4A"/>
                 </a:solidFill>
@@ -16115,7 +16821,7 @@
               <a:buNone/>
             </a:pPr>
             <a:r>
-              <a:rPr lang="en-US" sz="1050" dirty="0">
+              <a:rPr lang="en-US" sz="1150" dirty="0">
                 <a:solidFill>
                   <a:srgbClr val="334155"/>
                 </a:solidFill>
@@ -16123,15 +16829,15 @@
                 <a:ea typeface="Calibri" pitchFamily="34" charset="-122"/>
                 <a:cs typeface="Calibri" pitchFamily="34" charset="-120"/>
               </a:rPr>
-              <a:t>WACC = 1.232% + 6.00% = 7.23%</a:t>
-            </a:r>
-            <a:endParaRPr lang="en-US" sz="1050" dirty="0"/>
+              <a:t>WACC = 1.23% + 6.00% = 7.23%</a:t>
+            </a:r>
+            <a:endParaRPr lang="en-US" sz="1150" dirty="0"/>
           </a:p>
         </p:txBody>
       </p:sp>
       <p:sp>
         <p:nvSpPr>
-          <p:cNvPr id="16" name="Shape 14"/>
+          <p:cNvPr id="17" name="Shape 15"/>
           <p:cNvSpPr/>
           <p:nvPr/>
         </p:nvSpPr>
@@ -16151,7 +16857,7 @@
       </p:sp>
       <p:sp>
         <p:nvSpPr>
-          <p:cNvPr id="17" name="Text 15"/>
+          <p:cNvPr id="18" name="Text 16"/>
           <p:cNvSpPr txBox="1"/>
           <p:nvPr/>
         </p:nvSpPr>
@@ -16185,7 +16891,7 @@
                 <a:ea typeface="Consolas" pitchFamily="34" charset="-122"/>
                 <a:cs typeface="Consolas" pitchFamily="34" charset="-120"/>
               </a:rPr>
-              <a:t>WACC = 7.23% — the rate at which ABC must discount projects of average firm risk.</a:t>
+              <a:t>WACC = 7.23% — the rate for a project of average firm risk.</a:t>
             </a:r>
             <a:endParaRPr lang="en-US" sz="1150" dirty="0"/>
           </a:p>
@@ -16292,7 +16998,7 @@
                 <a:ea typeface="Trebuchet MS" pitchFamily="34" charset="-122"/>
                 <a:cs typeface="Trebuchet MS" pitchFamily="34" charset="-120"/>
               </a:rPr>
-              <a:t>Full WACC worked example — converting book weights to market weights, computing after-tax debt, and assembling the WACC</a:t>
+              <a:t>Book weights and market weights give different answers — and for a cost of capital it is the market weights that count</a:t>
             </a:r>
             <a:endParaRPr lang="en-US" sz="1700" dirty="0"/>
           </a:p>
@@ -16368,6 +17074,46 @@
         </p:nvSpPr>
         <p:spPr>
           <a:xfrm>
+            <a:off x="320040" y="4471416"/>
+            <a:ext cx="8503920" cy="192024"/>
+          </a:xfrm>
+          <a:prstGeom prst="rect">
+            <a:avLst/>
+          </a:prstGeom>
+          <a:noFill/>
+          <a:ln/>
+        </p:spPr>
+        <p:txBody>
+          <a:bodyPr wrap="square" lIns="254" tIns="254" rIns="254" bIns="254" rtlCol="0" anchor="t"/>
+          <a:lstStyle/>
+          <a:p>
+            <a:pPr indent="0" marL="0">
+              <a:buNone/>
+            </a:pPr>
+            <a:r>
+              <a:rPr lang="en-US" sz="1000" dirty="0">
+                <a:solidFill>
+                  <a:srgbClr val="6B7A8D"/>
+                </a:solidFill>
+                <a:latin typeface="Calibri" pitchFamily="34" charset="0"/>
+                <a:ea typeface="Calibri" pitchFamily="34" charset="-122"/>
+                <a:cs typeface="Calibri" pitchFamily="34" charset="-120"/>
+              </a:rPr>
+              <a:t>¹ Market weights for the WACC; but management targets, covenant tests and rating-agency ratios are all stated on book values.
+</a:t>
+            </a:r>
+            <a:endParaRPr lang="en-US" sz="1000" dirty="0"/>
+          </a:p>
+        </p:txBody>
+      </p:sp>
+      <p:sp>
+        <p:nvSpPr>
+          <p:cNvPr id="8" name="Text 6"/>
+          <p:cNvSpPr txBox="1"/>
+          <p:nvPr/>
+        </p:nvSpPr>
+        <p:spPr>
+          <a:xfrm>
             <a:off x="320040" y="4663440"/>
             <a:ext cx="8503920" cy="201168"/>
           </a:xfrm>
@@ -16396,7 +17142,7 @@
                 <a:ea typeface="Calibri" pitchFamily="34" charset="-122"/>
                 <a:cs typeface="Calibri" pitchFamily="34" charset="-120"/>
               </a:rPr>
-              <a:t>Source: Illustrative firm ("Meridian Corp"); framework from CFA Vol 3 LM 6, pp. 178–182.</a:t>
+              <a:t>Source: Illustrative company ("Meridian Corp") built on CFA Vol 3, Learning Module 6, §2, pp. 178–182. The curriculum works the same point in Question Set 3–4, pp. 181–182.</a:t>
             </a:r>
             <a:endParaRPr lang="en-US" sz="750" dirty="0"/>
           </a:p>
@@ -16404,7 +17150,7 @@
       </p:sp>
       <p:sp>
         <p:nvSpPr>
-          <p:cNvPr id="8" name="Text 6"/>
+          <p:cNvPr id="9" name="Text 7"/>
           <p:cNvSpPr txBox="1"/>
           <p:nvPr/>
         </p:nvSpPr>
@@ -16438,7 +17184,7 @@
                 <a:ea typeface="Calibri" pitchFamily="34" charset="-122"/>
                 <a:cs typeface="Calibri" pitchFamily="34" charset="-120"/>
               </a:rPr>
-              <a:t>Market values reflect investors' current opportunity cost; book values reflect historic accounting. For cost-of-capital work, market always wins.</a:t>
+              <a:t>Market values are what investors could realise today, so they measure opportunity cost. Book values are what was paid, years ago.</a:t>
             </a:r>
             <a:endParaRPr lang="en-US" sz="1300" dirty="0"/>
           </a:p>
@@ -16459,7 +17205,7 @@
           </p:nvPr>
         </p:nvGraphicFramePr>
         <p:xfrm>
-          <a:off x="320040" y="1188720"/>
+          <a:off x="320040" y="1115568"/>
           <a:ext cx="8503920" cy="914400"/>
         </p:xfrm>
         <a:graphic>
@@ -16995,7 +17741,7 @@
                           <a:ea typeface="Calibri" pitchFamily="34" charset="-122"/>
                           <a:cs typeface="Calibri" pitchFamily="34" charset="-120"/>
                         </a:rPr>
-                        <a:t>Common equity (60M shares × USD 20)</a:t>
+                        <a:t>Common equity (60m shares × USD 20)</a:t>
                       </a:r>
                       <a:endParaRPr lang="en-US" sz="1100" dirty="0">
                         <a:latin typeface="Calibri" charset="0"/>
@@ -17517,14 +18263,14 @@
       </p:graphicFrame>
       <p:sp>
         <p:nvSpPr>
-          <p:cNvPr id="10" name="Shape 7"/>
+          <p:cNvPr id="11" name="Shape 8"/>
           <p:cNvSpPr/>
           <p:nvPr/>
         </p:nvSpPr>
         <p:spPr>
           <a:xfrm>
-            <a:off x="320040" y="2651760"/>
-            <a:ext cx="8503920" cy="1645920"/>
+            <a:off x="320040" y="2267712"/>
+            <a:ext cx="8503920" cy="2029968"/>
           </a:xfrm>
           <a:prstGeom prst="rect">
             <a:avLst/>
@@ -17542,13 +18288,13 @@
       </p:sp>
       <p:sp>
         <p:nvSpPr>
-          <p:cNvPr id="11" name="Text 8"/>
+          <p:cNvPr id="12" name="Text 9"/>
           <p:cNvSpPr txBox="1"/>
           <p:nvPr/>
         </p:nvSpPr>
         <p:spPr>
           <a:xfrm>
-            <a:off x="457200" y="2697480"/>
+            <a:off x="457200" y="2313432"/>
             <a:ext cx="8229600" cy="256032"/>
           </a:xfrm>
           <a:prstGeom prst="rect">
@@ -17584,13 +18330,13 @@
       </p:sp>
       <p:sp>
         <p:nvSpPr>
-          <p:cNvPr id="12" name="Text 9"/>
+          <p:cNvPr id="13" name="Text 10"/>
           <p:cNvSpPr txBox="1"/>
           <p:nvPr/>
         </p:nvSpPr>
         <p:spPr>
           <a:xfrm>
-            <a:off x="457200" y="2990088"/>
+            <a:off x="457200" y="2606040"/>
             <a:ext cx="8229600" cy="457200"/>
           </a:xfrm>
           <a:prstGeom prst="rect">
@@ -17618,7 +18364,7 @@
                 <a:ea typeface="Calibri" pitchFamily="34" charset="-122"/>
                 <a:cs typeface="Calibri" pitchFamily="34" charset="-120"/>
               </a:rPr>
-              <a:t>Pre-tax cost of debt = YTM = 4.0%. Cost of equity (CAPM) = 9.5%. Use market-value weights.</a:t>
+              <a:t>Pre-tax cost of debt = YTM = 4.0%. Cost of equity from CAPM = 9.5%. Use market-value weights.</a:t>
             </a:r>
             <a:endParaRPr lang="en-US" sz="1200" dirty="0"/>
           </a:p>
@@ -17626,14 +18372,14 @@
       </p:sp>
       <p:sp>
         <p:nvSpPr>
-          <p:cNvPr id="13" name="Text 10"/>
+          <p:cNvPr id="14" name="Text 11"/>
           <p:cNvSpPr txBox="1"/>
           <p:nvPr/>
         </p:nvSpPr>
         <p:spPr>
           <a:xfrm>
-            <a:off x="457200" y="3502152"/>
-            <a:ext cx="8229600" cy="283464"/>
+            <a:off x="457200" y="3118104"/>
+            <a:ext cx="8229600" cy="667512"/>
           </a:xfrm>
           <a:prstGeom prst="rect">
             <a:avLst/>
@@ -17655,7 +18401,7 @@
               <a:buNone/>
             </a:pPr>
             <a:r>
-              <a:rPr lang="en-US" sz="1050" b="1" dirty="0">
+              <a:rPr lang="en-US" sz="1100" b="1" dirty="0">
                 <a:solidFill>
                   <a:srgbClr val="1B2A4A"/>
                 </a:solidFill>
@@ -17672,7 +18418,7 @@
               <a:buNone/>
             </a:pPr>
             <a:r>
-              <a:rPr lang="en-US" sz="1050" dirty="0">
+              <a:rPr lang="en-US" sz="1100" dirty="0">
                 <a:solidFill>
                   <a:srgbClr val="334155"/>
                 </a:solidFill>
@@ -17690,7 +18436,7 @@
               <a:buNone/>
             </a:pPr>
             <a:r>
-              <a:rPr lang="en-US" sz="1050" b="1" dirty="0">
+              <a:rPr lang="en-US" sz="1100" b="1" dirty="0">
                 <a:solidFill>
                   <a:srgbClr val="1B2A4A"/>
                 </a:solidFill>
@@ -17707,7 +18453,7 @@
               <a:buNone/>
             </a:pPr>
             <a:r>
-              <a:rPr lang="en-US" sz="1050" dirty="0">
+              <a:rPr lang="en-US" sz="1100" dirty="0">
                 <a:solidFill>
                   <a:srgbClr val="334155"/>
                 </a:solidFill>
@@ -17725,7 +18471,7 @@
               <a:buNone/>
             </a:pPr>
             <a:r>
-              <a:rPr lang="en-US" sz="1050" b="1" dirty="0">
+              <a:rPr lang="en-US" sz="1100" b="1" dirty="0">
                 <a:solidFill>
                   <a:srgbClr val="1B2A4A"/>
                 </a:solidFill>
@@ -17742,7 +18488,7 @@
               <a:buNone/>
             </a:pPr>
             <a:r>
-              <a:rPr lang="en-US" sz="1050" dirty="0">
+              <a:rPr lang="en-US" sz="1100" dirty="0">
                 <a:solidFill>
                   <a:srgbClr val="334155"/>
                 </a:solidFill>
@@ -17760,7 +18506,7 @@
               <a:buNone/>
             </a:pPr>
             <a:r>
-              <a:rPr lang="en-US" sz="1050" b="1" dirty="0">
+              <a:rPr lang="en-US" sz="1100" b="1" dirty="0">
                 <a:solidFill>
                   <a:srgbClr val="1B2A4A"/>
                 </a:solidFill>
@@ -17777,7 +18523,7 @@
               <a:buNone/>
             </a:pPr>
             <a:r>
-              <a:rPr lang="en-US" sz="1050" dirty="0">
+              <a:rPr lang="en-US" sz="1100" dirty="0">
                 <a:solidFill>
                   <a:srgbClr val="334155"/>
                 </a:solidFill>
@@ -17785,15 +18531,15 @@
                 <a:ea typeface="Calibri" pitchFamily="34" charset="-122"/>
                 <a:cs typeface="Calibri" pitchFamily="34" charset="-120"/>
               </a:rPr>
-              <a:t>WACC = 0.78% + 7.03% = 7.81% at market weights   (vs 7.33% at book weights — book understates WACC here)</a:t>
-            </a:r>
-            <a:endParaRPr lang="en-US" sz="1050" dirty="0"/>
+              <a:t>WACC = 0.78% + 7.03% = 7.81% on market weights, against 7.33% on book weights</a:t>
+            </a:r>
+            <a:endParaRPr lang="en-US" sz="1100" dirty="0"/>
           </a:p>
         </p:txBody>
       </p:sp>
       <p:sp>
         <p:nvSpPr>
-          <p:cNvPr id="14" name="Shape 11"/>
+          <p:cNvPr id="15" name="Shape 12"/>
           <p:cNvSpPr/>
           <p:nvPr/>
         </p:nvSpPr>
@@ -17813,7 +18559,7 @@
       </p:sp>
       <p:sp>
         <p:nvSpPr>
-          <p:cNvPr id="15" name="Text 12"/>
+          <p:cNvPr id="16" name="Text 13"/>
           <p:cNvSpPr txBox="1"/>
           <p:nvPr/>
         </p:nvSpPr>
@@ -17847,7 +18593,7 @@
                 <a:ea typeface="Consolas" pitchFamily="34" charset="-122"/>
                 <a:cs typeface="Consolas" pitchFamily="34" charset="-120"/>
               </a:rPr>
-              <a:t>WACC ≈ 7.8% — use for projects of average Meridian risk; adjust up for higher-risk projects.</a:t>
+              <a:t>WACC = 7.81%. Book weights flatter the firm by 48bp.</a:t>
             </a:r>
             <a:endParaRPr lang="en-US" sz="1150" dirty="0"/>
           </a:p>
@@ -17946,7 +18692,7 @@
               <a:buNone/>
             </a:pPr>
             <a:r>
-              <a:rPr lang="en-US" sz="1600" b="1" dirty="0">
+              <a:rPr lang="en-US" sz="1700" b="1" dirty="0">
                 <a:solidFill>
                   <a:srgbClr val="FFFFFF"/>
                 </a:solidFill>
@@ -17954,9 +18700,9 @@
                 <a:ea typeface="Trebuchet MS" pitchFamily="34" charset="-122"/>
                 <a:cs typeface="Trebuchet MS" pitchFamily="34" charset="-120"/>
               </a:rPr>
-              <a:t>Capital structure depends on business model and corporate life cycle — startup, growth, and mature firms finance themselves differently</a:t>
-            </a:r>
-            <a:endParaRPr lang="en-US" sz="1600" dirty="0"/>
+              <a:t>Business model and life-cycle stage set the mix — startups, growth firms and mature firms are financed in visibly different ways</a:t>
+            </a:r>
+            <a:endParaRPr lang="en-US" sz="1700" dirty="0"/>
           </a:p>
         </p:txBody>
       </p:sp>
@@ -18058,7 +18804,7 @@
                 <a:ea typeface="Calibri" pitchFamily="34" charset="-122"/>
                 <a:cs typeface="Calibri" pitchFamily="34" charset="-120"/>
               </a:rPr>
-              <a:t>Source: CFA Institute, Curriculum Vol 3, Learning Module 6, Exhibit 2, pp. 183–186.</a:t>
+              <a:t>Source: CFA Institute, Curriculum Vol 3, Learning Module 6, §3 "Factors Affecting Capital Structure", Exhibit 2, pp. 185–186.</a:t>
             </a:r>
             <a:endParaRPr lang="en-US" sz="750" dirty="0"/>
           </a:p>
@@ -18100,7 +18846,7 @@
                 <a:ea typeface="Calibri" pitchFamily="34" charset="-122"/>
                 <a:cs typeface="Calibri" pitchFamily="34" charset="-120"/>
               </a:rPr>
-              <a:t>Business risk falls and free cash flow rises as firms mature — lenders respond by offering bigger cheques at lower spreads, on less restrictive terms.</a:t>
+              <a:t>Business risk falls and free cash flow stabilises as a firm matures, so lenders respond with bigger cheques, tighter spreads and looser terms — in that order.</a:t>
             </a:r>
             <a:endParaRPr lang="en-US" sz="1300" dirty="0"/>
           </a:p>
@@ -18404,7 +19150,7 @@
                           <a:ea typeface="Consolas" pitchFamily="34" charset="-122"/>
                           <a:cs typeface="Consolas" pitchFamily="34" charset="-120"/>
                         </a:rPr>
-                        <a:t>Initial / zero</a:t>
+                        <a:t>Initial</a:t>
                       </a:r>
                       <a:endParaRPr lang="en-US" sz="1100" dirty="0">
                         <a:latin typeface="Consolas" charset="0"/>
@@ -18454,7 +19200,7 @@
                           <a:ea typeface="Consolas" pitchFamily="34" charset="-122"/>
                           <a:cs typeface="Consolas" pitchFamily="34" charset="-120"/>
                         </a:rPr>
-                        <a:t>Rising fast</a:t>
+                        <a:t>Rising</a:t>
                       </a:r>
                       <a:endParaRPr lang="en-US" sz="1100" dirty="0">
                         <a:latin typeface="Consolas" charset="0"/>
@@ -18504,7 +19250,7 @@
                           <a:ea typeface="Consolas" pitchFamily="34" charset="-122"/>
                           <a:cs typeface="Consolas" pitchFamily="34" charset="-120"/>
                         </a:rPr>
-                        <a:t>Slowing, predictable</a:t>
+                        <a:t>Slowing</a:t>
                       </a:r>
                       <a:endParaRPr lang="en-US" sz="1100" dirty="0">
                         <a:latin typeface="Consolas" charset="0"/>
@@ -18656,7 +19402,7 @@
                           <a:ea typeface="Consolas" pitchFamily="34" charset="-122"/>
                           <a:cs typeface="Consolas" pitchFamily="34" charset="-120"/>
                         </a:rPr>
-                        <a:t>Negative / turning positive</a:t>
+                        <a:t>Rising, often still &lt;0</a:t>
                       </a:r>
                       <a:endParaRPr lang="en-US" sz="1100" dirty="0">
                         <a:latin typeface="Consolas" charset="0"/>
@@ -18706,7 +19452,7 @@
                           <a:ea typeface="Consolas" pitchFamily="34" charset="-122"/>
                           <a:cs typeface="Consolas" pitchFamily="34" charset="-120"/>
                         </a:rPr>
-                        <a:t>Stable positive</a:t>
+                        <a:t>Stable, positive</a:t>
                       </a:r>
                       <a:endParaRPr lang="en-US" sz="1100" dirty="0">
                         <a:latin typeface="Consolas" charset="0"/>
@@ -19010,7 +19756,7 @@
                           <a:ea typeface="Consolas" pitchFamily="34" charset="-122"/>
                           <a:cs typeface="Consolas" pitchFamily="34" charset="-120"/>
                         </a:rPr>
-                        <a:t>Little to none</a:t>
+                        <a:t>Little or none</a:t>
                       </a:r>
                       <a:endParaRPr lang="en-US" sz="1100" dirty="0">
                         <a:latin typeface="Consolas" charset="0"/>
@@ -19212,7 +19958,7 @@
                           <a:ea typeface="Consolas" pitchFamily="34" charset="-122"/>
                           <a:cs typeface="Consolas" pitchFamily="34" charset="-120"/>
                         </a:rPr>
-                        <a:t>Convertible · leases</a:t>
+                        <a:t>Convertible, leases</a:t>
                       </a:r>
                       <a:endParaRPr lang="en-US" sz="1100" dirty="0">
                         <a:latin typeface="Consolas" charset="0"/>
@@ -19262,7 +20008,7 @@
                           <a:ea typeface="Consolas" pitchFamily="34" charset="-122"/>
                           <a:cs typeface="Consolas" pitchFamily="34" charset="-120"/>
                         </a:rPr>
-                        <a:t>Secured term loans</a:t>
+                        <a:t>Secured</a:t>
                       </a:r>
                       <a:endParaRPr lang="en-US" sz="1100" dirty="0">
                         <a:latin typeface="Consolas" charset="0"/>
@@ -19312,7 +20058,7 @@
                           <a:ea typeface="Consolas" pitchFamily="34" charset="-122"/>
                           <a:cs typeface="Consolas" pitchFamily="34" charset="-120"/>
                         </a:rPr>
-                        <a:t>Unsecured bonds, IG-rated</a:t>
+                        <a:t>Unsecured</a:t>
                       </a:r>
                       <a:endParaRPr lang="en-US" sz="1100" dirty="0">
                         <a:latin typeface="Consolas" charset="0"/>
@@ -19414,7 +20160,7 @@
                           <a:ea typeface="Consolas" pitchFamily="34" charset="-122"/>
                           <a:cs typeface="Consolas" pitchFamily="34" charset="-120"/>
                         </a:rPr>
-                        <a:t>Founders · VC</a:t>
+                        <a:t>Founders, VC</a:t>
                       </a:r>
                       <a:endParaRPr lang="en-US" sz="1100" dirty="0">
                         <a:latin typeface="Consolas" charset="0"/>
@@ -19464,7 +20210,7 @@
                           <a:ea typeface="Consolas" pitchFamily="34" charset="-122"/>
                           <a:cs typeface="Consolas" pitchFamily="34" charset="-120"/>
                         </a:rPr>
-                        <a:t>Growth equity · late-stage PE</a:t>
+                        <a:t>Growth equity, PE</a:t>
                       </a:r>
                       <a:endParaRPr lang="en-US" sz="1100" dirty="0">
                         <a:latin typeface="Consolas" charset="0"/>
@@ -19514,7 +20260,7 @@
                           <a:ea typeface="Consolas" pitchFamily="34" charset="-122"/>
                           <a:cs typeface="Consolas" pitchFamily="34" charset="-120"/>
                         </a:rPr>
-                        <a:t>Public market · retained earnings</a:t>
+                        <a:t>Retained earnings</a:t>
                       </a:r>
                       <a:endParaRPr lang="en-US" sz="1100" dirty="0">
                         <a:latin typeface="Consolas" charset="0"/>
@@ -19566,7 +20312,7 @@
                           <a:ea typeface="Calibri" pitchFamily="34" charset="-122"/>
                           <a:cs typeface="Calibri" pitchFamily="34" charset="-120"/>
                         </a:rPr>
-                        <a:t>Example firm</a:t>
+                        <a:t>Illustrative firm</a:t>
                       </a:r>
                       <a:endParaRPr lang="en-US" sz="1100" dirty="0">
                         <a:latin typeface="Calibri" charset="0"/>
@@ -19616,7 +20362,7 @@
                           <a:ea typeface="Consolas" pitchFamily="34" charset="-122"/>
                           <a:cs typeface="Consolas" pitchFamily="34" charset="-120"/>
                         </a:rPr>
-                        <a:t>Biotech pre-FDA</a:t>
+                        <a:t>Biotech pre-approval</a:t>
                       </a:r>
                       <a:endParaRPr lang="en-US" sz="1100" dirty="0">
                         <a:latin typeface="Consolas" charset="0"/>
@@ -19666,7 +20412,7 @@
                           <a:ea typeface="Consolas" pitchFamily="34" charset="-122"/>
                           <a:cs typeface="Consolas" pitchFamily="34" charset="-120"/>
                         </a:rPr>
-                        <a:t>Tesla (circa 2015)</a:t>
+                        <a:t>Tesla circa 2015</a:t>
                       </a:r>
                       <a:endParaRPr lang="en-US" sz="1100" dirty="0">
                         <a:latin typeface="Consolas" charset="0"/>
@@ -19716,7 +20462,7 @@
                           <a:ea typeface="Consolas" pitchFamily="34" charset="-122"/>
                           <a:cs typeface="Consolas" pitchFamily="34" charset="-120"/>
                         </a:rPr>
-                        <a:t>Coca-Cola, Procter &amp; Gamble</a:t>
+                        <a:t>Coca-Cola, P&amp;G</a:t>
                       </a:r>
                       <a:endParaRPr lang="en-US" sz="1100" dirty="0">
                         <a:latin typeface="Consolas" charset="0"/>
@@ -19762,8 +20508,8 @@
         </p:nvSpPr>
         <p:spPr>
           <a:xfrm>
-            <a:off x="320040" y="3657600"/>
-            <a:ext cx="8503920" cy="685800"/>
+            <a:off x="320040" y="3520440"/>
+            <a:ext cx="8503920" cy="777240"/>
           </a:xfrm>
           <a:prstGeom prst="rect">
             <a:avLst/>
@@ -19782,8 +20528,8 @@
         </p:nvSpPr>
         <p:spPr>
           <a:xfrm>
-            <a:off x="320040" y="3657600"/>
-            <a:ext cx="73152" cy="685800"/>
+            <a:off x="320040" y="3520440"/>
+            <a:ext cx="73152" cy="777240"/>
           </a:xfrm>
           <a:prstGeom prst="rect">
             <a:avLst/>
@@ -19802,7 +20548,7 @@
         </p:nvSpPr>
         <p:spPr>
           <a:xfrm>
-            <a:off x="457200" y="3703320"/>
+            <a:off x="457200" y="3566160"/>
             <a:ext cx="8275320" cy="256032"/>
           </a:xfrm>
           <a:prstGeom prst="rect">
@@ -19830,7 +20576,7 @@
                 <a:ea typeface="Trebuchet MS" pitchFamily="34" charset="-122"/>
                 <a:cs typeface="Trebuchet MS" pitchFamily="34" charset="-120"/>
               </a:rPr>
-              <a:t>CAPITAL-LIGHT VS CAPITAL-INTENSIVE CUTS ACROSS ALL STAGES</a:t>
+              <a:t>CAPITAL INTENSITY CUTS ACROSS EVERY STAGE</a:t>
             </a:r>
             <a:endParaRPr lang="en-US" sz="1100" dirty="0"/>
           </a:p>
@@ -19844,8 +20590,8 @@
         </p:nvSpPr>
         <p:spPr>
           <a:xfrm>
-            <a:off x="457200" y="3977640"/>
-            <a:ext cx="8275320" cy="320040"/>
+            <a:off x="457200" y="3840480"/>
+            <a:ext cx="8275320" cy="411480"/>
           </a:xfrm>
           <a:prstGeom prst="rect">
             <a:avLst/>
@@ -19872,7 +20618,7 @@
                 <a:ea typeface="Calibri" pitchFamily="34" charset="-122"/>
                 <a:cs typeface="Calibri" pitchFamily="34" charset="-120"/>
               </a:rPr>
-              <a:t>Uber / Airbnb are capital-light networks; utilities, semis, airlines are capital-intensive. The intensity axis drives HOW MUCH capital; the life-cycle axis drives WHAT TYPE.</a:t>
+              <a:t>Uber and Airbnb run capital-light networks; utilities, semiconductors and airlines are capital-intensive. Intensity decides HOW MUCH capital is needed; the life-cycle stage decides WHAT TYPE — and CFA Exhibit 2 maps that stage straight onto convertible, then secured, then unsecured.</a:t>
             </a:r>
             <a:endParaRPr lang="en-US" sz="1200" dirty="0"/>
           </a:p>
@@ -19971,7 +20717,7 @@
               <a:buNone/>
             </a:pPr>
             <a:r>
-              <a:rPr lang="en-US" sz="1700" b="1" dirty="0">
+              <a:rPr lang="en-US" sz="1600" b="1" dirty="0">
                 <a:solidFill>
                   <a:srgbClr val="FFFFFF"/>
                 </a:solidFill>
@@ -19979,9 +20725,9 @@
                 <a:ea typeface="Trebuchet MS" pitchFamily="34" charset="-122"/>
                 <a:cs typeface="Trebuchet MS" pitchFamily="34" charset="-120"/>
               </a:rPr>
-              <a:t>MM Proposition I: in a frictionless world, capital structure is irrelevant — firm value is the PV of cash flows, full stop</a:t>
-            </a:r>
-            <a:endParaRPr lang="en-US" sz="1700" dirty="0"/>
+              <a:t>MM Proposition I without taxes: in a frictionless world capital structure is irrelevant — value is the PV of the cash flows, full stop</a:t>
+            </a:r>
+            <a:endParaRPr lang="en-US" sz="1600" dirty="0"/>
           </a:p>
         </p:txBody>
       </p:sp>
@@ -20083,7 +20829,7 @@
                 <a:ea typeface="Calibri" pitchFamily="34" charset="-122"/>
                 <a:cs typeface="Calibri" pitchFamily="34" charset="-120"/>
               </a:rPr>
-              <a:t>Source: CFA Institute, Curriculum Vol 3, Learning Module 6, "MM Proposition I without Taxes", pp. 193–195.</a:t>
+              <a:t>Source: CFA Institute, Curriculum Vol 3, Learning Module 6, §4 "Capital Structure Irrelevance (MM Proposition I without Taxes)", Exhibit 3, pp. 193–195.</a:t>
             </a:r>
             <a:endParaRPr lang="en-US" sz="750" dirty="0"/>
           </a:p>
@@ -20125,7 +20871,7 @@
                 <a:ea typeface="Calibri" pitchFamily="34" charset="-122"/>
                 <a:cs typeface="Calibri" pitchFamily="34" charset="-120"/>
               </a:rPr>
-              <a:t>Modigliani &amp; Miller (1958) — the starting point of modern corporate finance, and the benchmark against which every real-world deviation is measured.</a:t>
+              <a:t>Modigliani and Miller, 1958 — the starting point of modern corporate finance, and the benchmark against which every real-world deviation gets measured.</a:t>
             </a:r>
             <a:endParaRPr lang="en-US" sz="1300" dirty="0"/>
           </a:p>
@@ -20139,8 +20885,8 @@
         </p:nvSpPr>
         <p:spPr>
           <a:xfrm>
-            <a:off x="320040" y="1234440"/>
-            <a:ext cx="8503920" cy="658368"/>
+            <a:off x="320040" y="1188720"/>
+            <a:ext cx="8503920" cy="566928"/>
           </a:xfrm>
           <a:prstGeom prst="rect">
             <a:avLst/>
@@ -20159,8 +20905,8 @@
         </p:nvSpPr>
         <p:spPr>
           <a:xfrm>
-            <a:off x="411480" y="1234440"/>
-            <a:ext cx="8321040" cy="658368"/>
+            <a:off x="411480" y="1188720"/>
+            <a:ext cx="8321040" cy="566928"/>
           </a:xfrm>
           <a:prstGeom prst="rect">
             <a:avLst/>
@@ -20187,7 +20933,7 @@
                 <a:ea typeface="Consolas" pitchFamily="34" charset="-122"/>
                 <a:cs typeface="Consolas" pitchFamily="34" charset="-120"/>
               </a:rPr>
-              <a:t>V_L  =  V_U        —        firm value independent of D/E mix</a:t>
+              <a:t>V_L  =  V_U      —      and WACC is unaffected by the mix</a:t>
             </a:r>
             <a:endParaRPr lang="en-US" sz="1800" dirty="0"/>
           </a:p>
@@ -20201,7 +20947,7 @@
         </p:nvSpPr>
         <p:spPr>
           <a:xfrm>
-            <a:off x="320040" y="1920240"/>
+            <a:off x="320040" y="1783080"/>
             <a:ext cx="8503920" cy="256032"/>
           </a:xfrm>
           <a:prstGeom prst="rect">
@@ -20229,7 +20975,7 @@
                 <a:ea typeface="Calibri" pitchFamily="34" charset="-122"/>
                 <a:cs typeface="Calibri" pitchFamily="34" charset="-120"/>
               </a:rPr>
-              <a:t>where: V_L = value of levered firm; V_U = value of unlevered firm. Holds under the five MM assumptions below.</a:t>
+              <a:t>where: V_L = value of the levered firm; V_U = value of the same firm all-equity. Holds only under the five MM assumptions below.</a:t>
             </a:r>
             <a:endParaRPr lang="en-US" sz="1100" dirty="0"/>
           </a:p>
@@ -20250,7 +20996,7 @@
           </p:nvPr>
         </p:nvGraphicFramePr>
         <p:xfrm>
-          <a:off x="320040" y="2148840"/>
+          <a:off x="320040" y="2103120"/>
           <a:ext cx="8503920" cy="914400"/>
         </p:xfrm>
         <a:graphic>
@@ -20258,8 +21004,8 @@
             <a:tbl>
               <a:tblPr/>
               <a:tblGrid>
-                <a:gridCol w="3840480"/>
-                <a:gridCol w="4663440"/>
+                <a:gridCol w="3291840"/>
+                <a:gridCol w="5212080"/>
               </a:tblGrid>
               <a:tr h="274320">
                 <a:tc>
@@ -20279,7 +21025,7 @@
                           <a:ea typeface="Trebuchet MS" pitchFamily="34" charset="-122"/>
                           <a:cs typeface="Trebuchet MS" pitchFamily="34" charset="-120"/>
                         </a:rPr>
-                        <a:t>MM Assumption</a:t>
+                        <a:t>MM assumption (CFA Exhibit 3)</a:t>
                       </a:r>
                       <a:endParaRPr lang="en-US" sz="1100" dirty="0">
                         <a:latin typeface="Trebuchet MS" charset="0"/>
@@ -20329,7 +21075,7 @@
                           <a:ea typeface="Trebuchet MS" pitchFamily="34" charset="-122"/>
                           <a:cs typeface="Trebuchet MS" pitchFamily="34" charset="-120"/>
                         </a:rPr>
-                        <a:t>What it rules out in the real world</a:t>
+                        <a:t>What it rules out — and the reality</a:t>
                       </a:r>
                       <a:endParaRPr lang="en-US" sz="1100" dirty="0">
                         <a:latin typeface="Trebuchet MS" charset="0"/>
@@ -20431,7 +21177,7 @@
                           <a:ea typeface="Consolas" pitchFamily="34" charset="-122"/>
                           <a:cs typeface="Consolas" pitchFamily="34" charset="-120"/>
                         </a:rPr>
-                        <a:t>Investors disagree on cash-flow forecasts in reality.</a:t>
+                        <a:t>Investors disagree about cash flows</a:t>
                       </a:r>
                       <a:endParaRPr lang="en-US" sz="1100" dirty="0">
                         <a:latin typeface="Consolas" charset="0"/>
@@ -20483,7 +21229,7 @@
                           <a:ea typeface="Calibri" pitchFamily="34" charset="-122"/>
                           <a:cs typeface="Calibri" pitchFamily="34" charset="-120"/>
                         </a:rPr>
-                        <a:t>2. Perfect capital markets (no tax, no friction)</a:t>
+                        <a:t>2. Perfect capital markets</a:t>
                       </a:r>
                       <a:endParaRPr lang="en-US" sz="1100" dirty="0">
                         <a:latin typeface="Calibri" charset="0"/>
@@ -20533,7 +21279,7 @@
                           <a:ea typeface="Consolas" pitchFamily="34" charset="-122"/>
                           <a:cs typeface="Consolas" pitchFamily="34" charset="-120"/>
                         </a:rPr>
-                        <a:t>Interest is tax-deductible, bankruptcy has direct &amp; indirect costs.</a:t>
+                        <a:t>Interest is deductible; distress is costly</a:t>
                       </a:r>
                       <a:endParaRPr lang="en-US" sz="1100" dirty="0">
                         <a:latin typeface="Consolas" charset="0"/>
@@ -20585,7 +21331,7 @@
                           <a:ea typeface="Calibri" pitchFamily="34" charset="-122"/>
                           <a:cs typeface="Calibri" pitchFamily="34" charset="-120"/>
                         </a:rPr>
-                        <a:t>3. Common risk-free borrow/lend rate</a:t>
+                        <a:t>3. Risk-free borrow and lend</a:t>
                       </a:r>
                       <a:endParaRPr lang="en-US" sz="1100" dirty="0">
                         <a:latin typeface="Calibri" charset="0"/>
@@ -20635,7 +21381,7 @@
                           <a:ea typeface="Consolas" pitchFamily="34" charset="-122"/>
                           <a:cs typeface="Consolas" pitchFamily="34" charset="-120"/>
                         </a:rPr>
-                        <a:t>Individuals borrow at higher rates than corporations.</a:t>
+                        <a:t>Individuals pay more than corporates do</a:t>
                       </a:r>
                       <a:endParaRPr lang="en-US" sz="1100" dirty="0">
                         <a:latin typeface="Consolas" charset="0"/>
@@ -20737,7 +21483,7 @@
                           <a:ea typeface="Consolas" pitchFamily="34" charset="-122"/>
                           <a:cs typeface="Consolas" pitchFamily="34" charset="-120"/>
                         </a:rPr>
-                        <a:t>Managers don't always act in shareholder interest (see Deck §3).</a:t>
+                        <a:t>Managers do not always act for owners</a:t>
                       </a:r>
                       <a:endParaRPr lang="en-US" sz="1100" dirty="0">
                         <a:latin typeface="Consolas" charset="0"/>
@@ -20789,7 +21535,7 @@
                           <a:ea typeface="Calibri" pitchFamily="34" charset="-122"/>
                           <a:cs typeface="Calibri" pitchFamily="34" charset="-120"/>
                         </a:rPr>
-                        <a:t>5. Financing &amp; investment decisions independent</a:t>
+                        <a:t>5. Financing / investment separate</a:t>
                       </a:r>
                       <a:endParaRPr lang="en-US" sz="1100" dirty="0">
                         <a:latin typeface="Calibri" charset="0"/>
@@ -20839,7 +21585,7 @@
                           <a:ea typeface="Consolas" pitchFamily="34" charset="-122"/>
                           <a:cs typeface="Consolas" pitchFamily="34" charset="-120"/>
                         </a:rPr>
-                        <a:t>In practice they interact — e.g. signalling, covenants.</a:t>
+                        <a:t>They interact — signalling, covenants</a:t>
                       </a:r>
                       <a:endParaRPr lang="en-US" sz="1100" dirty="0">
                         <a:latin typeface="Consolas" charset="0"/>
@@ -20885,8 +21631,8 @@
         </p:nvSpPr>
         <p:spPr>
           <a:xfrm>
-            <a:off x="320040" y="3840480"/>
-            <a:ext cx="8503920" cy="502920"/>
+            <a:off x="320040" y="3822192"/>
+            <a:ext cx="8503920" cy="731520"/>
           </a:xfrm>
           <a:prstGeom prst="rect">
             <a:avLst/>
@@ -20905,8 +21651,8 @@
         </p:nvSpPr>
         <p:spPr>
           <a:xfrm>
-            <a:off x="320040" y="3840480"/>
-            <a:ext cx="73152" cy="502920"/>
+            <a:off x="320040" y="3822192"/>
+            <a:ext cx="73152" cy="731520"/>
           </a:xfrm>
           <a:prstGeom prst="rect">
             <a:avLst/>
@@ -20925,7 +21671,7 @@
         </p:nvSpPr>
         <p:spPr>
           <a:xfrm>
-            <a:off x="457200" y="3886200"/>
+            <a:off x="457200" y="3867912"/>
             <a:ext cx="8275320" cy="256032"/>
           </a:xfrm>
           <a:prstGeom prst="rect">
@@ -20953,7 +21699,7 @@
                 <a:ea typeface="Trebuchet MS" pitchFamily="34" charset="-122"/>
                 <a:cs typeface="Trebuchet MS" pitchFamily="34" charset="-120"/>
               </a:rPr>
-              <a:t>HOMEMADE LEVERAGE</a:t>
+              <a:t>HOMEMADE LEVERAGE — AND THE ASSUMPTION EVERYONE MISSTATES</a:t>
             </a:r>
             <a:endParaRPr lang="en-US" sz="1100" dirty="0"/>
           </a:p>
@@ -20967,8 +21713,8 @@
         </p:nvSpPr>
         <p:spPr>
           <a:xfrm>
-            <a:off x="457200" y="4160520"/>
-            <a:ext cx="8275320" cy="137160"/>
+            <a:off x="457200" y="4142232"/>
+            <a:ext cx="8275320" cy="365760"/>
           </a:xfrm>
           <a:prstGeom prst="rect">
             <a:avLst/>
@@ -20995,7 +21741,7 @@
                 <a:ea typeface="Calibri" pitchFamily="34" charset="-122"/>
                 <a:cs typeface="Calibri" pitchFamily="34" charset="-120"/>
               </a:rPr>
-              <a:t>An investor preferring 70% leverage at a 50%-levered firm can borrow on personal account to replicate it. Arbitrage forces V_L = V_U.</a:t>
+              <a:t>An investor who wants 70% leverage at a 50%-levered firm simply borrows on personal account, so arbitrage forces V_L = V_U. And note: MM did not assume bankruptcy away. They assumed it happens at zero cost.</a:t>
             </a:r>
             <a:endParaRPr lang="en-US" sz="1200" dirty="0"/>
           </a:p>
@@ -21094,7 +21840,7 @@
               <a:buNone/>
             </a:pPr>
             <a:r>
-              <a:rPr lang="en-US" sz="1800" b="1" dirty="0">
+              <a:rPr lang="en-US" sz="1600" b="1" dirty="0">
                 <a:solidFill>
                   <a:srgbClr val="FFFFFF"/>
                 </a:solidFill>
@@ -21102,9 +21848,9 @@
                 <a:ea typeface="Trebuchet MS" pitchFamily="34" charset="-122"/>
                 <a:cs typeface="Trebuchet MS" pitchFamily="34" charset="-120"/>
               </a:rPr>
-              <a:t>MM Proposition II without taxes: more debt raises the cost of equity 1-for-1, leaving WACC unchanged</a:t>
-            </a:r>
-            <a:endParaRPr lang="en-US" sz="1800" dirty="0"/>
+              <a:t>MM Proposition II without taxes: more debt raises the cost of equity by exactly enough to offset the cheaper debt, so WACC does not move</a:t>
+            </a:r>
+            <a:endParaRPr lang="en-US" sz="1600" dirty="0"/>
           </a:p>
         </p:txBody>
       </p:sp>
@@ -21178,6 +21924,46 @@
         </p:nvSpPr>
         <p:spPr>
           <a:xfrm>
+            <a:off x="320040" y="4471416"/>
+            <a:ext cx="8503920" cy="192024"/>
+          </a:xfrm>
+          <a:prstGeom prst="rect">
+            <a:avLst/>
+          </a:prstGeom>
+          <a:noFill/>
+          <a:ln/>
+        </p:spPr>
+        <p:txBody>
+          <a:bodyPr wrap="square" lIns="254" tIns="254" rIns="254" bIns="254" rtlCol="0" anchor="t"/>
+          <a:lstStyle/>
+          <a:p>
+            <a:pPr indent="0" marL="0">
+              <a:buNone/>
+            </a:pPr>
+            <a:r>
+              <a:rPr lang="en-US" sz="1000" dirty="0">
+                <a:solidFill>
+                  <a:srgbClr val="6B7A8D"/>
+                </a:solidFill>
+                <a:latin typeface="Calibri" pitchFamily="34" charset="0"/>
+                <a:ea typeface="Calibri" pitchFamily="34" charset="-122"/>
+                <a:cs typeface="Calibri" pitchFamily="34" charset="-120"/>
+              </a:rPr>
+              <a:t>¹ CFA Exhibit 4 plots it: r_e rises linearly in D/E from an intercept of r_0 with slope (r_0 − r_d), while WACC stays flat.
+</a:t>
+            </a:r>
+            <a:endParaRPr lang="en-US" sz="1000" dirty="0"/>
+          </a:p>
+        </p:txBody>
+      </p:sp>
+      <p:sp>
+        <p:nvSpPr>
+          <p:cNvPr id="8" name="Text 6"/>
+          <p:cNvSpPr txBox="1"/>
+          <p:nvPr/>
+        </p:nvSpPr>
+        <p:spPr>
+          <a:xfrm>
             <a:off x="320040" y="4663440"/>
             <a:ext cx="8503920" cy="201168"/>
           </a:xfrm>
@@ -21206,7 +21992,7 @@
                 <a:ea typeface="Calibri" pitchFamily="34" charset="-122"/>
                 <a:cs typeface="Calibri" pitchFamily="34" charset="-120"/>
               </a:rPr>
-              <a:t>Source: CFA Institute, Curriculum Vol 3, Learning Module 6, Example 2 (Gerhardt), pp. 195–197.</a:t>
+              <a:t>Source: CFA Institute, Curriculum Vol 3, Learning Module 6, §4, Equation 4 and Example 2 "Gerhardt Corporation Cost of Equity", pp. 195–197.</a:t>
             </a:r>
             <a:endParaRPr lang="en-US" sz="750" dirty="0"/>
           </a:p>
@@ -21214,7 +22000,7 @@
       </p:sp>
       <p:sp>
         <p:nvSpPr>
-          <p:cNvPr id="8" name="Text 6"/>
+          <p:cNvPr id="9" name="Text 7"/>
           <p:cNvSpPr txBox="1"/>
           <p:nvPr/>
         </p:nvSpPr>
@@ -21248,7 +22034,7 @@
                 <a:ea typeface="Calibri" pitchFamily="34" charset="-122"/>
                 <a:cs typeface="Calibri" pitchFamily="34" charset="-120"/>
               </a:rPr>
-              <a:t>The cheaper debt is exactly offset by a rising cost of equity — the classic MM see-saw.</a:t>
+              <a:t>Debt is cheaper because it is senior. Adding it makes the remaining equity riskier by precisely the amount that cancels the saving.</a:t>
             </a:r>
             <a:endParaRPr lang="en-US" sz="1300" dirty="0"/>
           </a:p>
@@ -21256,14 +22042,14 @@
       </p:sp>
       <p:sp>
         <p:nvSpPr>
-          <p:cNvPr id="9" name="Shape 7"/>
+          <p:cNvPr id="10" name="Shape 8"/>
           <p:cNvSpPr/>
           <p:nvPr/>
         </p:nvSpPr>
         <p:spPr>
           <a:xfrm>
-            <a:off x="320040" y="1234440"/>
-            <a:ext cx="8503920" cy="658368"/>
+            <a:off x="320040" y="1170432"/>
+            <a:ext cx="8503920" cy="566928"/>
           </a:xfrm>
           <a:prstGeom prst="rect">
             <a:avLst/>
@@ -21276,14 +22062,14 @@
       </p:sp>
       <p:sp>
         <p:nvSpPr>
-          <p:cNvPr id="10" name="Text 8"/>
+          <p:cNvPr id="11" name="Text 9"/>
           <p:cNvSpPr txBox="1"/>
           <p:nvPr/>
         </p:nvSpPr>
         <p:spPr>
           <a:xfrm>
-            <a:off x="411480" y="1234440"/>
-            <a:ext cx="8321040" cy="658368"/>
+            <a:off x="411480" y="1170432"/>
+            <a:ext cx="8321040" cy="566928"/>
           </a:xfrm>
           <a:prstGeom prst="rect">
             <a:avLst/>
@@ -21318,13 +22104,13 @@
       </p:sp>
       <p:sp>
         <p:nvSpPr>
-          <p:cNvPr id="11" name="Text 9"/>
+          <p:cNvPr id="12" name="Text 10"/>
           <p:cNvSpPr txBox="1"/>
           <p:nvPr/>
         </p:nvSpPr>
         <p:spPr>
           <a:xfrm>
-            <a:off x="320040" y="1920240"/>
+            <a:off x="320040" y="1764792"/>
             <a:ext cx="8503920" cy="256032"/>
           </a:xfrm>
           <a:prstGeom prst="rect">
@@ -21352,7 +22138,7 @@
                 <a:ea typeface="Calibri" pitchFamily="34" charset="-122"/>
                 <a:cs typeface="Calibri" pitchFamily="34" charset="-120"/>
               </a:rPr>
-              <a:t>where: r_e = cost of levered equity; r_0 = cost of unlevered equity (= WACC when D = 0); r_d = cost of debt; D/E = debt-to-equity ratio.</a:t>
+              <a:t>where: r_e = cost of levered equity; r_0 = cost of equity with no debt, which equals WACC at D = 0; r_d = cost of debt; D and E at market value.</a:t>
             </a:r>
             <a:endParaRPr lang="en-US" sz="1100" dirty="0"/>
           </a:p>
@@ -21360,14 +22146,14 @@
       </p:sp>
       <p:sp>
         <p:nvSpPr>
-          <p:cNvPr id="12" name="Shape 10"/>
+          <p:cNvPr id="13" name="Shape 11"/>
           <p:cNvSpPr/>
           <p:nvPr/>
         </p:nvSpPr>
         <p:spPr>
           <a:xfrm>
-            <a:off x="320040" y="2377440"/>
-            <a:ext cx="8503920" cy="1920240"/>
+            <a:off x="320040" y="2084832"/>
+            <a:ext cx="8503920" cy="2212848"/>
           </a:xfrm>
           <a:prstGeom prst="rect">
             <a:avLst/>
@@ -21385,13 +22171,13 @@
       </p:sp>
       <p:sp>
         <p:nvSpPr>
-          <p:cNvPr id="13" name="Text 11"/>
+          <p:cNvPr id="14" name="Text 12"/>
           <p:cNvSpPr txBox="1"/>
           <p:nvPr/>
         </p:nvSpPr>
         <p:spPr>
           <a:xfrm>
-            <a:off x="457200" y="2423160"/>
+            <a:off x="457200" y="2130552"/>
             <a:ext cx="8229600" cy="256032"/>
           </a:xfrm>
           <a:prstGeom prst="rect">
@@ -21419,7 +22205,7 @@
                 <a:ea typeface="Trebuchet MS" pitchFamily="34" charset="-122"/>
                 <a:cs typeface="Trebuchet MS" pitchFamily="34" charset="-120"/>
               </a:rPr>
-              <a:t>GERHARDT CORP — ALL-EQUITY → BUYBACK WITH DEBT</a:t>
+              <a:t>CFA EXAMPLE 2 — GERHARDT CORP, ALL-EQUITY THEN A DEBT-FUNDED BUYBACK</a:t>
             </a:r>
             <a:endParaRPr lang="en-US" sz="1100" dirty="0"/>
           </a:p>
@@ -21427,13 +22213,13 @@
       </p:sp>
       <p:sp>
         <p:nvSpPr>
-          <p:cNvPr id="14" name="Text 12"/>
+          <p:cNvPr id="15" name="Text 13"/>
           <p:cNvSpPr txBox="1"/>
           <p:nvPr/>
         </p:nvSpPr>
         <p:spPr>
           <a:xfrm>
-            <a:off x="457200" y="2715768"/>
+            <a:off x="457200" y="2423160"/>
             <a:ext cx="8229600" cy="457200"/>
           </a:xfrm>
           <a:prstGeom prst="rect">
@@ -21461,7 +22247,7 @@
                 <a:ea typeface="Calibri" pitchFamily="34" charset="-122"/>
                 <a:cs typeface="Calibri" pitchFamily="34" charset="-120"/>
               </a:rPr>
-              <a:t>Gerhardt: expected perpetual CF = EUR 5,000; cost of equity (= WACC) = 10%; no taxes. Firm value = 5,000 / 0.10 = EUR 50,000. Issue EUR 15,000 debt at 5% to repurchase equity.</a:t>
+              <a:t>Gerhardt has a perpetual cash flow of EUR 5,000 and a cost of equity of 10%, which is also its WACC. No taxes, so value = 5,000 / 0.10 = EUR 50,000. It now issues EUR 15,000 of 5% debt and buys back the same amount of equity.</a:t>
             </a:r>
             <a:endParaRPr lang="en-US" sz="1200" dirty="0"/>
           </a:p>
@@ -21469,14 +22255,14 @@
       </p:sp>
       <p:sp>
         <p:nvSpPr>
-          <p:cNvPr id="15" name="Text 13"/>
+          <p:cNvPr id="16" name="Text 14"/>
           <p:cNvSpPr txBox="1"/>
           <p:nvPr/>
         </p:nvSpPr>
         <p:spPr>
           <a:xfrm>
-            <a:off x="457200" y="3227832"/>
-            <a:ext cx="8229600" cy="557784"/>
+            <a:off x="457200" y="2935224"/>
+            <a:ext cx="8229600" cy="850392"/>
           </a:xfrm>
           <a:prstGeom prst="rect">
             <a:avLst/>
@@ -21498,7 +22284,7 @@
               <a:buNone/>
             </a:pPr>
             <a:r>
-              <a:rPr lang="en-US" sz="1050" b="1" dirty="0">
+              <a:rPr lang="en-US" sz="1150" b="1" dirty="0">
                 <a:solidFill>
                   <a:srgbClr val="1B2A4A"/>
                 </a:solidFill>
@@ -21515,7 +22301,7 @@
               <a:buNone/>
             </a:pPr>
             <a:r>
-              <a:rPr lang="en-US" sz="1050" dirty="0">
+              <a:rPr lang="en-US" sz="1150" dirty="0">
                 <a:solidFill>
                   <a:srgbClr val="334155"/>
                 </a:solidFill>
@@ -21523,7 +22309,7 @@
                 <a:ea typeface="Calibri" pitchFamily="34" charset="-122"/>
                 <a:cs typeface="Calibri" pitchFamily="34" charset="-120"/>
               </a:rPr>
-              <a:t>Post-buyback: D = 15,000; E = 50,000 − 15,000 = 35,000; D/E = 0.4286
+              <a:t>After the buyback: D = 15,000, E = 35,000, so D/E = 0.4286
 </a:t>
             </a:r>
             <a:pPr indent="0" marL="0">
@@ -21533,7 +22319,7 @@
               <a:buNone/>
             </a:pPr>
             <a:r>
-              <a:rPr lang="en-US" sz="1050" b="1" dirty="0">
+              <a:rPr lang="en-US" sz="1150" b="1" dirty="0">
                 <a:solidFill>
                   <a:srgbClr val="1B2A4A"/>
                 </a:solidFill>
@@ -21550,7 +22336,7 @@
               <a:buNone/>
             </a:pPr>
             <a:r>
-              <a:rPr lang="en-US" sz="1050" dirty="0">
+              <a:rPr lang="en-US" sz="1150" dirty="0">
                 <a:solidFill>
                   <a:srgbClr val="334155"/>
                 </a:solidFill>
@@ -21568,7 +22354,7 @@
               <a:buNone/>
             </a:pPr>
             <a:r>
-              <a:rPr lang="en-US" sz="1050" b="1" dirty="0">
+              <a:rPr lang="en-US" sz="1150" b="1" dirty="0">
                 <a:solidFill>
                   <a:srgbClr val="1B2A4A"/>
                 </a:solidFill>
@@ -21585,7 +22371,7 @@
               <a:buNone/>
             </a:pPr>
             <a:r>
-              <a:rPr lang="en-US" sz="1050" dirty="0">
+              <a:rPr lang="en-US" sz="1150" dirty="0">
                 <a:solidFill>
                   <a:srgbClr val="334155"/>
                 </a:solidFill>
@@ -21593,7 +22379,7 @@
                 <a:ea typeface="Calibri" pitchFamily="34" charset="-122"/>
                 <a:cs typeface="Calibri" pitchFamily="34" charset="-120"/>
               </a:rPr>
-              <a:t>New WACC: (15/50)(5%) + (35/50)(12.143%) = 1.50% + 8.50% = 10.00%
+              <a:t>New WACC: (15/50) × 5% + (35/50) × 12.143% = 1.50% + 8.50% = 10.00%
 </a:t>
             </a:r>
             <a:pPr indent="0" marL="0">
@@ -21603,7 +22389,7 @@
               <a:buNone/>
             </a:pPr>
             <a:r>
-              <a:rPr lang="en-US" sz="1050" b="1" dirty="0">
+              <a:rPr lang="en-US" sz="1150" b="1" dirty="0">
                 <a:solidFill>
                   <a:srgbClr val="1B2A4A"/>
                 </a:solidFill>
@@ -21620,7 +22406,7 @@
               <a:buNone/>
             </a:pPr>
             <a:r>
-              <a:rPr lang="en-US" sz="1050" dirty="0">
+              <a:rPr lang="en-US" sz="1150" dirty="0">
                 <a:solidFill>
                   <a:srgbClr val="334155"/>
                 </a:solidFill>
@@ -21628,15 +22414,15 @@
                 <a:ea typeface="Calibri" pitchFamily="34" charset="-122"/>
                 <a:cs typeface="Calibri" pitchFamily="34" charset="-120"/>
               </a:rPr>
-              <a:t>Firm value: still 5,000 / 0.10 = EUR 50,000 — unchanged. ✓</a:t>
-            </a:r>
-            <a:endParaRPr lang="en-US" sz="1050" dirty="0"/>
+              <a:t>Cross-check: 750/0.05 + 4,250/0.12143 = EUR 50,000. Value unchanged.</a:t>
+            </a:r>
+            <a:endParaRPr lang="en-US" sz="1150" dirty="0"/>
           </a:p>
         </p:txBody>
       </p:sp>
       <p:sp>
         <p:nvSpPr>
-          <p:cNvPr id="16" name="Shape 14"/>
+          <p:cNvPr id="17" name="Shape 15"/>
           <p:cNvSpPr/>
           <p:nvPr/>
         </p:nvSpPr>
@@ -21656,7 +22442,7 @@
       </p:sp>
       <p:sp>
         <p:nvSpPr>
-          <p:cNvPr id="17" name="Text 15"/>
+          <p:cNvPr id="18" name="Text 16"/>
           <p:cNvSpPr txBox="1"/>
           <p:nvPr/>
         </p:nvSpPr>
@@ -21690,7 +22476,7 @@
                 <a:ea typeface="Consolas" pitchFamily="34" charset="-122"/>
                 <a:cs typeface="Consolas" pitchFamily="34" charset="-120"/>
               </a:rPr>
-              <a:t>WACC = 10% before and after. Cheaper debt offset exactly by a higher cost of equity.</a:t>
+              <a:t>WACC = 10% before and after. Cheaper debt, exactly offset by dearer equity.</a:t>
             </a:r>
             <a:endParaRPr lang="en-US" sz="1150" dirty="0"/>
           </a:p>
@@ -21797,7 +22583,7 @@
                 <a:ea typeface="Trebuchet MS" pitchFamily="34" charset="-122"/>
                 <a:cs typeface="Trebuchet MS" pitchFamily="34" charset="-120"/>
               </a:rPr>
-              <a:t>MM with taxes: the interest tax shield makes debt value-creating — V_L = V_U + tD, WACC falls as leverage rises</a:t>
+              <a:t>With corporate taxes the shield makes debt value-creating: V_L = V_U + tD, the cost of equity rises more slowly, and WACC falls</a:t>
             </a:r>
             <a:endParaRPr lang="en-US" sz="1700" dirty="0"/>
           </a:p>
@@ -21873,6 +22659,46 @@
         </p:nvSpPr>
         <p:spPr>
           <a:xfrm>
+            <a:off x="320040" y="4471416"/>
+            <a:ext cx="8503920" cy="192024"/>
+          </a:xfrm>
+          <a:prstGeom prst="rect">
+            <a:avLst/>
+          </a:prstGeom>
+          <a:noFill/>
+          <a:ln/>
+        </p:spPr>
+        <p:txBody>
+          <a:bodyPr wrap="square" lIns="254" tIns="254" rIns="254" bIns="254" rtlCol="0" anchor="t"/>
+          <a:lstStyle/>
+          <a:p>
+            <a:pPr indent="0" marL="0">
+              <a:buNone/>
+            </a:pPr>
+            <a:r>
+              <a:rPr lang="en-US" sz="1000" dirty="0">
+                <a:solidFill>
+                  <a:srgbClr val="6B7A8D"/>
+                </a:solidFill>
+                <a:latin typeface="Calibri" pitchFamily="34" charset="0"/>
+                <a:ea typeface="Calibri" pitchFamily="34" charset="-122"/>
+                <a:cs typeface="Calibri" pitchFamily="34" charset="-120"/>
+              </a:rPr>
+              <a:t>¹ Prop I with taxes: value rises by t·D. Prop II with taxes: r_e still rises with D/E but more slowly, so WACC falls as leverage rises.
+</a:t>
+            </a:r>
+            <a:endParaRPr lang="en-US" sz="1000" dirty="0"/>
+          </a:p>
+        </p:txBody>
+      </p:sp>
+      <p:sp>
+        <p:nvSpPr>
+          <p:cNvPr id="8" name="Text 6"/>
+          <p:cNvSpPr txBox="1"/>
+          <p:nvPr/>
+        </p:nvSpPr>
+        <p:spPr>
+          <a:xfrm>
             <a:off x="320040" y="4663440"/>
             <a:ext cx="8503920" cy="201168"/>
           </a:xfrm>
@@ -21901,7 +22727,7 @@
                 <a:ea typeface="Calibri" pitchFamily="34" charset="-122"/>
                 <a:cs typeface="Calibri" pitchFamily="34" charset="-120"/>
               </a:rPr>
-              <a:t>Source: CFA Institute, Curriculum Vol 3, Learning Module 6, Example 3 (Gerhardt with taxes), pp. 197–200.</a:t>
+              <a:t>Source: CFA Institute, Curriculum Vol 3, Learning Module 6, §4, Equations 5 and 6, Exhibits 5 and 6, and Example 3 "Gerhardt Corporation under Corporate Taxes", pp. 197–200.</a:t>
             </a:r>
             <a:endParaRPr lang="en-US" sz="750" dirty="0"/>
           </a:p>
@@ -21909,7 +22735,7 @@
       </p:sp>
       <p:sp>
         <p:nvSpPr>
-          <p:cNvPr id="8" name="Text 6"/>
+          <p:cNvPr id="9" name="Text 7"/>
           <p:cNvSpPr txBox="1"/>
           <p:nvPr/>
         </p:nvSpPr>
@@ -21943,7 +22769,7 @@
                 <a:ea typeface="Calibri" pitchFamily="34" charset="-122"/>
                 <a:cs typeface="Calibri" pitchFamily="34" charset="-120"/>
               </a:rPr>
-              <a:t>Once we let governments tax corporate profits, every dollar of deductible interest is a dollar the firm keeps. Capital structure starts to matter.</a:t>
+              <a:t>Once profits are taxed, every euro of deductible interest is a euro the firm keeps. Capital structure starts to matter — and at the extreme this says finance with 100% debt.</a:t>
             </a:r>
             <a:endParaRPr lang="en-US" sz="1300" dirty="0"/>
           </a:p>
@@ -21951,14 +22777,14 @@
       </p:sp>
       <p:sp>
         <p:nvSpPr>
-          <p:cNvPr id="9" name="Shape 7"/>
+          <p:cNvPr id="10" name="Shape 8"/>
           <p:cNvSpPr/>
           <p:nvPr/>
         </p:nvSpPr>
         <p:spPr>
           <a:xfrm>
-            <a:off x="320040" y="1234440"/>
-            <a:ext cx="8503920" cy="749808"/>
+            <a:off x="320040" y="1170432"/>
+            <a:ext cx="8503920" cy="603504"/>
           </a:xfrm>
           <a:prstGeom prst="rect">
             <a:avLst/>
@@ -21971,14 +22797,14 @@
       </p:sp>
       <p:sp>
         <p:nvSpPr>
-          <p:cNvPr id="10" name="Text 8"/>
+          <p:cNvPr id="11" name="Text 9"/>
           <p:cNvSpPr txBox="1"/>
           <p:nvPr/>
         </p:nvSpPr>
         <p:spPr>
           <a:xfrm>
-            <a:off x="411480" y="1234440"/>
-            <a:ext cx="8321040" cy="749808"/>
+            <a:off x="411480" y="1170432"/>
+            <a:ext cx="8321040" cy="603504"/>
           </a:xfrm>
           <a:prstGeom prst="rect">
             <a:avLst/>
@@ -22005,7 +22831,7 @@
                 <a:ea typeface="Consolas" pitchFamily="34" charset="-122"/>
                 <a:cs typeface="Consolas" pitchFamily="34" charset="-120"/>
               </a:rPr>
-              <a:t>V_L = V_U + t·D           r_e = r_0 + (r_0 − r_d)(1 − t) · D / E</a:t>
+              <a:t>I:  V_L = V_U + t·D      II:  r_e = r_0 + (r_0−r_d)(1−t)·D/E</a:t>
             </a:r>
             <a:endParaRPr lang="en-US" sz="1800" dirty="0"/>
           </a:p>
@@ -22013,13 +22839,13 @@
       </p:sp>
       <p:sp>
         <p:nvSpPr>
-          <p:cNvPr id="11" name="Text 9"/>
+          <p:cNvPr id="12" name="Text 10"/>
           <p:cNvSpPr txBox="1"/>
           <p:nvPr/>
         </p:nvSpPr>
         <p:spPr>
           <a:xfrm>
-            <a:off x="320040" y="2011680"/>
+            <a:off x="320040" y="1801368"/>
             <a:ext cx="8503920" cy="256032"/>
           </a:xfrm>
           <a:prstGeom prst="rect">
@@ -22047,7 +22873,7 @@
                 <a:ea typeface="Calibri" pitchFamily="34" charset="-122"/>
                 <a:cs typeface="Calibri" pitchFamily="34" charset="-120"/>
               </a:rPr>
-              <a:t>where: t = marginal corporate tax rate; t·D = present value of the debt tax shield (assumes perpetual debt).</a:t>
+              <a:t>where: t = marginal corporate tax rate; t·D = PV of the interest tax shield on perpetual debt. Only the (1 − t) term separates II here from II without taxes.</a:t>
             </a:r>
             <a:endParaRPr lang="en-US" sz="1100" dirty="0"/>
           </a:p>
@@ -22055,14 +22881,14 @@
       </p:sp>
       <p:sp>
         <p:nvSpPr>
-          <p:cNvPr id="12" name="Shape 10"/>
+          <p:cNvPr id="13" name="Shape 11"/>
           <p:cNvSpPr/>
           <p:nvPr/>
         </p:nvSpPr>
         <p:spPr>
           <a:xfrm>
-            <a:off x="320040" y="2468880"/>
-            <a:ext cx="8503920" cy="1828800"/>
+            <a:off x="320040" y="2121408"/>
+            <a:ext cx="8503920" cy="2176272"/>
           </a:xfrm>
           <a:prstGeom prst="rect">
             <a:avLst/>
@@ -22080,13 +22906,13 @@
       </p:sp>
       <p:sp>
         <p:nvSpPr>
-          <p:cNvPr id="13" name="Text 11"/>
+          <p:cNvPr id="14" name="Text 12"/>
           <p:cNvSpPr txBox="1"/>
           <p:nvPr/>
         </p:nvSpPr>
         <p:spPr>
           <a:xfrm>
-            <a:off x="457200" y="2514600"/>
+            <a:off x="457200" y="2167128"/>
             <a:ext cx="8229600" cy="256032"/>
           </a:xfrm>
           <a:prstGeom prst="rect">
@@ -22114,7 +22940,7 @@
                 <a:ea typeface="Trebuchet MS" pitchFamily="34" charset="-122"/>
                 <a:cs typeface="Trebuchet MS" pitchFamily="34" charset="-120"/>
               </a:rPr>
-              <a:t>GERHARDT CORP REDUX — TAX RATE 25%</a:t>
+              <a:t>CFA EXAMPLE 3 — THE SAME GERHARDT, NOW TAXED AT 25%</a:t>
             </a:r>
             <a:endParaRPr lang="en-US" sz="1100" dirty="0"/>
           </a:p>
@@ -22122,13 +22948,13 @@
       </p:sp>
       <p:sp>
         <p:nvSpPr>
-          <p:cNvPr id="14" name="Text 12"/>
+          <p:cNvPr id="15" name="Text 13"/>
           <p:cNvSpPr txBox="1"/>
           <p:nvPr/>
         </p:nvSpPr>
         <p:spPr>
           <a:xfrm>
-            <a:off x="457200" y="2807208"/>
+            <a:off x="457200" y="2459736"/>
             <a:ext cx="8229600" cy="457200"/>
           </a:xfrm>
           <a:prstGeom prst="rect">
@@ -22156,7 +22982,7 @@
                 <a:ea typeface="Calibri" pitchFamily="34" charset="-122"/>
                 <a:cs typeface="Calibri" pitchFamily="34" charset="-120"/>
               </a:rPr>
-              <a:t>Same cash flow (EUR 5,000) and cost of capital assumptions, now with corporate tax at 25%. V_U = (5,000 × 0.75) / 0.10 = EUR 37,500. Issue EUR 15,000 debt at 5%.</a:t>
+              <a:t>Same EUR 5,000 pre-tax cash flow, same 10% unlevered cost of equity, same EUR 15,000 of 5% debt. After-tax cash flow is 3,750, so V_U = 3,750 / 0.10 = EUR 37,500.</a:t>
             </a:r>
             <a:endParaRPr lang="en-US" sz="1200" dirty="0"/>
           </a:p>
@@ -22164,14 +22990,14 @@
       </p:sp>
       <p:sp>
         <p:nvSpPr>
-          <p:cNvPr id="15" name="Text 13"/>
+          <p:cNvPr id="16" name="Text 14"/>
           <p:cNvSpPr txBox="1"/>
           <p:nvPr/>
         </p:nvSpPr>
         <p:spPr>
           <a:xfrm>
-            <a:off x="457200" y="3319272"/>
-            <a:ext cx="8229600" cy="466344"/>
+            <a:off x="457200" y="2971800"/>
+            <a:ext cx="8229600" cy="813816"/>
           </a:xfrm>
           <a:prstGeom prst="rect">
             <a:avLst/>
@@ -22193,7 +23019,7 @@
               <a:buNone/>
             </a:pPr>
             <a:r>
-              <a:rPr lang="en-US" sz="1050" b="1" dirty="0">
+              <a:rPr lang="en-US" sz="1150" b="1" dirty="0">
                 <a:solidFill>
                   <a:srgbClr val="1B2A4A"/>
                 </a:solidFill>
@@ -22210,7 +23036,7 @@
               <a:buNone/>
             </a:pPr>
             <a:r>
-              <a:rPr lang="en-US" sz="1050" dirty="0">
+              <a:rPr lang="en-US" sz="1150" dirty="0">
                 <a:solidFill>
                   <a:srgbClr val="334155"/>
                 </a:solidFill>
@@ -22218,7 +23044,7 @@
                 <a:ea typeface="Calibri" pitchFamily="34" charset="-122"/>
                 <a:cs typeface="Calibri" pitchFamily="34" charset="-120"/>
               </a:rPr>
-              <a:t>PV of tax shield: t · D = 0.25 × 15,000 = EUR 3,750
+              <a:t>PV of the tax shield: t · D = 0.25 × 15,000 = EUR 3,750
 </a:t>
             </a:r>
             <a:pPr indent="0" marL="0">
@@ -22228,7 +23054,7 @@
               <a:buNone/>
             </a:pPr>
             <a:r>
-              <a:rPr lang="en-US" sz="1050" b="1" dirty="0">
+              <a:rPr lang="en-US" sz="1150" b="1" dirty="0">
                 <a:solidFill>
                   <a:srgbClr val="1B2A4A"/>
                 </a:solidFill>
@@ -22245,7 +23071,7 @@
               <a:buNone/>
             </a:pPr>
             <a:r>
-              <a:rPr lang="en-US" sz="1050" dirty="0">
+              <a:rPr lang="en-US" sz="1150" dirty="0">
                 <a:solidFill>
                   <a:srgbClr val="334155"/>
                 </a:solidFill>
@@ -22253,7 +23079,7 @@
                 <a:ea typeface="Calibri" pitchFamily="34" charset="-122"/>
                 <a:cs typeface="Calibri" pitchFamily="34" charset="-120"/>
               </a:rPr>
-              <a:t>V_L = V_U + t·D = 37,500 + 3,750 = EUR 41,250;  E = 41,250 − 15,000 = 26,250
+              <a:t>V_L = V_U + t·D = 37,500 + 3,750 = EUR 41,250, so E = 41,250 − 15,000 = EUR 26,250
 </a:t>
             </a:r>
             <a:pPr indent="0" marL="0">
@@ -22263,7 +23089,7 @@
               <a:buNone/>
             </a:pPr>
             <a:r>
-              <a:rPr lang="en-US" sz="1050" b="1" dirty="0">
+              <a:rPr lang="en-US" sz="1150" b="1" dirty="0">
                 <a:solidFill>
                   <a:srgbClr val="1B2A4A"/>
                 </a:solidFill>
@@ -22280,7 +23106,7 @@
               <a:buNone/>
             </a:pPr>
             <a:r>
-              <a:rPr lang="en-US" sz="1050" dirty="0">
+              <a:rPr lang="en-US" sz="1150" dirty="0">
                 <a:solidFill>
                   <a:srgbClr val="334155"/>
                 </a:solidFill>
@@ -22288,7 +23114,7 @@
                 <a:ea typeface="Calibri" pitchFamily="34" charset="-122"/>
                 <a:cs typeface="Calibri" pitchFamily="34" charset="-120"/>
               </a:rPr>
-              <a:t>r_e = 10% + (10% − 5%)(1 − 0.25)(15,000 / 26,250) = 12.143%
+              <a:t>r_e = 10% + (10% − 5%)(1 − 0.25) × (15,000 / 26,250) = 12.143%
 </a:t>
             </a:r>
             <a:pPr indent="0" marL="0">
@@ -22298,7 +23124,7 @@
               <a:buNone/>
             </a:pPr>
             <a:r>
-              <a:rPr lang="en-US" sz="1050" b="1" dirty="0">
+              <a:rPr lang="en-US" sz="1150" b="1" dirty="0">
                 <a:solidFill>
                   <a:srgbClr val="1B2A4A"/>
                 </a:solidFill>
@@ -22315,7 +23141,7 @@
               <a:buNone/>
             </a:pPr>
             <a:r>
-              <a:rPr lang="en-US" sz="1050" dirty="0">
+              <a:rPr lang="en-US" sz="1150" dirty="0">
                 <a:solidFill>
                   <a:srgbClr val="334155"/>
                 </a:solidFill>
@@ -22323,15 +23149,15 @@
                 <a:ea typeface="Calibri" pitchFamily="34" charset="-122"/>
                 <a:cs typeface="Calibri" pitchFamily="34" charset="-120"/>
               </a:rPr>
-              <a:t>WACC = (15/41.25)(5%)(0.75) + (26.25/41.25)(12.143%) = 1.36% + 7.73% = 9.091%</a:t>
-            </a:r>
-            <a:endParaRPr lang="en-US" sz="1050" dirty="0"/>
+              <a:t>WACC = (15/41.25) × 5% × 0.75 + (26.25/41.25) × 12.143% = 1.36% + 7.73% = 9.091%</a:t>
+            </a:r>
+            <a:endParaRPr lang="en-US" sz="1150" dirty="0"/>
           </a:p>
         </p:txBody>
       </p:sp>
       <p:sp>
         <p:nvSpPr>
-          <p:cNvPr id="16" name="Shape 14"/>
+          <p:cNvPr id="17" name="Shape 15"/>
           <p:cNvSpPr/>
           <p:nvPr/>
         </p:nvSpPr>
@@ -22351,7 +23177,7 @@
       </p:sp>
       <p:sp>
         <p:nvSpPr>
-          <p:cNvPr id="17" name="Text 15"/>
+          <p:cNvPr id="18" name="Text 16"/>
           <p:cNvSpPr txBox="1"/>
           <p:nvPr/>
         </p:nvSpPr>
@@ -22385,7 +23211,7 @@
                 <a:ea typeface="Consolas" pitchFamily="34" charset="-122"/>
                 <a:cs typeface="Consolas" pitchFamily="34" charset="-120"/>
               </a:rPr>
-              <a:t>WACC falls from 10% → 9.09%; firm value rises EUR 3,750. Debt creates value equal to the tax shield.</a:t>
+              <a:t>WACC falls 10% to 9.091%; value rises EUR 3,750, exactly the shield.</a:t>
             </a:r>
             <a:endParaRPr lang="en-US" sz="1150" dirty="0"/>
           </a:p>
@@ -22484,7 +23310,7 @@
               <a:buNone/>
             </a:pPr>
             <a:r>
-              <a:rPr lang="en-US" sz="1600" b="1" dirty="0">
+              <a:rPr lang="en-US" sz="1700" b="1" dirty="0">
                 <a:solidFill>
                   <a:srgbClr val="FFFFFF"/>
                 </a:solidFill>
@@ -22492,9 +23318,9 @@
                 <a:ea typeface="Trebuchet MS" pitchFamily="34" charset="-122"/>
                 <a:cs typeface="Trebuchet MS" pitchFamily="34" charset="-120"/>
               </a:rPr>
-              <a:t>Static trade-off theory: the optimal capital structure balances the tax shield against the present value of financial-distress costs</a:t>
-            </a:r>
-            <a:endParaRPr lang="en-US" sz="1600" dirty="0"/>
+              <a:t>Static trade-off theory: the optimum balances the tax shield against the PV of expected financial-distress costs</a:t>
+            </a:r>
+            <a:endParaRPr lang="en-US" sz="1700" dirty="0"/>
           </a:p>
         </p:txBody>
       </p:sp>
@@ -22596,7 +23422,7 @@
                 <a:ea typeface="Calibri" pitchFamily="34" charset="-122"/>
                 <a:cs typeface="Calibri" pitchFamily="34" charset="-120"/>
               </a:rPr>
-              <a:t>Source: CFA Institute, Curriculum Vol 3, Learning Module 6, Practice Problem (Boulder Inc.), pp. 203–212.</a:t>
+              <a:t>Source: CFA Institute, Curriculum Vol 3, Learning Module 6, §5 "Optimal Capital Structure", Equation 7 and Exhibit 7, pp. 203–204; Boulder Inc. is Practice Problems 1–4, pp. 209–212.</a:t>
             </a:r>
             <a:endParaRPr lang="en-US" sz="750" dirty="0"/>
           </a:p>
@@ -22638,7 +23464,7 @@
                 <a:ea typeface="Calibri" pitchFamily="34" charset="-122"/>
                 <a:cs typeface="Calibri" pitchFamily="34" charset="-120"/>
               </a:rPr>
-              <a:t>Pure MM with taxes implies 100% debt is optimal. Bankruptcy costs cap that: beyond some D*, expected distress costs outweigh further tax shield.</a:t>
+              <a:t>MM with taxes and no distress says borrow everything. Put a price on distress and the value curve turns over at some D* — the optimal capital structure.</a:t>
             </a:r>
             <a:endParaRPr lang="en-US" sz="1300" dirty="0"/>
           </a:p>
@@ -22652,8 +23478,8 @@
         </p:nvSpPr>
         <p:spPr>
           <a:xfrm>
-            <a:off x="320040" y="1234440"/>
-            <a:ext cx="8503920" cy="566928"/>
+            <a:off x="320040" y="1207008"/>
+            <a:ext cx="8503920" cy="502920"/>
           </a:xfrm>
           <a:prstGeom prst="rect">
             <a:avLst/>
@@ -22672,8 +23498,8 @@
         </p:nvSpPr>
         <p:spPr>
           <a:xfrm>
-            <a:off x="411480" y="1234440"/>
-            <a:ext cx="8321040" cy="566928"/>
+            <a:off x="411480" y="1207008"/>
+            <a:ext cx="8321040" cy="502920"/>
           </a:xfrm>
           <a:prstGeom prst="rect">
             <a:avLst/>
@@ -22700,7 +23526,7 @@
                 <a:ea typeface="Consolas" pitchFamily="34" charset="-122"/>
                 <a:cs typeface="Consolas" pitchFamily="34" charset="-120"/>
               </a:rPr>
-              <a:t>V_L  =  V_U  +  t · D  −  PV(financial-distress costs)</a:t>
+              <a:t>V_L  =  V_U  +  t · D  −  PV(costs of financial distress)</a:t>
             </a:r>
             <a:endParaRPr lang="en-US" sz="1800" dirty="0"/>
           </a:p>
@@ -22721,7 +23547,7 @@
           </p:nvPr>
         </p:nvGraphicFramePr>
         <p:xfrm>
-          <a:off x="320040" y="1965960"/>
+          <a:off x="320040" y="1828800"/>
           <a:ext cx="8503920" cy="914400"/>
         </p:xfrm>
         <a:graphic>
@@ -22729,11 +23555,11 @@
             <a:tbl>
               <a:tblPr/>
               <a:tblGrid>
-                <a:gridCol w="1828800"/>
-                <a:gridCol w="1828800"/>
-                <a:gridCol w="2194560"/>
+                <a:gridCol w="1645920"/>
+                <a:gridCol w="1920240"/>
+                <a:gridCol w="2377440"/>
                 <a:gridCol w="1280160"/>
-                <a:gridCol w="1371600"/>
+                <a:gridCol w="1280160"/>
               </a:tblGrid>
               <a:tr h="274320">
                 <a:tc>
@@ -22753,7 +23579,7 @@
                           <a:ea typeface="Trebuchet MS" pitchFamily="34" charset="-122"/>
                           <a:cs typeface="Trebuchet MS" pitchFamily="34" charset="-120"/>
                         </a:rPr>
-                        <a:t>Debt D (USD M)</a:t>
+                        <a:t>Debt D (USD m)</a:t>
                       </a:r>
                       <a:endParaRPr lang="en-US" sz="1100" dirty="0">
                         <a:latin typeface="Trebuchet MS" charset="0"/>
@@ -22803,7 +23629,7 @@
                           <a:ea typeface="Trebuchet MS" pitchFamily="34" charset="-122"/>
                           <a:cs typeface="Trebuchet MS" pitchFamily="34" charset="-120"/>
                         </a:rPr>
-                        <a:t>Tax shield t·D (M)</a:t>
+                        <a:t>Tax shield t·D</a:t>
                       </a:r>
                       <a:endParaRPr lang="en-US" sz="1100" dirty="0">
                         <a:latin typeface="Trebuchet MS" charset="0"/>
@@ -22853,7 +23679,7 @@
                           <a:ea typeface="Trebuchet MS" pitchFamily="34" charset="-122"/>
                           <a:cs typeface="Trebuchet MS" pitchFamily="34" charset="-120"/>
                         </a:rPr>
-                        <a:t>PV distress costs (M)</a:t>
+                        <a:t>PV distress costs</a:t>
                       </a:r>
                       <a:endParaRPr lang="en-US" sz="1100" dirty="0">
                         <a:latin typeface="Trebuchet MS" charset="0"/>
@@ -22903,7 +23729,7 @@
                           <a:ea typeface="Trebuchet MS" pitchFamily="34" charset="-122"/>
                           <a:cs typeface="Trebuchet MS" pitchFamily="34" charset="-120"/>
                         </a:rPr>
-                        <a:t>V_L (M)</a:t>
+                        <a:t>V_L (USD m)</a:t>
                       </a:r>
                       <a:endParaRPr lang="en-US" sz="1100" dirty="0">
                         <a:latin typeface="Trebuchet MS" charset="0"/>
@@ -24763,8 +25589,8 @@
         </p:nvSpPr>
         <p:spPr>
           <a:xfrm>
-            <a:off x="320040" y="4114800"/>
-            <a:ext cx="8503920" cy="228600"/>
+            <a:off x="320040" y="4096512"/>
+            <a:ext cx="8503920" cy="502920"/>
           </a:xfrm>
           <a:prstGeom prst="rect">
             <a:avLst/>
@@ -24783,8 +25609,8 @@
         </p:nvSpPr>
         <p:spPr>
           <a:xfrm>
-            <a:off x="320040" y="4114800"/>
-            <a:ext cx="73152" cy="228600"/>
+            <a:off x="320040" y="4096512"/>
+            <a:ext cx="73152" cy="502920"/>
           </a:xfrm>
           <a:prstGeom prst="rect">
             <a:avLst/>
@@ -24803,8 +25629,8 @@
         </p:nvSpPr>
         <p:spPr>
           <a:xfrm>
-            <a:off x="457200" y="4187952"/>
-            <a:ext cx="8275320" cy="118872"/>
+            <a:off x="457200" y="4169664"/>
+            <a:ext cx="8275320" cy="393192"/>
           </a:xfrm>
           <a:prstGeom prst="rect">
             <a:avLst/>
@@ -24831,7 +25657,7 @@
                 <a:ea typeface="Calibri" pitchFamily="34" charset="-122"/>
                 <a:cs typeface="Calibri" pitchFamily="34" charset="-120"/>
               </a:rPr>
-              <a:t>Boulder Inc. (V_U = 45, t = 30%): D* = USD 20M maximises V_L at USD 49.5M. Beyond this point, distress costs dominate.</a:t>
+              <a:t>Boulder Inc.: V_U = USD 45m, t = 30%. D* = USD 20m maximises V_L at USD 49.5m; past that, distress costs grow faster than the shield. In practice D* cannot be pinned down — managers set a range, say 30%–50% debt.</a:t>
             </a:r>
             <a:endParaRPr lang="en-US" sz="1200" dirty="0"/>
           </a:p>
@@ -24930,7 +25756,7 @@
               <a:buNone/>
             </a:pPr>
             <a:r>
-              <a:rPr lang="en-US" sz="1700" b="1" dirty="0">
+              <a:rPr lang="en-US" sz="1600" b="1" dirty="0">
                 <a:solidFill>
                   <a:srgbClr val="FFFFFF"/>
                 </a:solidFill>
@@ -24938,9 +25764,9 @@
                 <a:ea typeface="Trebuchet MS" pitchFamily="34" charset="-122"/>
                 <a:cs typeface="Trebuchet MS" pitchFamily="34" charset="-120"/>
               </a:rPr>
-              <a:t>Pecking order theory: information asymmetry pushes managers to prefer retained earnings → debt → equity, in that order</a:t>
-            </a:r>
-            <a:endParaRPr lang="en-US" sz="1700" dirty="0"/>
+              <a:t>Pecking order theory: information asymmetry pushes managers to internal funds first, then private debt, then public debt, and equity last</a:t>
+            </a:r>
+            <a:endParaRPr lang="en-US" sz="1600" dirty="0"/>
           </a:p>
         </p:txBody>
       </p:sp>
@@ -25042,7 +25868,7 @@
                 <a:ea typeface="Calibri" pitchFamily="34" charset="-122"/>
                 <a:cs typeface="Calibri" pitchFamily="34" charset="-120"/>
               </a:rPr>
-              <a:t>Source: Myers &amp; Majluf (1984); CFA Institute, Curriculum Vol 3, Learning Module 6, pp. 205–208.</a:t>
+              <a:t>Source: CFA Institute, Curriculum Vol 3, Learning Module 6, §5 "Pecking Order Theory and Agency Costs", pp. 205–207; Myers &amp; Majluf (1984), Jensen (1986).</a:t>
             </a:r>
             <a:endParaRPr lang="en-US" sz="750" dirty="0"/>
           </a:p>
@@ -25084,7 +25910,7 @@
                 <a:ea typeface="Calibri" pitchFamily="34" charset="-122"/>
                 <a:cs typeface="Calibri" pitchFamily="34" charset="-120"/>
               </a:rPr>
-              <a:t>Equity issuance signals to the market that management thinks shares are overpriced — so managers avoid it unless they must. Static trade-off sets a target; pecking order explains deviations.</a:t>
+              <a:t>The ranking is by information content, not by cost. Managers prefer the source that reveals least — which is why an equity issue reads as bad news.</a:t>
             </a:r>
             <a:endParaRPr lang="en-US" sz="1300" dirty="0"/>
           </a:p>
@@ -25208,7 +26034,7 @@
                 <a:ea typeface="Calibri" pitchFamily="34" charset="-122"/>
                 <a:cs typeface="Calibri" pitchFamily="34" charset="-120"/>
               </a:rPr>
-              <a:t>Retained earnings. No floatation cost, no signal, no disclosure.</a:t>
+              <a:t>Retained earnings. No flotation cost, no disclosure, no signal.</a:t>
             </a:r>
             <a:endParaRPr lang="en-US" sz="1200" dirty="0"/>
           </a:p>
@@ -25231,7 +26057,7 @@
                 <a:ea typeface="Calibri" pitchFamily="34" charset="-122"/>
                 <a:cs typeface="Calibri" pitchFamily="34" charset="-120"/>
               </a:rPr>
-              <a:t>First choice because invisible to outsiders.</a:t>
+              <a:t>First choice precisely because outsiders cannot read anything into it.</a:t>
             </a:r>
             <a:endParaRPr lang="en-US" sz="1200" dirty="0"/>
           </a:p>
@@ -25313,7 +26139,7 @@
                 <a:ea typeface="Trebuchet MS" pitchFamily="34" charset="-122"/>
                 <a:cs typeface="Trebuchet MS" pitchFamily="34" charset="-120"/>
               </a:rPr>
-              <a:t>2.  DEBT</a:t>
+              <a:t>2.  DEBT — PRIVATE BEFORE PUBLIC</a:t>
             </a:r>
             <a:endParaRPr lang="en-US" sz="1100" dirty="0"/>
           </a:p>
@@ -25355,7 +26181,7 @@
                 <a:ea typeface="Calibri" pitchFamily="34" charset="-122"/>
                 <a:cs typeface="Calibri" pitchFamily="34" charset="-120"/>
               </a:rPr>
-              <a:t>If internal funds insufficient, borrow.</a:t>
+              <a:t>If internal funds fall short, borrow — private debt ahead of public debt, because the lender already has the information.</a:t>
             </a:r>
             <a:endParaRPr lang="en-US" sz="1200" dirty="0"/>
           </a:p>
@@ -25378,7 +26204,7 @@
                 <a:ea typeface="Calibri" pitchFamily="34" charset="-122"/>
                 <a:cs typeface="Calibri" pitchFamily="34" charset="-120"/>
               </a:rPr>
-              <a:t>Debt issuance is mildly POSITIVE signal — commits firm to future payments, so management must be confident.</a:t>
+              <a:t>Issuing debt is a mildly POSITIVE signal: you must be confident you can service it.</a:t>
             </a:r>
             <a:endParaRPr lang="en-US" sz="1200" dirty="0"/>
           </a:p>
@@ -25460,7 +26286,7 @@
                 <a:ea typeface="Trebuchet MS" pitchFamily="34" charset="-122"/>
                 <a:cs typeface="Trebuchet MS" pitchFamily="34" charset="-120"/>
               </a:rPr>
-              <a:t>3.  EQUITY</a:t>
+              <a:t>3.  EQUITY — LAST</a:t>
             </a:r>
             <a:endParaRPr lang="en-US" sz="1100" dirty="0"/>
           </a:p>
@@ -25502,7 +26328,7 @@
                 <a:ea typeface="Calibri" pitchFamily="34" charset="-122"/>
                 <a:cs typeface="Calibri" pitchFamily="34" charset="-120"/>
               </a:rPr>
-              <a:t>Last resort. Equity issuance is NEGATIVE signal — existing owners only share an overpriced asset.</a:t>
+              <a:t>Last resort. An issue reads as management thinking the shares are dear — existing owners would not share a good thing.</a:t>
             </a:r>
             <a:endParaRPr lang="en-US" sz="1200" dirty="0"/>
           </a:p>
@@ -25525,7 +26351,7 @@
                 <a:ea typeface="Calibri" pitchFamily="34" charset="-122"/>
                 <a:cs typeface="Calibri" pitchFamily="34" charset="-120"/>
               </a:rPr>
-              <a:t>Empirically: equity-issuing firms underperform for 3–5 years.</a:t>
+              <a:t>Under pecking order there is no optimal structure: the mix just records past funding needs.</a:t>
             </a:r>
             <a:endParaRPr lang="en-US" sz="1200" dirty="0"/>
           </a:p>
@@ -25539,7 +26365,7 @@
         </p:nvSpPr>
         <p:spPr>
           <a:xfrm>
-            <a:off x="320040" y="3429000"/>
+            <a:off x="320040" y="3401568"/>
             <a:ext cx="8503920" cy="914400"/>
           </a:xfrm>
           <a:prstGeom prst="rect">
@@ -25559,7 +26385,7 @@
         </p:nvSpPr>
         <p:spPr>
           <a:xfrm>
-            <a:off x="320040" y="3429000"/>
+            <a:off x="320040" y="3401568"/>
             <a:ext cx="73152" cy="914400"/>
           </a:xfrm>
           <a:prstGeom prst="rect">
@@ -25579,7 +26405,7 @@
         </p:nvSpPr>
         <p:spPr>
           <a:xfrm>
-            <a:off x="457200" y="3474720"/>
+            <a:off x="457200" y="3447288"/>
             <a:ext cx="8275320" cy="256032"/>
           </a:xfrm>
           <a:prstGeom prst="rect">
@@ -25607,7 +26433,7 @@
                 <a:ea typeface="Trebuchet MS" pitchFamily="34" charset="-122"/>
                 <a:cs typeface="Trebuchet MS" pitchFamily="34" charset="-120"/>
               </a:rPr>
-              <a:t>JENSEN (1986) — FREE-CASH-FLOW HYPOTHESIS</a:t>
+              <a:t>JENSEN (1986) — THE FREE-CASH-FLOW HYPOTHESIS</a:t>
             </a:r>
             <a:endParaRPr lang="en-US" sz="1100" dirty="0"/>
           </a:p>
@@ -25621,7 +26447,7 @@
         </p:nvSpPr>
         <p:spPr>
           <a:xfrm>
-            <a:off x="457200" y="3749040"/>
+            <a:off x="457200" y="3721608"/>
             <a:ext cx="8275320" cy="548640"/>
           </a:xfrm>
           <a:prstGeom prst="rect">
@@ -25649,7 +26475,7 @@
                 <a:ea typeface="Calibri" pitchFamily="34" charset="-122"/>
                 <a:cs typeface="Calibri" pitchFamily="34" charset="-120"/>
               </a:rPr>
-              <a:t>Debt disciplines managers. Required interest and principal payments force efficient use of cash and deter empire-building acquisitions. Leveraged buyouts of cash-rich mature firms (think 1980s RJR Nabisco) exploit this mechanism directly — replace discretionary cash with contractual debt service.</a:t>
+              <a:t>Debt disciplines. Contractual interest and principal force managers to use cash well and make empire-building acquisitions harder to fund, so greater use of debt can save agency costs of equity. A leveraged buyout of a cash-rich mature company exploits exactly that mechanism: replace discretionary cash with contractual debt service.</a:t>
             </a:r>
             <a:endParaRPr lang="en-US" sz="1200" dirty="0"/>
           </a:p>
@@ -26199,7 +27025,7 @@
                 <a:ea typeface="Calibri" pitchFamily="34" charset="-122"/>
                 <a:cs typeface="Calibri" pitchFamily="34" charset="-120"/>
               </a:rPr>
-              <a:t>Map a corporation's eight stakeholder groups, explain the principal-agent conflicts between them, and describe the governance mechanisms that mitigate each.
+              <a:t>Map a corporation's stakeholder groups, explain the principal-agent conflicts between them, and describe the governance mechanisms that mitigate each.
 </a:t>
             </a:r>
             <a:pPr indent="0" marL="0">
@@ -26228,7 +27054,7 @@
                 <a:ea typeface="Calibri" pitchFamily="34" charset="-122"/>
                 <a:cs typeface="Calibri" pitchFamily="34" charset="-120"/>
               </a:rPr>
-              <a:t>Compute a company's weighted-average cost of capital using market-value weights, an after-tax cost of debt, and a CAPM-based cost of equity.
+              <a:t>Compute a weighted-average cost of capital using market-value weights, an after-tax cost of debt, and a CAPM-based cost of equity.
 </a:t>
             </a:r>
             <a:pPr indent="0" marL="0">
@@ -26257,7 +27083,7 @@
                 <a:ea typeface="Calibri" pitchFamily="34" charset="-122"/>
                 <a:cs typeface="Calibri" pitchFamily="34" charset="-120"/>
               </a:rPr>
-              <a:t>Apply the Modigliani-Miller propositions (with and without taxes), the static trade-off theory, and the pecking order theory to real capital-structure decisions.
+              <a:t>Apply the Modigliani-Miller propositions (with and without taxes), the static trade-off theory, and the pecking order theory to capital-structure decisions.
 </a:t>
             </a:r>
             <a:pPr indent="0" marL="0">
@@ -26286,7 +27112,7 @@
                 <a:ea typeface="Calibri" pitchFamily="34" charset="-122"/>
                 <a:cs typeface="Calibri" pitchFamily="34" charset="-120"/>
               </a:rPr>
-              <a:t>Lever and unlever equity beta using the Hamada formula to move between a comparable firm's observed risk and the target firm's own capital structure.
+              <a:t>Unlever and relever an equity beta to move between a comparable company's observed risk and the target firm's own capital structure.
 </a:t>
             </a:r>
             <a:endParaRPr lang="en-US" sz="1200" dirty="0"/>
@@ -26386,7 +27212,7 @@
               <a:buNone/>
             </a:pPr>
             <a:r>
-              <a:rPr lang="en-US" sz="1600" b="1" dirty="0">
+              <a:rPr lang="en-US" sz="1700" b="1" dirty="0">
                 <a:solidFill>
                   <a:srgbClr val="FFFFFF"/>
                 </a:solidFill>
@@ -26394,9 +27220,9 @@
                 <a:ea typeface="Trebuchet MS" pitchFamily="34" charset="-122"/>
                 <a:cs typeface="Trebuchet MS" pitchFamily="34" charset="-120"/>
               </a:rPr>
-              <a:t>CAPM gives the cost of equity as the risk-free rate plus beta times the equity risk premium — the industry-standard equity discount rate</a:t>
-            </a:r>
-            <a:endParaRPr lang="en-US" sz="1600" dirty="0"/>
+              <a:t>CAPM gives the cost of equity as the risk-free rate plus beta times the equity risk premium — only market risk is paid for</a:t>
+            </a:r>
+            <a:endParaRPr lang="en-US" sz="1700" dirty="0"/>
           </a:p>
         </p:txBody>
       </p:sp>
@@ -26470,6 +27296,46 @@
         </p:nvSpPr>
         <p:spPr>
           <a:xfrm>
+            <a:off x="320040" y="4471416"/>
+            <a:ext cx="8503920" cy="192024"/>
+          </a:xfrm>
+          <a:prstGeom prst="rect">
+            <a:avLst/>
+          </a:prstGeom>
+          <a:noFill/>
+          <a:ln/>
+        </p:spPr>
+        <p:txBody>
+          <a:bodyPr wrap="square" lIns="254" tIns="254" rIns="254" bIns="254" rtlCol="0" anchor="t"/>
+          <a:lstStyle/>
+          <a:p>
+            <a:pPr indent="0" marL="0">
+              <a:buNone/>
+            </a:pPr>
+            <a:r>
+              <a:rPr lang="en-US" sz="1000" dirty="0">
+                <a:solidFill>
+                  <a:srgbClr val="6B7A8D"/>
+                </a:solidFill>
+                <a:latin typeface="Calibri" pitchFamily="34" charset="0"/>
+                <a:ea typeface="Calibri" pitchFamily="34" charset="-122"/>
+                <a:cs typeface="Calibri" pitchFamily="34" charset="-120"/>
+              </a:rPr>
+              <a:t>¹ The Corporate Issuers text uses a cruder teaching anchor: the c.10% compound annual return on a broad equity index, 1928–2021.
+</a:t>
+            </a:r>
+            <a:endParaRPr lang="en-US" sz="1000" dirty="0"/>
+          </a:p>
+        </p:txBody>
+      </p:sp>
+      <p:sp>
+        <p:nvSpPr>
+          <p:cNvPr id="8" name="Text 6"/>
+          <p:cNvSpPr txBox="1"/>
+          <p:nvPr/>
+        </p:nvSpPr>
+        <p:spPr>
+          <a:xfrm>
             <a:off x="320040" y="4663440"/>
             <a:ext cx="8503920" cy="201168"/>
           </a:xfrm>
@@ -26498,7 +27364,7 @@
                 <a:ea typeface="Calibri" pitchFamily="34" charset="-122"/>
                 <a:cs typeface="Calibri" pitchFamily="34" charset="-120"/>
               </a:rPr>
-              <a:t>Source: CFA Institute, Curriculum Vol 3, LM 6 (cost-of-equity discussion); CAPM developed in Vol 6 (Equity).</a:t>
+              <a:t>Source: Cost-of-equity context: CFA Vol 3, Learning Module 6, pp. 178–179. The CAPM itself is developed in Vol 9, Portfolio Management, not in Corporate Issuers.</a:t>
             </a:r>
             <a:endParaRPr lang="en-US" sz="750" dirty="0"/>
           </a:p>
@@ -26506,7 +27372,7 @@
       </p:sp>
       <p:sp>
         <p:nvSpPr>
-          <p:cNvPr id="8" name="Text 6"/>
+          <p:cNvPr id="9" name="Text 7"/>
           <p:cNvSpPr txBox="1"/>
           <p:nvPr/>
         </p:nvSpPr>
@@ -26540,7 +27406,7 @@
                 <a:ea typeface="Calibri" pitchFamily="34" charset="-122"/>
                 <a:cs typeface="Calibri" pitchFamily="34" charset="-120"/>
               </a:rPr>
-              <a:t>CAPM: the only systematic (market) risk is compensated; idiosyncratic risk is diversified away. Beta = sensitivity to market returns.</a:t>
+              <a:t>Only systematic risk earns a return; idiosyncratic risk is diversified away for free. Beta measures sensitivity to the market, and nothing else.</a:t>
             </a:r>
             <a:endParaRPr lang="en-US" sz="1300" dirty="0"/>
           </a:p>
@@ -26548,14 +27414,14 @@
       </p:sp>
       <p:sp>
         <p:nvSpPr>
-          <p:cNvPr id="9" name="Shape 7"/>
+          <p:cNvPr id="10" name="Shape 8"/>
           <p:cNvSpPr/>
           <p:nvPr/>
         </p:nvSpPr>
         <p:spPr>
           <a:xfrm>
-            <a:off x="320040" y="1234440"/>
-            <a:ext cx="8503920" cy="749808"/>
+            <a:off x="320040" y="1170432"/>
+            <a:ext cx="8503920" cy="566928"/>
           </a:xfrm>
           <a:prstGeom prst="rect">
             <a:avLst/>
@@ -26568,14 +27434,14 @@
       </p:sp>
       <p:sp>
         <p:nvSpPr>
-          <p:cNvPr id="10" name="Text 8"/>
+          <p:cNvPr id="11" name="Text 9"/>
           <p:cNvSpPr txBox="1"/>
           <p:nvPr/>
         </p:nvSpPr>
         <p:spPr>
           <a:xfrm>
-            <a:off x="411480" y="1234440"/>
-            <a:ext cx="8321040" cy="749808"/>
+            <a:off x="411480" y="1170432"/>
+            <a:ext cx="8321040" cy="566928"/>
           </a:xfrm>
           <a:prstGeom prst="rect">
             <a:avLst/>
@@ -26610,13 +27476,13 @@
       </p:sp>
       <p:sp>
         <p:nvSpPr>
-          <p:cNvPr id="11" name="Text 9"/>
+          <p:cNvPr id="12" name="Text 10"/>
           <p:cNvSpPr txBox="1"/>
           <p:nvPr/>
         </p:nvSpPr>
         <p:spPr>
           <a:xfrm>
-            <a:off x="320040" y="2011680"/>
+            <a:off x="320040" y="1764792"/>
             <a:ext cx="8503920" cy="256032"/>
           </a:xfrm>
           <a:prstGeom prst="rect">
@@ -26644,7 +27510,7 @@
                 <a:ea typeface="Calibri" pitchFamily="34" charset="-122"/>
                 <a:cs typeface="Calibri" pitchFamily="34" charset="-120"/>
               </a:rPr>
-              <a:t>where: r_f = risk-free rate (typically 10y Treasury); β = levered equity beta; ERP = equity risk premium (historical 4–6% in developed markets).</a:t>
+              <a:t>where: r_f = risk-free rate, usually the 10y government bond; β = levered equity beta; ERP = equity risk premium, historically 4%–6% in developed markets.</a:t>
             </a:r>
             <a:endParaRPr lang="en-US" sz="1100" dirty="0"/>
           </a:p>
@@ -26652,14 +27518,14 @@
       </p:sp>
       <p:sp>
         <p:nvSpPr>
-          <p:cNvPr id="12" name="Shape 10"/>
+          <p:cNvPr id="13" name="Shape 11"/>
           <p:cNvSpPr/>
           <p:nvPr/>
         </p:nvSpPr>
         <p:spPr>
           <a:xfrm>
-            <a:off x="320040" y="2423160"/>
-            <a:ext cx="8503920" cy="1874520"/>
+            <a:off x="320040" y="2084832"/>
+            <a:ext cx="8503920" cy="2212848"/>
           </a:xfrm>
           <a:prstGeom prst="rect">
             <a:avLst/>
@@ -26677,13 +27543,13 @@
       </p:sp>
       <p:sp>
         <p:nvSpPr>
-          <p:cNvPr id="13" name="Text 11"/>
+          <p:cNvPr id="14" name="Text 12"/>
           <p:cNvSpPr txBox="1"/>
           <p:nvPr/>
         </p:nvSpPr>
         <p:spPr>
           <a:xfrm>
-            <a:off x="457200" y="2468880"/>
+            <a:off x="457200" y="2130552"/>
             <a:ext cx="8229600" cy="256032"/>
           </a:xfrm>
           <a:prstGeom prst="rect">
@@ -26711,7 +27577,7 @@
                 <a:ea typeface="Trebuchet MS" pitchFamily="34" charset="-122"/>
                 <a:cs typeface="Trebuchet MS" pitchFamily="34" charset="-120"/>
               </a:rPr>
-              <a:t>COST-OF-EQUITY FOR A TYPICAL US LARGE-CAP</a:t>
+              <a:t>COST OF EQUITY FOR A TYPICAL LARGE-CAP INDUSTRIAL</a:t>
             </a:r>
             <a:endParaRPr lang="en-US" sz="1100" dirty="0"/>
           </a:p>
@@ -26719,13 +27585,13 @@
       </p:sp>
       <p:sp>
         <p:nvSpPr>
-          <p:cNvPr id="14" name="Text 12"/>
+          <p:cNvPr id="15" name="Text 13"/>
           <p:cNvSpPr txBox="1"/>
           <p:nvPr/>
         </p:nvSpPr>
         <p:spPr>
           <a:xfrm>
-            <a:off x="457200" y="2761488"/>
+            <a:off x="457200" y="2423160"/>
             <a:ext cx="8229600" cy="457200"/>
           </a:xfrm>
           <a:prstGeom prst="rect">
@@ -26753,7 +27619,7 @@
                 <a:ea typeface="Calibri" pitchFamily="34" charset="-122"/>
                 <a:cs typeface="Calibri" pitchFamily="34" charset="-120"/>
               </a:rPr>
-              <a:t>Assumptions: r_f = 4.0% (10y UST); ERP = 6.0% (long-run US historical); levered β = 1.20 (e.g. an industrial manufacturer).</a:t>
+              <a:t>Assumptions: r_f = 4.0% on the 10y government bond; ERP = 6.0% on long-run history; levered beta = 1.20, a cyclical manufacturer.</a:t>
             </a:r>
             <a:endParaRPr lang="en-US" sz="1200" dirty="0"/>
           </a:p>
@@ -26761,14 +27627,14 @@
       </p:sp>
       <p:sp>
         <p:nvSpPr>
-          <p:cNvPr id="15" name="Text 13"/>
+          <p:cNvPr id="16" name="Text 14"/>
           <p:cNvSpPr txBox="1"/>
           <p:nvPr/>
         </p:nvSpPr>
         <p:spPr>
           <a:xfrm>
-            <a:off x="457200" y="3273552"/>
-            <a:ext cx="8229600" cy="512064"/>
+            <a:off x="457200" y="2935224"/>
+            <a:ext cx="8229600" cy="850392"/>
           </a:xfrm>
           <a:prstGeom prst="rect">
             <a:avLst/>
@@ -26790,7 +27656,7 @@
               <a:buNone/>
             </a:pPr>
             <a:r>
-              <a:rPr lang="en-US" sz="1050" b="1" dirty="0">
+              <a:rPr lang="en-US" sz="1150" b="1" dirty="0">
                 <a:solidFill>
                   <a:srgbClr val="1B2A4A"/>
                 </a:solidFill>
@@ -26807,7 +27673,7 @@
               <a:buNone/>
             </a:pPr>
             <a:r>
-              <a:rPr lang="en-US" sz="1050" dirty="0">
+              <a:rPr lang="en-US" sz="1150" dirty="0">
                 <a:solidFill>
                   <a:srgbClr val="334155"/>
                 </a:solidFill>
@@ -26815,7 +27681,7 @@
                 <a:ea typeface="Calibri" pitchFamily="34" charset="-122"/>
                 <a:cs typeface="Calibri" pitchFamily="34" charset="-120"/>
               </a:rPr>
-              <a:t>Market risk premium (MRP) term: β × ERP = 1.20 × 6.0% = 7.20%
+              <a:t>The stock's own risk premium: β × ERP = 1.20 × 6.0% = 7.20%
 </a:t>
             </a:r>
             <a:pPr indent="0" marL="0">
@@ -26825,7 +27691,7 @@
               <a:buNone/>
             </a:pPr>
             <a:r>
-              <a:rPr lang="en-US" sz="1050" b="1" dirty="0">
+              <a:rPr lang="en-US" sz="1150" b="1" dirty="0">
                 <a:solidFill>
                   <a:srgbClr val="1B2A4A"/>
                 </a:solidFill>
@@ -26842,7 +27708,7 @@
               <a:buNone/>
             </a:pPr>
             <a:r>
-              <a:rPr lang="en-US" sz="1050" dirty="0">
+              <a:rPr lang="en-US" sz="1150" dirty="0">
                 <a:solidFill>
                   <a:srgbClr val="334155"/>
                 </a:solidFill>
@@ -26850,7 +27716,7 @@
                 <a:ea typeface="Calibri" pitchFamily="34" charset="-122"/>
                 <a:cs typeface="Calibri" pitchFamily="34" charset="-120"/>
               </a:rPr>
-              <a:t>Cost of equity: r_e = r_f + β·ERP = 4.0% + 7.20%
+              <a:t>Add the risk-free rate: r_e = 4.0% + 7.20%
 </a:t>
             </a:r>
             <a:pPr indent="0" marL="0">
@@ -26860,7 +27726,7 @@
               <a:buNone/>
             </a:pPr>
             <a:r>
-              <a:rPr lang="en-US" sz="1050" b="1" dirty="0">
+              <a:rPr lang="en-US" sz="1150" b="1" dirty="0">
                 <a:solidFill>
                   <a:srgbClr val="1B2A4A"/>
                 </a:solidFill>
@@ -26877,7 +27743,7 @@
               <a:buNone/>
             </a:pPr>
             <a:r>
-              <a:rPr lang="en-US" sz="1050" dirty="0">
+              <a:rPr lang="en-US" sz="1150" dirty="0">
                 <a:solidFill>
                   <a:srgbClr val="334155"/>
                 </a:solidFill>
@@ -26895,7 +27761,7 @@
               <a:buNone/>
             </a:pPr>
             <a:r>
-              <a:rPr lang="en-US" sz="1050" b="1" dirty="0">
+              <a:rPr lang="en-US" sz="1150" b="1" dirty="0">
                 <a:solidFill>
                   <a:srgbClr val="1B2A4A"/>
                 </a:solidFill>
@@ -26912,7 +27778,7 @@
               <a:buNone/>
             </a:pPr>
             <a:r>
-              <a:rPr lang="en-US" sz="1050" dirty="0">
+              <a:rPr lang="en-US" sz="1150" dirty="0">
                 <a:solidFill>
                   <a:srgbClr val="334155"/>
                 </a:solidFill>
@@ -26920,15 +27786,15 @@
                 <a:ea typeface="Calibri" pitchFamily="34" charset="-122"/>
                 <a:cs typeface="Calibri" pitchFamily="34" charset="-120"/>
               </a:rPr>
-              <a:t>Sensitivity: at β = 1.50, r_e = 13.00%; at β = 0.80, r_e = 8.80%.</a:t>
-            </a:r>
-            <a:endParaRPr lang="en-US" sz="1050" dirty="0"/>
+              <a:t>Sensitivity: β = 1.50 gives 13.00%; β = 0.80 gives 8.80%. Every 0.10 of beta is 60bp.</a:t>
+            </a:r>
+            <a:endParaRPr lang="en-US" sz="1150" dirty="0"/>
           </a:p>
         </p:txBody>
       </p:sp>
       <p:sp>
         <p:nvSpPr>
-          <p:cNvPr id="16" name="Shape 14"/>
+          <p:cNvPr id="17" name="Shape 15"/>
           <p:cNvSpPr/>
           <p:nvPr/>
         </p:nvSpPr>
@@ -26948,7 +27814,7 @@
       </p:sp>
       <p:sp>
         <p:nvSpPr>
-          <p:cNvPr id="17" name="Text 15"/>
+          <p:cNvPr id="18" name="Text 16"/>
           <p:cNvSpPr txBox="1"/>
           <p:nvPr/>
         </p:nvSpPr>
@@ -26982,7 +27848,7 @@
                 <a:ea typeface="Consolas" pitchFamily="34" charset="-122"/>
                 <a:cs typeface="Consolas" pitchFamily="34" charset="-120"/>
               </a:rPr>
-              <a:t>r_e = 11.2%  —  use directly in WACC if the firm's actual leverage equals the peer group's.</a:t>
+              <a:t>r_e = 11.2% — and it carries most of the weight in any WACC.</a:t>
             </a:r>
             <a:endParaRPr lang="en-US" sz="1150" dirty="0"/>
           </a:p>
@@ -27089,7 +27955,7 @@
                 <a:ea typeface="Trebuchet MS" pitchFamily="34" charset="-122"/>
                 <a:cs typeface="Trebuchet MS" pitchFamily="34" charset="-120"/>
               </a:rPr>
-              <a:t>Lever and unlever beta to move between a comparable firm's observed risk and your target firm's own capital structure</a:t>
+              <a:t>Unlever a comparable company's beta to isolate its business risk, then relever it at your target's own capital structure</a:t>
             </a:r>
             <a:endParaRPr lang="en-US" sz="1700" dirty="0"/>
           </a:p>
@@ -27193,7 +28059,7 @@
                 <a:ea typeface="Calibri" pitchFamily="34" charset="-122"/>
                 <a:cs typeface="Calibri" pitchFamily="34" charset="-120"/>
               </a:rPr>
-              <a:t>Source: Hamada (1972); CFA Vol 3 LM 6 context on levered vs unlevered returns, pp. 195–200.</a:t>
+              <a:t>Source: Hamada (1972), the market-standard beta adjustment. It is NOT part of CFA Level I — included because relevering a comparable beta is unavoidable in practice.</a:t>
             </a:r>
             <a:endParaRPr lang="en-US" sz="750" dirty="0"/>
           </a:p>
@@ -27235,7 +28101,7 @@
                 <a:ea typeface="Calibri" pitchFamily="34" charset="-122"/>
                 <a:cs typeface="Calibri" pitchFamily="34" charset="-120"/>
               </a:rPr>
-              <a:t>Comparable-company beta reflects that company's leverage. Unlever (β_asset) to isolate business risk; then relever at the target firm's D/E.</a:t>
+              <a:t>An observed equity beta mixes business risk with the financial risk of that company's balance sheet. Unlevering separates the two; relevering rebuilds the one you want.</a:t>
             </a:r>
             <a:endParaRPr lang="en-US" sz="1300" dirty="0"/>
           </a:p>
@@ -27249,8 +28115,8 @@
         </p:nvSpPr>
         <p:spPr>
           <a:xfrm>
-            <a:off x="320040" y="1234440"/>
-            <a:ext cx="8503920" cy="749808"/>
+            <a:off x="320040" y="1170432"/>
+            <a:ext cx="8503920" cy="566928"/>
           </a:xfrm>
           <a:prstGeom prst="rect">
             <a:avLst/>
@@ -27269,8 +28135,8 @@
         </p:nvSpPr>
         <p:spPr>
           <a:xfrm>
-            <a:off x="411480" y="1234440"/>
-            <a:ext cx="8321040" cy="749808"/>
+            <a:off x="411480" y="1170432"/>
+            <a:ext cx="8321040" cy="566928"/>
           </a:xfrm>
           <a:prstGeom prst="rect">
             <a:avLst/>
@@ -27297,7 +28163,7 @@
                 <a:ea typeface="Consolas" pitchFamily="34" charset="-122"/>
                 <a:cs typeface="Consolas" pitchFamily="34" charset="-120"/>
               </a:rPr>
-              <a:t>β_U  =  β_L / [ 1 + (1 − t) · D/E ]              β_L  =  β_U · [ 1 + (1 − t) · D/E ]</a:t>
+              <a:t>β_U = β_L / [1 + (1−t)D/E]      β_L = β_U [1 + (1−t)D/E]</a:t>
             </a:r>
             <a:endParaRPr lang="en-US" sz="1800" dirty="0"/>
           </a:p>
@@ -27311,7 +28177,7 @@
         </p:nvSpPr>
         <p:spPr>
           <a:xfrm>
-            <a:off x="320040" y="2011680"/>
+            <a:off x="320040" y="1764792"/>
             <a:ext cx="8503920" cy="256032"/>
           </a:xfrm>
           <a:prstGeom prst="rect">
@@ -27339,7 +28205,7 @@
                 <a:ea typeface="Calibri" pitchFamily="34" charset="-122"/>
                 <a:cs typeface="Calibri" pitchFamily="34" charset="-120"/>
               </a:rPr>
-              <a:t>where: β_U = unlevered (asset) beta; β_L = levered (equity) beta. Debt assumed to have beta ≈ 0 (investment-grade).</a:t>
+              <a:t>where: β_U = unlevered, or asset, beta — business risk only; β_L = levered, or equity, beta; t = marginal tax rate. Assumes the debt beta is about zero.</a:t>
             </a:r>
             <a:endParaRPr lang="en-US" sz="1100" dirty="0"/>
           </a:p>
@@ -27353,8 +28219,8 @@
         </p:nvSpPr>
         <p:spPr>
           <a:xfrm>
-            <a:off x="320040" y="2423160"/>
-            <a:ext cx="8503920" cy="1874520"/>
+            <a:off x="320040" y="2084832"/>
+            <a:ext cx="8503920" cy="2212848"/>
           </a:xfrm>
           <a:prstGeom prst="rect">
             <a:avLst/>
@@ -27378,7 +28244,7 @@
         </p:nvSpPr>
         <p:spPr>
           <a:xfrm>
-            <a:off x="457200" y="2468880"/>
+            <a:off x="457200" y="2130552"/>
             <a:ext cx="8229600" cy="256032"/>
           </a:xfrm>
           <a:prstGeom prst="rect">
@@ -27406,7 +28272,7 @@
                 <a:ea typeface="Trebuchet MS" pitchFamily="34" charset="-122"/>
                 <a:cs typeface="Trebuchet MS" pitchFamily="34" charset="-120"/>
               </a:rPr>
-              <a:t>UNLEVER PEER, RELEVER TARGET</a:t>
+              <a:t>UNLEVER THE PEER, RELEVER THE TARGET</a:t>
             </a:r>
             <a:endParaRPr lang="en-US" sz="1100" dirty="0"/>
           </a:p>
@@ -27420,7 +28286,7 @@
         </p:nvSpPr>
         <p:spPr>
           <a:xfrm>
-            <a:off x="457200" y="2761488"/>
+            <a:off x="457200" y="2423160"/>
             <a:ext cx="8229600" cy="457200"/>
           </a:xfrm>
           <a:prstGeom prst="rect">
@@ -27448,7 +28314,7 @@
                 <a:ea typeface="Calibri" pitchFamily="34" charset="-122"/>
                 <a:cs typeface="Calibri" pitchFamily="34" charset="-120"/>
               </a:rPr>
-              <a:t>Peer firm's levered β = 1.20, D/E = 0.50, t = 25%. Target firm has D/E = 1.00 (more levered). Compute target's levered β.</a:t>
+              <a:t>The peer trades with a levered beta of 1.20 at D/E = 0.50 and a 25% tax rate. Your target runs at D/E = 1.00 — twice the gearing. What beta should you use for the target?</a:t>
             </a:r>
             <a:endParaRPr lang="en-US" sz="1200" dirty="0"/>
           </a:p>
@@ -27462,8 +28328,8 @@
         </p:nvSpPr>
         <p:spPr>
           <a:xfrm>
-            <a:off x="457200" y="3273552"/>
-            <a:ext cx="8229600" cy="512064"/>
+            <a:off x="457200" y="2935224"/>
+            <a:ext cx="8229600" cy="850392"/>
           </a:xfrm>
           <a:prstGeom prst="rect">
             <a:avLst/>
@@ -27485,7 +28351,7 @@
               <a:buNone/>
             </a:pPr>
             <a:r>
-              <a:rPr lang="en-US" sz="1050" b="1" dirty="0">
+              <a:rPr lang="en-US" sz="1150" b="1" dirty="0">
                 <a:solidFill>
                   <a:srgbClr val="1B2A4A"/>
                 </a:solidFill>
@@ -27502,7 +28368,7 @@
               <a:buNone/>
             </a:pPr>
             <a:r>
-              <a:rPr lang="en-US" sz="1050" dirty="0">
+              <a:rPr lang="en-US" sz="1150" dirty="0">
                 <a:solidFill>
                   <a:srgbClr val="334155"/>
                 </a:solidFill>
@@ -27510,7 +28376,7 @@
                 <a:ea typeface="Calibri" pitchFamily="34" charset="-122"/>
                 <a:cs typeface="Calibri" pitchFamily="34" charset="-120"/>
               </a:rPr>
-              <a:t>Unlever peer: β_U = 1.20 / [1 + (1 − 0.25) × 0.50] = 1.20 / 1.375 = 0.873
+              <a:t>Unlever the peer: β_U = 1.20 / [1 + (1 − 0.25) × 0.50] = 1.20 / 1.375 = 0.873
 </a:t>
             </a:r>
             <a:pPr indent="0" marL="0">
@@ -27520,7 +28386,7 @@
               <a:buNone/>
             </a:pPr>
             <a:r>
-              <a:rPr lang="en-US" sz="1050" b="1" dirty="0">
+              <a:rPr lang="en-US" sz="1150" b="1" dirty="0">
                 <a:solidFill>
                   <a:srgbClr val="1B2A4A"/>
                 </a:solidFill>
@@ -27537,7 +28403,7 @@
               <a:buNone/>
             </a:pPr>
             <a:r>
-              <a:rPr lang="en-US" sz="1050" dirty="0">
+              <a:rPr lang="en-US" sz="1150" dirty="0">
                 <a:solidFill>
                   <a:srgbClr val="334155"/>
                 </a:solidFill>
@@ -27545,7 +28411,7 @@
                 <a:ea typeface="Calibri" pitchFamily="34" charset="-122"/>
                 <a:cs typeface="Calibri" pitchFamily="34" charset="-120"/>
               </a:rPr>
-              <a:t>Relever at target's D/E: β_L,target = 0.873 × [1 + (1 − 0.25) × 1.00] = 0.873 × 1.75
+              <a:t>Relever at the target's D/E: β_L = 0.873 × [1 + (1 − 0.25) × 1.00] = 0.873 × 1.75
 </a:t>
             </a:r>
             <a:pPr indent="0" marL="0">
@@ -27555,7 +28421,7 @@
               <a:buNone/>
             </a:pPr>
             <a:r>
-              <a:rPr lang="en-US" sz="1050" b="1" dirty="0">
+              <a:rPr lang="en-US" sz="1150" b="1" dirty="0">
                 <a:solidFill>
                   <a:srgbClr val="1B2A4A"/>
                 </a:solidFill>
@@ -27572,7 +28438,7 @@
               <a:buNone/>
             </a:pPr>
             <a:r>
-              <a:rPr lang="en-US" sz="1050" dirty="0">
+              <a:rPr lang="en-US" sz="1150" dirty="0">
                 <a:solidFill>
                   <a:srgbClr val="334155"/>
                 </a:solidFill>
@@ -27580,7 +28446,7 @@
                 <a:ea typeface="Calibri" pitchFamily="34" charset="-122"/>
                 <a:cs typeface="Calibri" pitchFamily="34" charset="-120"/>
               </a:rPr>
-              <a:t>β_L,target = 1.527
+              <a:t>β_L = 1.527
 </a:t>
             </a:r>
             <a:pPr indent="0" marL="0">
@@ -27590,7 +28456,7 @@
               <a:buNone/>
             </a:pPr>
             <a:r>
-              <a:rPr lang="en-US" sz="1050" b="1" dirty="0">
+              <a:rPr lang="en-US" sz="1150" b="1" dirty="0">
                 <a:solidFill>
                   <a:srgbClr val="1B2A4A"/>
                 </a:solidFill>
@@ -27607,7 +28473,7 @@
               <a:buNone/>
             </a:pPr>
             <a:r>
-              <a:rPr lang="en-US" sz="1050" dirty="0">
+              <a:rPr lang="en-US" sz="1150" dirty="0">
                 <a:solidFill>
                   <a:srgbClr val="334155"/>
                 </a:solidFill>
@@ -27615,9 +28481,9 @@
                 <a:ea typeface="Calibri" pitchFamily="34" charset="-122"/>
                 <a:cs typeface="Calibri" pitchFamily="34" charset="-120"/>
               </a:rPr>
-              <a:t>At r_f = 4%, ERP = 6%: target r_e = 4% + 1.527 × 6% = 13.16%</a:t>
-            </a:r>
-            <a:endParaRPr lang="en-US" sz="1050" dirty="0"/>
+              <a:t>At r_f = 4% and ERP = 6%: the target's r_e = 4% + 1.527 × 6% = 13.16%</a:t>
+            </a:r>
+            <a:endParaRPr lang="en-US" sz="1150" dirty="0"/>
           </a:p>
         </p:txBody>
       </p:sp>
@@ -27677,7 +28543,7 @@
                 <a:ea typeface="Consolas" pitchFamily="34" charset="-122"/>
                 <a:cs typeface="Consolas" pitchFamily="34" charset="-120"/>
               </a:rPr>
-              <a:t>Target β rises from 1.20 (peer) to 1.53 (target) because target is more levered. Cost of equity rises 1.96 pp.</a:t>
+              <a:t>Beta 1.20 to 1.53, cost of equity +1.96pp, purely from the balance sheet.</a:t>
             </a:r>
             <a:endParaRPr lang="en-US" sz="1150" dirty="0"/>
           </a:p>
@@ -27784,7 +28650,7 @@
                 <a:ea typeface="Trebuchet MS" pitchFamily="34" charset="-122"/>
                 <a:cs typeface="Trebuchet MS" pitchFamily="34" charset="-120"/>
               </a:rPr>
-              <a:t>The after-tax cost of debt is the yield-to-maturity scaled by (1 − t); it is the YTM, not the coupon, that matters</a:t>
+              <a:t>The after-tax cost of debt is the yield to maturity scaled by (1 − t) — it is the yield that matters, never the coupon</a:t>
             </a:r>
             <a:endParaRPr lang="en-US" sz="1700" dirty="0"/>
           </a:p>
@@ -27888,7 +28754,7 @@
                 <a:ea typeface="Calibri" pitchFamily="34" charset="-122"/>
                 <a:cs typeface="Calibri" pitchFamily="34" charset="-120"/>
               </a:rPr>
-              <a:t>Source: CFA Institute, Curriculum Vol 3, Learning Module 6, pp. 178–180.</a:t>
+              <a:t>Source: Framework: CFA Institute, Curriculum Vol 3, Learning Module 6, §2, pp. 178–179. The yields shown are indicative market levels, not curriculum figures.</a:t>
             </a:r>
             <a:endParaRPr lang="en-US" sz="750" dirty="0"/>
           </a:p>
@@ -27930,7 +28796,7 @@
                 <a:ea typeface="Calibri" pitchFamily="34" charset="-122"/>
                 <a:cs typeface="Calibri" pitchFamily="34" charset="-120"/>
               </a:rPr>
-              <a:t>The coupon is historic — it locks in the cash interest. The YTM is what the firm would pay to raise new debt today, which is what discounting requires.</a:t>
+              <a:t>The coupon is history — it fixes the cash interest on debt already issued. The yield is what the firm would pay to raise money today, which is what a discount rate needs.</a:t>
             </a:r>
             <a:endParaRPr lang="en-US" sz="1300" dirty="0"/>
           </a:p>
@@ -28034,7 +28900,7 @@
                 <a:ea typeface="Calibri" pitchFamily="34" charset="-122"/>
                 <a:cs typeface="Calibri" pitchFamily="34" charset="-120"/>
               </a:rPr>
-              <a:t>where: Use the YTM on the firm's own currently traded bonds; if illiquid, match by rating, sector, and maturity.</a:t>
+              <a:t>where: Use the YTM on the issuer's own traded bonds; where nothing trades, match on rating, sector and maturity, or use recent comparable borrowings.</a:t>
             </a:r>
             <a:endParaRPr lang="en-US" sz="1100" dirty="0"/>
           </a:p>
@@ -28055,7 +28921,7 @@
           </p:nvPr>
         </p:nvGraphicFramePr>
         <p:xfrm>
-          <a:off x="320040" y="2011680"/>
+          <a:off x="320040" y="2194560"/>
           <a:ext cx="8503920" cy="914400"/>
         </p:xfrm>
         <a:graphic>
@@ -28086,7 +28952,7 @@
                           <a:ea typeface="Trebuchet MS" pitchFamily="34" charset="-122"/>
                           <a:cs typeface="Trebuchet MS" pitchFamily="34" charset="-120"/>
                         </a:rPr>
-                        <a:t>Credit / tenor (indicative)</a:t>
+                        <a:t>Rating / tenor (indicative)</a:t>
                       </a:r>
                       <a:endParaRPr lang="en-US" sz="1100" dirty="0">
                         <a:latin typeface="Trebuchet MS" charset="0"/>
@@ -28186,7 +29052,7 @@
                           <a:ea typeface="Trebuchet MS" pitchFamily="34" charset="-122"/>
                           <a:cs typeface="Trebuchet MS" pitchFamily="34" charset="-120"/>
                         </a:rPr>
-                        <a:t>After-tax @ t = 25%</a:t>
+                        <a:t>After-tax, t = 25%</a:t>
                       </a:r>
                       <a:endParaRPr lang="en-US" sz="1100" dirty="0">
                         <a:latin typeface="Trebuchet MS" charset="0"/>
@@ -28236,7 +29102,7 @@
                           <a:ea typeface="Trebuchet MS" pitchFamily="34" charset="-122"/>
                           <a:cs typeface="Trebuchet MS" pitchFamily="34" charset="-120"/>
                         </a:rPr>
-                        <a:t>After-tax @ t = 35%</a:t>
+                        <a:t>After-tax, t = 35%</a:t>
                       </a:r>
                       <a:endParaRPr lang="en-US" sz="1100" dirty="0">
                         <a:latin typeface="Trebuchet MS" charset="0"/>
@@ -28288,7 +29154,7 @@
                           <a:ea typeface="Calibri" pitchFamily="34" charset="-122"/>
                           <a:cs typeface="Calibri" pitchFamily="34" charset="-120"/>
                         </a:rPr>
-                        <a:t>5y, investment-grade A (mature industrial)</a:t>
+                        <a:t>A rated, 5y (mature industrial)</a:t>
                       </a:r>
                       <a:endParaRPr lang="en-US" sz="1100" dirty="0">
                         <a:latin typeface="Calibri" charset="0"/>
@@ -28490,7 +29356,7 @@
                           <a:ea typeface="Calibri" pitchFamily="34" charset="-122"/>
                           <a:cs typeface="Calibri" pitchFamily="34" charset="-120"/>
                         </a:rPr>
-                        <a:t>7y, BBB (capital-intensive industrial)</a:t>
+                        <a:t>BBB, 7y (capital-intensive)</a:t>
                       </a:r>
                       <a:endParaRPr lang="en-US" sz="1100" dirty="0">
                         <a:latin typeface="Calibri" charset="0"/>
@@ -28692,7 +29558,7 @@
                           <a:ea typeface="Calibri" pitchFamily="34" charset="-122"/>
                           <a:cs typeface="Calibri" pitchFamily="34" charset="-120"/>
                         </a:rPr>
-                        <a:t>10y, BB (leveraged buyout)</a:t>
+                        <a:t>BB, 10y (leveraged buyout)</a:t>
                       </a:r>
                       <a:endParaRPr lang="en-US" sz="1100" dirty="0">
                         <a:latin typeface="Calibri" charset="0"/>
@@ -28894,7 +29760,7 @@
                           <a:ea typeface="Calibri" pitchFamily="34" charset="-122"/>
                           <a:cs typeface="Calibri" pitchFamily="34" charset="-120"/>
                         </a:rPr>
-                        <a:t>10y, B (speculative-grade)</a:t>
+                        <a:t>B, 10y (speculative grade)</a:t>
                       </a:r>
                       <a:endParaRPr lang="en-US" sz="1100" dirty="0">
                         <a:latin typeface="Calibri" charset="0"/>
@@ -29096,7 +29962,7 @@
                           <a:ea typeface="Calibri" pitchFamily="34" charset="-122"/>
                           <a:cs typeface="Calibri" pitchFamily="34" charset="-120"/>
                         </a:rPr>
-                        <a:t>30y, CCC (distressed)</a:t>
+                        <a:t>CCC, 30y (distressed)</a:t>
                       </a:r>
                       <a:endParaRPr lang="en-US" sz="1100" dirty="0">
                         <a:latin typeface="Calibri" charset="0"/>
@@ -29292,8 +30158,8 @@
         </p:nvSpPr>
         <p:spPr>
           <a:xfrm>
-            <a:off x="320040" y="3703320"/>
-            <a:ext cx="8503920" cy="640080"/>
+            <a:off x="320040" y="3913632"/>
+            <a:ext cx="8503920" cy="658368"/>
           </a:xfrm>
           <a:prstGeom prst="rect">
             <a:avLst/>
@@ -29312,8 +30178,8 @@
         </p:nvSpPr>
         <p:spPr>
           <a:xfrm>
-            <a:off x="320040" y="3703320"/>
-            <a:ext cx="73152" cy="640080"/>
+            <a:off x="320040" y="3913632"/>
+            <a:ext cx="73152" cy="658368"/>
           </a:xfrm>
           <a:prstGeom prst="rect">
             <a:avLst/>
@@ -29332,7 +30198,7 @@
         </p:nvSpPr>
         <p:spPr>
           <a:xfrm>
-            <a:off x="457200" y="3749040"/>
+            <a:off x="457200" y="3959352"/>
             <a:ext cx="8275320" cy="256032"/>
           </a:xfrm>
           <a:prstGeom prst="rect">
@@ -29360,7 +30226,7 @@
                 <a:ea typeface="Trebuchet MS" pitchFamily="34" charset="-122"/>
                 <a:cs typeface="Trebuchet MS" pitchFamily="34" charset="-120"/>
               </a:rPr>
-              <a:t>WHY YTM, NOT COUPON</a:t>
+              <a:t>WHY YIELD, NOT COUPON</a:t>
             </a:r>
             <a:endParaRPr lang="en-US" sz="1100" dirty="0"/>
           </a:p>
@@ -29374,8 +30240,8 @@
         </p:nvSpPr>
         <p:spPr>
           <a:xfrm>
-            <a:off x="457200" y="4023360"/>
-            <a:ext cx="8275320" cy="274320"/>
+            <a:off x="457200" y="4233672"/>
+            <a:ext cx="8275320" cy="292608"/>
           </a:xfrm>
           <a:prstGeom prst="rect">
             <a:avLst/>
@@ -29402,7 +30268,7 @@
                 <a:ea typeface="Calibri" pitchFamily="34" charset="-122"/>
                 <a:cs typeface="Calibri" pitchFamily="34" charset="-120"/>
               </a:rPr>
-              <a:t>A bond issued at 5% coupon five years ago may trade at YTM 7% today. The 7% reflects what a new marginal investor demands — and therefore what the firm would pay on new debt.</a:t>
+              <a:t>A bond issued at a 5% coupon five years ago may yield 7% today. The 7% is the marginal cost — what the firm pays on new debt.</a:t>
             </a:r>
             <a:endParaRPr lang="en-US" sz="1200" dirty="0"/>
           </a:p>
@@ -29509,7 +30375,7 @@
                 <a:ea typeface="Trebuchet MS" pitchFamily="34" charset="-122"/>
                 <a:cs typeface="Trebuchet MS" pitchFamily="34" charset="-120"/>
               </a:rPr>
-              <a:t>Worked WACC wrap-up — Aurelia Energy Corp pulls CAPM, Hamada, and after-tax debt into a single discount rate</a:t>
+              <a:t>End to end: relever a peer beta, run CAPM, tax-effect the debt and combine — one discount rate out of five inputs</a:t>
             </a:r>
             <a:endParaRPr lang="en-US" sz="1700" dirty="0"/>
           </a:p>
@@ -29610,7 +30476,7 @@
                 <a:ea typeface="Calibri" pitchFamily="34" charset="-122"/>
                 <a:cs typeface="Calibri" pitchFamily="34" charset="-120"/>
               </a:rPr>
-              <a:t>¹ Rule of thumb: CAPM + Hamada is the textbook default for public companies with comparable peers; for private companies, build-up method with size premium is more common.
+              <a:t>¹ CAPM with a relevered peer beta is the default for listed comparables; for private companies a build-up with a size premium is more common.
 </a:t>
             </a:r>
             <a:endParaRPr lang="en-US" sz="1000" dirty="0"/>
@@ -29653,7 +30519,7 @@
                 <a:ea typeface="Calibri" pitchFamily="34" charset="-122"/>
                 <a:cs typeface="Calibri" pitchFamily="34" charset="-120"/>
               </a:rPr>
-              <a:t>Source: Illustrative firm ("Aurelia Energy Corp"); synthesises frameworks from CFA Vol 3 LM 6.</a:t>
+              <a:t>Source: Illustrative company ("Aurelia Energy Corp"); synthesises the CFA Vol 3 LM 6 framework with the CAPM and the standard beta adjustment. Not a curriculum example.</a:t>
             </a:r>
             <a:endParaRPr lang="en-US" sz="750" dirty="0"/>
           </a:p>
@@ -29695,7 +30561,7 @@
                 <a:ea typeface="Calibri" pitchFamily="34" charset="-122"/>
                 <a:cs typeface="Calibri" pitchFamily="34" charset="-120"/>
               </a:rPr>
-              <a:t>Five sequential steps: identify peer, unlever peer beta, relever at target D/E, run CAPM, combine with after-tax debt.</a:t>
+              <a:t>Five steps in order: pick the peer, unlever its beta, relever at the target D/E, run CAPM, then blend with the after-tax cost of debt.</a:t>
             </a:r>
             <a:endParaRPr lang="en-US" sz="1300" dirty="0"/>
           </a:p>
@@ -29762,7 +30628,7 @@
                 <a:ea typeface="Trebuchet MS" pitchFamily="34" charset="-122"/>
                 <a:cs typeface="Trebuchet MS" pitchFamily="34" charset="-120"/>
               </a:rPr>
-              <a:t>AURELIA ENERGY CORP — FULL WACC</a:t>
+              <a:t>AURELIA ENERGY CORP — A FULL WACC</a:t>
             </a:r>
             <a:endParaRPr lang="en-US" sz="1100" dirty="0"/>
           </a:p>
@@ -29804,7 +30670,7 @@
                 <a:ea typeface="Calibri" pitchFamily="34" charset="-122"/>
                 <a:cs typeface="Calibri" pitchFamily="34" charset="-120"/>
               </a:rPr>
-              <a:t>Mid-cap independent power producer. Target capital structure: 40% debt / 60% equity (D/V = 0.4, D/E = 0.667). Marginal tax rate 25%. r_f = 4.0%, ERP = 6.0%. Peer utility trades at β_L = 0.95, D/E = 0.80. Aurelia's 10y unsecured bond YTM = 5.2%.</a:t>
+              <a:t>A mid-cap independent power producer. Target structure 40% debt / 60% equity, so D/V = 0.40 and D/E = 0.667. Marginal tax rate 25%. r_f = 4.0%, ERP = 6.0%. A peer utility trades at a levered beta of 0.95 with D/E = 0.80. Aurelia's 10y unsecured bond yields 5.2%.</a:t>
             </a:r>
             <a:endParaRPr lang="en-US" sz="1200" dirty="0"/>
           </a:p>
@@ -29866,7 +30732,7 @@
                 <a:ea typeface="Calibri" pitchFamily="34" charset="-122"/>
                 <a:cs typeface="Calibri" pitchFamily="34" charset="-120"/>
               </a:rPr>
-              <a:t>1.  Unlever peer beta: β_U = 0.95 / [1 + (1 − 0.25)(0.80)] = 0.95 / 1.60 = 0.594
+              <a:t>Unlever the peer: β_U = 0.95 / [1 + (1 − 0.25)(0.80)] = 0.95 / 1.60 = 0.594
 </a:t>
             </a:r>
             <a:pPr indent="0" marL="0">
@@ -29901,7 +30767,7 @@
                 <a:ea typeface="Calibri" pitchFamily="34" charset="-122"/>
                 <a:cs typeface="Calibri" pitchFamily="34" charset="-120"/>
               </a:rPr>
-              <a:t>2.  Relever at Aurelia's D/E = 0.667: β_L = 0.594 × [1 + (1 − 0.25)(0.667)] = 0.594 × 1.50 = 0.891
+              <a:t>Relever at Aurelia's D/E = 0.667: β_L = 0.594 × [1 + (1 − 0.25)(0.667)] = 0.594 × 1.50 = 0.891
 </a:t>
             </a:r>
             <a:pPr indent="0" marL="0">
@@ -29936,7 +30802,7 @@
                 <a:ea typeface="Calibri" pitchFamily="34" charset="-122"/>
                 <a:cs typeface="Calibri" pitchFamily="34" charset="-120"/>
               </a:rPr>
-              <a:t>3.  CAPM cost of equity: r_e = 4.0% + 0.891 × 6.0% = 4.0% + 5.35% = 9.35%
+              <a:t>CAPM cost of equity: r_e = 4.0% + 0.891 × 6.0% = 4.0% + 5.35% = 9.35%
 </a:t>
             </a:r>
             <a:pPr indent="0" marL="0">
@@ -29971,7 +30837,7 @@
                 <a:ea typeface="Calibri" pitchFamily="34" charset="-122"/>
                 <a:cs typeface="Calibri" pitchFamily="34" charset="-120"/>
               </a:rPr>
-              <a:t>4.  After-tax cost of debt: r_d · (1 − t) = 5.2% × 0.75 = 3.90%
+              <a:t>After-tax cost of debt: r_d × (1 − t) = 5.2% × 0.75 = 3.90%
 </a:t>
             </a:r>
             <a:pPr indent="0" marL="0">
@@ -30006,7 +30872,7 @@
                 <a:ea typeface="Calibri" pitchFamily="34" charset="-122"/>
                 <a:cs typeface="Calibri" pitchFamily="34" charset="-120"/>
               </a:rPr>
-              <a:t>5.  WACC = w_d · r_d (1−t) + w_e · r_e = 0.40 × 3.90% + 0.60 × 9.35% = 1.56% + 5.61% = 7.17%</a:t>
+              <a:t>WACC = 0.40 × 3.90% + 0.60 × 9.35% = 1.56% + 5.61% = 7.17%</a:t>
             </a:r>
             <a:endParaRPr lang="en-US" sz="1200" dirty="0"/>
           </a:p>
@@ -30068,7 +30934,7 @@
                 <a:ea typeface="Consolas" pitchFamily="34" charset="-122"/>
                 <a:cs typeface="Consolas" pitchFamily="34" charset="-120"/>
               </a:rPr>
-              <a:t>Aurelia WACC ≈ 7.2%  —  apply for NPV of projects of average Aurelia risk; add a project-risk premium for riskier assets.</a:t>
+              <a:t>Aurelia WACC = 7.17%, for a project of average Aurelia risk.</a:t>
             </a:r>
             <a:endParaRPr lang="en-US" sz="1150" dirty="0"/>
           </a:p>
@@ -30299,7 +31165,7 @@
                 <a:ea typeface="Calibri" pitchFamily="34" charset="-122"/>
                 <a:cs typeface="Calibri" pitchFamily="34" charset="-120"/>
               </a:rPr>
-              <a:t>Three legal forms of business differ on 5 attributes — liability, tax, access to finance, owner-manager relationship, legal identity. Corporations dominate because they combine limited liability, owner-manager separation, and frictionless ownership transfer.</a:t>
+              <a:t>Five attributes separate the three legal forms: legal identity, owner-manager relationship, liability, taxation, access to financing. Corporations dominate because limited liability plus owner-manager separation opens capital markets.</a:t>
             </a:r>
             <a:endParaRPr lang="en-US" sz="1150" dirty="0"/>
           </a:p>
@@ -30381,7 +31247,7 @@
                 <a:ea typeface="Calibri" pitchFamily="34" charset="-122"/>
                 <a:cs typeface="Calibri" pitchFamily="34" charset="-120"/>
               </a:rPr>
-              <a:t>Debt and equity are economically asymmetric: debt is fixed, priority, finite, tax-deductible; equity is residual, discretionary, permanent. Leverage amplifies both ROE and ROE volatility — the same mechanism drives both.</a:t>
+              <a:t>Debt is fixed, senior, finite and tax-deductible; equity is residual, discretionary and permanent. Debt is riskier for the issuer, equity for the investor. Both are true at once.</a:t>
             </a:r>
             <a:endParaRPr lang="en-US" sz="1150" dirty="0"/>
           </a:p>
@@ -30463,7 +31329,7 @@
                 <a:ea typeface="Calibri" pitchFamily="34" charset="-122"/>
                 <a:cs typeface="Calibri" pitchFamily="34" charset="-120"/>
               </a:rPr>
-              <a:t>Every principal-agent link (shareholder→board, board→manager) creates potential agency costs: insufficient effort, risk mis-appetite, empire building, entrenchment, self-dealing. Governance mechanisms address each.</a:t>
+              <a:t>Leverage lifts ROE only while return on assets beats the cost of debt (CFA LM2 Example 1: 30% against 20%). It does not raise the average return — it widens the distribution.</a:t>
             </a:r>
             <a:endParaRPr lang="en-US" sz="1150" dirty="0"/>
           </a:p>
@@ -30545,7 +31411,7 @@
                 <a:ea typeface="Calibri" pitchFamily="34" charset="-122"/>
                 <a:cs typeface="Calibri" pitchFamily="34" charset="-120"/>
               </a:rPr>
-              <a:t>Three core committees (Audit, Nominating, Compensation) embed independence. Real-world failures — Theranos, VW Dieselgate, Kobe Steel — trace to inadequate oversight, captive boards, or misaligned pay.</a:t>
+              <a:t>Every principal-agent link creates agency costs: insufficient effort, wrong risk appetite, empire building, entrenchment, self-dealing. Seven categories of mechanism exist to contain them.</a:t>
             </a:r>
             <a:endParaRPr lang="en-US" sz="1150" dirty="0"/>
           </a:p>
@@ -30627,7 +31493,7 @@
                 <a:ea typeface="Calibri" pitchFamily="34" charset="-122"/>
                 <a:cs typeface="Calibri" pitchFamily="34" charset="-120"/>
               </a:rPr>
-              <a:t>WACC = w_d · r_d · (1 − t) + w_e · r_e. Use MARKET-value weights; after-tax r_d uses YTM, not coupon; r_e from CAPM. Single most important rate in corporate finance.</a:t>
+              <a:t>WACC = w_d·r_d·(1 − t) + w_e·r_e. Market weights for the WACC; book values and leverage ratios for targets and covenants. The cost of debt is the YTM, never the coupon.</a:t>
             </a:r>
             <a:endParaRPr lang="en-US" sz="1150" dirty="0"/>
           </a:p>
@@ -30709,7 +31575,7 @@
                 <a:ea typeface="Calibri" pitchFamily="34" charset="-122"/>
                 <a:cs typeface="Calibri" pitchFamily="34" charset="-120"/>
               </a:rPr>
-              <a:t>MM I &amp; II (no tax): capital structure irrelevant — cheaper debt exactly offset by higher cost of equity. With taxes, V_L = V_U + tD; debt creates value via the tax shield.</a:t>
+              <a:t>MM without taxes: structure is irrelevant, cheaper debt exactly offset by dearer equity. With taxes: V_L = V_U + tD, WACC falls, and the extreme answer is 100% debt.</a:t>
             </a:r>
             <a:endParaRPr lang="en-US" sz="1150" dirty="0"/>
           </a:p>
@@ -30791,7 +31657,7 @@
                 <a:ea typeface="Calibri" pitchFamily="34" charset="-122"/>
                 <a:cs typeface="Calibri" pitchFamily="34" charset="-120"/>
               </a:rPr>
-              <a:t>Static trade-off: optimal D* balances tax shield against PV of distress costs (inverted-U in V_L). Boulder: D* = 20 maximises V_L = 49.5. Pecking order: retained earnings → debt → equity, driven by information asymmetry.</a:t>
+              <a:t>Static trade-off adds distress costs and gives an optimum (Boulder: D* = 20 maximises V_L at 49.5). Pecking order says there is none — internal funds, private debt, public debt, equity last.</a:t>
             </a:r>
             <a:endParaRPr lang="en-US" sz="1150" dirty="0"/>
           </a:p>
@@ -30873,7 +31739,7 @@
                 <a:ea typeface="Calibri" pitchFamily="34" charset="-122"/>
                 <a:cs typeface="Calibri" pitchFamily="34" charset="-120"/>
               </a:rPr>
-              <a:t>CAPM (r_e = r_f + β·ERP) + Hamada (β_U ↔ β_L via D/E and tax) give the full toolkit. Aurelia Energy: unlever peer β, relever at target D/E, combine with after-tax debt → WACC ≈ 7.2%.</a:t>
+              <a:t>Cost of equity from CAPM; the asset beta separates business risk from financial risk. Aurelia: unlever the peer, relever at target D/E, blend with after-tax debt, WACC = 7.17%.</a:t>
             </a:r>
             <a:endParaRPr lang="en-US" sz="1150" dirty="0"/>
           </a:p>
@@ -31326,6 +32192,46 @@
         </p:nvSpPr>
         <p:spPr>
           <a:xfrm>
+            <a:off x="320040" y="4471416"/>
+            <a:ext cx="8503920" cy="192024"/>
+          </a:xfrm>
+          <a:prstGeom prst="rect">
+            <a:avLst/>
+          </a:prstGeom>
+          <a:noFill/>
+          <a:ln/>
+        </p:spPr>
+        <p:txBody>
+          <a:bodyPr wrap="square" lIns="254" tIns="254" rIns="254" bIns="254" rtlCol="0" anchor="t"/>
+          <a:lstStyle/>
+          <a:p>
+            <a:pPr indent="0" marL="0">
+              <a:buNone/>
+            </a:pPr>
+            <a:r>
+              <a:rPr lang="en-US" sz="1000" dirty="0">
+                <a:solidFill>
+                  <a:srgbClr val="6B7A8D"/>
+                </a:solidFill>
+                <a:latin typeface="Calibri" pitchFamily="34" charset="0"/>
+                <a:ea typeface="Calibri" pitchFamily="34" charset="-122"/>
+                <a:cs typeface="Calibri" pitchFamily="34" charset="-120"/>
+              </a:rPr>
+              <a:t>¹ Private limited companies (LLC, SARL, GmbH, K.K.) keep limited liability but restrict ownership and are usually taxed pass-through.
+</a:t>
+            </a:r>
+            <a:endParaRPr lang="en-US" sz="1000" dirty="0"/>
+          </a:p>
+        </p:txBody>
+      </p:sp>
+      <p:sp>
+        <p:nvSpPr>
+          <p:cNvPr id="8" name="Text 6"/>
+          <p:cNvSpPr txBox="1"/>
+          <p:nvPr/>
+        </p:nvSpPr>
+        <p:spPr>
+          <a:xfrm>
             <a:off x="320040" y="4663440"/>
             <a:ext cx="8503920" cy="201168"/>
           </a:xfrm>
@@ -31354,7 +32260,7 @@
                 <a:ea typeface="Calibri" pitchFamily="34" charset="-122"/>
                 <a:cs typeface="Calibri" pitchFamily="34" charset="-120"/>
               </a:rPr>
-              <a:t>Source: CFA Institute, Curriculum Vol 3, Learning Module 1, pp. 6–14.</a:t>
+              <a:t>Source: CFA Institute, Curriculum Vol 3, Learning Module 1, §2 "Organizational Forms of Businesses", Exhibit 6, pp. 6–13.</a:t>
             </a:r>
             <a:endParaRPr lang="en-US" sz="750" dirty="0"/>
           </a:p>
@@ -31362,7 +32268,7 @@
       </p:sp>
       <p:sp>
         <p:nvSpPr>
-          <p:cNvPr id="8" name="Text 6"/>
+          <p:cNvPr id="9" name="Text 7"/>
           <p:cNvSpPr txBox="1"/>
           <p:nvPr/>
         </p:nvSpPr>
@@ -31396,7 +32302,7 @@
                 <a:ea typeface="Calibri" pitchFamily="34" charset="-122"/>
                 <a:cs typeface="Calibri" pitchFamily="34" charset="-120"/>
               </a:rPr>
-              <a:t>The corporate form is dominant globally by revenues and assets because it is the only form that offers limited liability, owner-manager separation, and frictionless ownership transfer simultaneously.</a:t>
+              <a:t>The corporate form dominates globally by revenue and assets because it alone offers limited liability, owner-manager separation and unrestricted ownership transfer at the same time.</a:t>
             </a:r>
             <a:endParaRPr lang="en-US" sz="1300" dirty="0"/>
           </a:p>
@@ -31425,10 +32331,10 @@
             <a:tbl>
               <a:tblPr/>
               <a:tblGrid>
+                <a:gridCol w="1828800"/>
                 <a:gridCol w="1920240"/>
-                <a:gridCol w="2011680"/>
-                <a:gridCol w="2560320"/>
-                <a:gridCol w="2011680"/>
+                <a:gridCol w="2468880"/>
+                <a:gridCol w="2286000"/>
               </a:tblGrid>
               <a:tr h="274320">
                 <a:tc>
@@ -31498,7 +32404,7 @@
                           <a:ea typeface="Trebuchet MS" pitchFamily="34" charset="-122"/>
                           <a:cs typeface="Trebuchet MS" pitchFamily="34" charset="-120"/>
                         </a:rPr>
-                        <a:t>Sole proprietor</a:t>
+                        <a:t>Sole proprietorship</a:t>
                       </a:r>
                       <a:endParaRPr lang="en-US" sz="1100" dirty="0">
                         <a:latin typeface="Trebuchet MS" charset="0"/>
@@ -31548,7 +32454,7 @@
                           <a:ea typeface="Trebuchet MS" pitchFamily="34" charset="-122"/>
                           <a:cs typeface="Trebuchet MS" pitchFamily="34" charset="-120"/>
                         </a:rPr>
-                        <a:t>General / Limited partnership</a:t>
+                        <a:t>Partnership (GP / LP)</a:t>
                       </a:r>
                       <a:endParaRPr lang="en-US" sz="1100" dirty="0">
                         <a:latin typeface="Trebuchet MS" charset="0"/>
@@ -31598,7 +32504,7 @@
                           <a:ea typeface="Trebuchet MS" pitchFamily="34" charset="-122"/>
                           <a:cs typeface="Trebuchet MS" pitchFamily="34" charset="-120"/>
                         </a:rPr>
-                        <a:t>Corporation (public limited)</a:t>
+                        <a:t>Corporation (public Ltd)</a:t>
                       </a:r>
                       <a:endParaRPr lang="en-US" sz="1100" dirty="0">
                         <a:latin typeface="Trebuchet MS" charset="0"/>
@@ -31750,7 +32656,7 @@
                           <a:ea typeface="Consolas" pitchFamily="34" charset="-122"/>
                           <a:cs typeface="Consolas" pitchFamily="34" charset="-120"/>
                         </a:rPr>
-                        <a:t>Extension of partner(s)</a:t>
+                        <a:t>Extension of partners</a:t>
                       </a:r>
                       <a:endParaRPr lang="en-US" sz="1100" dirty="0">
                         <a:latin typeface="Consolas" charset="0"/>
@@ -31952,7 +32858,7 @@
                           <a:ea typeface="Consolas" pitchFamily="34" charset="-122"/>
                           <a:cs typeface="Consolas" pitchFamily="34" charset="-120"/>
                         </a:rPr>
-                        <a:t>Partners operate (GP in LP)</a:t>
+                        <a:t>Partners operate (GP)</a:t>
                       </a:r>
                       <a:endParaRPr lang="en-US" sz="1100" dirty="0">
                         <a:latin typeface="Consolas" charset="0"/>
@@ -32002,7 +32908,7 @@
                           <a:ea typeface="Consolas" pitchFamily="34" charset="-122"/>
                           <a:cs typeface="Consolas" pitchFamily="34" charset="-120"/>
                         </a:rPr>
-                        <a:t>Board &amp; hired management</a:t>
+                        <a:t>Board hires management</a:t>
                       </a:r>
                       <a:endParaRPr lang="en-US" sz="1100" dirty="0">
                         <a:latin typeface="Consolas" charset="0"/>
@@ -32204,7 +33110,7 @@
                           <a:ea typeface="Consolas" pitchFamily="34" charset="-122"/>
                           <a:cs typeface="Consolas" pitchFamily="34" charset="-120"/>
                         </a:rPr>
-                        <a:t>Limited to invested capital</a:t>
+                        <a:t>Limited to amount invested</a:t>
                       </a:r>
                       <a:endParaRPr lang="en-US" sz="1100" dirty="0">
                         <a:latin typeface="Consolas" charset="0"/>
@@ -32306,7 +33212,7 @@
                           <a:ea typeface="Consolas" pitchFamily="34" charset="-122"/>
                           <a:cs typeface="Consolas" pitchFamily="34" charset="-120"/>
                         </a:rPr>
-                        <a:t>Pass-through (personal)</a:t>
+                        <a:t>Pass-through (owner)</a:t>
                       </a:r>
                       <a:endParaRPr lang="en-US" sz="1100" dirty="0">
                         <a:latin typeface="Consolas" charset="0"/>
@@ -32356,7 +33262,7 @@
                           <a:ea typeface="Consolas" pitchFamily="34" charset="-122"/>
                           <a:cs typeface="Consolas" pitchFamily="34" charset="-120"/>
                         </a:rPr>
-                        <a:t>Pass-through (personal)</a:t>
+                        <a:t>Pass-through (partners)</a:t>
                       </a:r>
                       <a:endParaRPr lang="en-US" sz="1100" dirty="0">
                         <a:latin typeface="Consolas" charset="0"/>
@@ -32406,7 +33312,7 @@
                           <a:ea typeface="Consolas" pitchFamily="34" charset="-122"/>
                           <a:cs typeface="Consolas" pitchFamily="34" charset="-120"/>
                         </a:rPr>
-                        <a:t>Corporate + dividend (double)</a:t>
+                        <a:t>Company, then dividend tax</a:t>
                       </a:r>
                       <a:endParaRPr lang="en-US" sz="1100" dirty="0">
                         <a:latin typeface="Consolas" charset="0"/>
@@ -32508,7 +33414,7 @@
                           <a:ea typeface="Consolas" pitchFamily="34" charset="-122"/>
                           <a:cs typeface="Consolas" pitchFamily="34" charset="-120"/>
                         </a:rPr>
-                        <a:t>Owner + personal loans</a:t>
+                        <a:t>Owner + personal debt</a:t>
                       </a:r>
                       <a:endParaRPr lang="en-US" sz="1100" dirty="0">
                         <a:latin typeface="Consolas" charset="0"/>
@@ -32558,7 +33464,7 @@
                           <a:ea typeface="Consolas" pitchFamily="34" charset="-122"/>
                           <a:cs typeface="Consolas" pitchFamily="34" charset="-120"/>
                         </a:rPr>
-                        <a:t>Partners + partnership loans</a:t>
+                        <a:t>Partners + partner loans</a:t>
                       </a:r>
                       <a:endParaRPr lang="en-US" sz="1100" dirty="0">
                         <a:latin typeface="Consolas" charset="0"/>
@@ -32648,13 +33554,13 @@
       </p:graphicFrame>
       <p:sp>
         <p:nvSpPr>
-          <p:cNvPr id="10" name="Shape 7"/>
+          <p:cNvPr id="11" name="Shape 8"/>
           <p:cNvSpPr/>
           <p:nvPr/>
         </p:nvSpPr>
         <p:spPr>
           <a:xfrm>
-            <a:off x="320040" y="3429000"/>
+            <a:off x="320040" y="3017520"/>
             <a:ext cx="8503920" cy="914400"/>
           </a:xfrm>
           <a:prstGeom prst="rect">
@@ -32668,13 +33574,13 @@
       </p:sp>
       <p:sp>
         <p:nvSpPr>
-          <p:cNvPr id="11" name="Shape 8"/>
+          <p:cNvPr id="12" name="Shape 9"/>
           <p:cNvSpPr/>
           <p:nvPr/>
         </p:nvSpPr>
         <p:spPr>
           <a:xfrm>
-            <a:off x="320040" y="3429000"/>
+            <a:off x="320040" y="3017520"/>
             <a:ext cx="73152" cy="914400"/>
           </a:xfrm>
           <a:prstGeom prst="rect">
@@ -32688,13 +33594,13 @@
       </p:sp>
       <p:sp>
         <p:nvSpPr>
-          <p:cNvPr id="12" name="Text 9"/>
+          <p:cNvPr id="13" name="Text 10"/>
           <p:cNvSpPr txBox="1"/>
           <p:nvPr/>
         </p:nvSpPr>
         <p:spPr>
           <a:xfrm>
-            <a:off x="457200" y="3474720"/>
+            <a:off x="457200" y="3063240"/>
             <a:ext cx="8275320" cy="256032"/>
           </a:xfrm>
           <a:prstGeom prst="rect">
@@ -32722,7 +33628,7 @@
                 <a:ea typeface="Trebuchet MS" pitchFamily="34" charset="-122"/>
                 <a:cs typeface="Trebuchet MS" pitchFamily="34" charset="-120"/>
               </a:rPr>
-              <a:t>WHY CORPORATIONS WIN ON SCALE</a:t>
+              <a:t>WHY THE CORPORATE FORM WINS ON SCALE</a:t>
             </a:r>
             <a:endParaRPr lang="en-US" sz="1100" dirty="0"/>
           </a:p>
@@ -32730,13 +33636,13 @@
       </p:sp>
       <p:sp>
         <p:nvSpPr>
-          <p:cNvPr id="13" name="Text 10"/>
+          <p:cNvPr id="14" name="Text 11"/>
           <p:cNvSpPr txBox="1"/>
           <p:nvPr/>
         </p:nvSpPr>
         <p:spPr>
           <a:xfrm>
-            <a:off x="457200" y="3749040"/>
+            <a:off x="457200" y="3337560"/>
             <a:ext cx="8275320" cy="548640"/>
           </a:xfrm>
           <a:prstGeom prst="rect">
@@ -32764,7 +33670,7 @@
                 <a:ea typeface="Calibri" pitchFamily="34" charset="-122"/>
                 <a:cs typeface="Calibri" pitchFamily="34" charset="-120"/>
               </a:rPr>
-              <a:t>A share is the smallest possible ownership unit, transferable without disrupting operations, and carries a cap on loss equal to its purchase price. Together, these features let a firm pool capital from thousands of investors who demand no role in management.</a:t>
+              <a:t>A share is the smallest transferable unit of ownership, and the holder's loss is capped at what they paid for it. Together those two features let a firm pool capital from thousands of investors who want no role in running it. The price is double taxation — profits taxed at the company, then again on distribution — which is why the form suits businesses that retain and reinvest.</a:t>
             </a:r>
             <a:endParaRPr lang="en-US" sz="1200" dirty="0"/>
           </a:p>
@@ -32975,7 +33881,7 @@
                 <a:ea typeface="Calibri" pitchFamily="34" charset="-122"/>
                 <a:cs typeface="Calibri" pitchFamily="34" charset="-120"/>
               </a:rPr>
-              <a:t>Source: CFA Institute, Curriculum Vol 3, Learning Module 1, Example 1 (Simon Property Group), pp. 15–20.</a:t>
+              <a:t>Source: CFA Institute, Curriculum Vol 3, Learning Module 1, §3 "Key Features of Corporate Issuers", pp. 14–19. Simon Property Group is Example 1, pp. 10–11.</a:t>
             </a:r>
             <a:endParaRPr lang="en-US" sz="750" dirty="0"/>
           </a:p>
@@ -33017,7 +33923,7 @@
                 <a:ea typeface="Calibri" pitchFamily="34" charset="-122"/>
                 <a:cs typeface="Calibri" pitchFamily="34" charset="-120"/>
               </a:rPr>
-              <a:t>Shareholders → elect → Board of Directors → hires → Management. Three layers, each acting (in theory) in the interests of those who elected them.</a:t>
+              <a:t>Shareholders → elect → board of directors → appoints → management. Three layers, each meant to act for the layer that put it there.</a:t>
             </a:r>
             <a:endParaRPr lang="en-US" sz="1300" dirty="0"/>
           </a:p>
@@ -33099,7 +34005,7 @@
                 <a:ea typeface="Trebuchet MS" pitchFamily="34" charset="-122"/>
                 <a:cs typeface="Trebuchet MS" pitchFamily="34" charset="-120"/>
               </a:rPr>
-              <a:t>FIVE KEY FEATURES OF CORPORATIONS</a:t>
+              <a:t>THE FIVE FEATURES CFA ACTUALLY LISTS</a:t>
             </a:r>
             <a:endParaRPr lang="en-US" sz="1100" dirty="0"/>
           </a:p>
@@ -33141,7 +34047,7 @@
                 <a:ea typeface="Calibri" pitchFamily="34" charset="-122"/>
                 <a:cs typeface="Calibri" pitchFamily="34" charset="-120"/>
               </a:rPr>
-              <a:t>1. Separate legal entity — can contract, sue, be sued, borrow</a:t>
+              <a:t>1. Legal identity — a separate person in law: contracts, hires, sues, borrows, pays tax</a:t>
             </a:r>
             <a:endParaRPr lang="en-US" sz="1200" dirty="0"/>
           </a:p>
@@ -33158,7 +34064,7 @@
                 <a:ea typeface="Calibri" pitchFamily="34" charset="-122"/>
                 <a:cs typeface="Calibri" pitchFamily="34" charset="-120"/>
               </a:rPr>
-              <a:t>2. Limited shareholder liability — cap on loss = purchase price</a:t>
+              <a:t>2. Owner-manager separation — shareholders elect the board; the board appoints the CEO</a:t>
             </a:r>
             <a:endParaRPr lang="en-US" sz="1200" dirty="0"/>
           </a:p>
@@ -33175,7 +34081,7 @@
                 <a:ea typeface="Calibri" pitchFamily="34" charset="-122"/>
                 <a:cs typeface="Calibri" pitchFamily="34" charset="-120"/>
               </a:rPr>
-              <a:t>3. Separation of ownership &amp; management — elect board; board appoints CEO</a:t>
+              <a:t>3. Owner liability — limited: a shareholder can lose the purchase price and no more</a:t>
             </a:r>
             <a:endParaRPr lang="en-US" sz="1200" dirty="0"/>
           </a:p>
@@ -33192,7 +34098,7 @@
                 <a:ea typeface="Calibri" pitchFamily="34" charset="-122"/>
                 <a:cs typeface="Calibri" pitchFamily="34" charset="-120"/>
               </a:rPr>
-              <a:t>4. Transferable shares — small, standardized ownership units</a:t>
+              <a:t>4. External financing — buying a share is the only requirement to become an owner</a:t>
             </a:r>
             <a:endParaRPr lang="en-US" sz="1200" dirty="0"/>
           </a:p>
@@ -33209,7 +34115,7 @@
                 <a:ea typeface="Calibri" pitchFamily="34" charset="-122"/>
                 <a:cs typeface="Calibri" pitchFamily="34" charset="-120"/>
               </a:rPr>
-              <a:t>5. Perpetual life — survives any individual owner's exit</a:t>
+              <a:t>5. Taxation — profits taxed at the company, then again on distribution</a:t>
             </a:r>
             <a:endParaRPr lang="en-US" sz="1200" dirty="0"/>
           </a:p>
@@ -33232,7 +34138,7 @@
                 <a:ea typeface="Calibri" pitchFamily="34" charset="-122"/>
                 <a:cs typeface="Calibri" pitchFamily="34" charset="-120"/>
               </a:rPr>
-              <a:t>Drawback: double taxation (corporate + dividend).</a:t>
+              <a:t>Ownership is divided into small, standardised, freely transferable shares. That is the mechanism which makes (3) and (4) work together.</a:t>
             </a:r>
             <a:endParaRPr lang="en-US" sz="1200" dirty="0"/>
           </a:p>
@@ -33356,7 +34262,7 @@
                 <a:ea typeface="Calibri" pitchFamily="34" charset="-122"/>
                 <a:cs typeface="Calibri" pitchFamily="34" charset="-120"/>
               </a:rPr>
-              <a:t>Simon owns USD 33B of retail real estate via two layers:</a:t>
+              <a:t>Simon holds over USD 33bn of retail real estate in two layers:</a:t>
             </a:r>
             <a:endParaRPr lang="en-US" sz="1200" dirty="0"/>
           </a:p>
@@ -33379,7 +34285,7 @@
                 <a:ea typeface="Calibri" pitchFamily="34" charset="-122"/>
                 <a:cs typeface="Calibri" pitchFamily="34" charset="-120"/>
               </a:rPr>
-              <a:t>• Simon Property Group L.P. (limited partnership) holds the assets.</a:t>
+              <a:t>• Simon Property Group L.P., a limited partnership, owns the assets outright.</a:t>
             </a:r>
             <a:endParaRPr lang="en-US" sz="1200" dirty="0"/>
           </a:p>
@@ -33396,7 +34302,7 @@
                 <a:ea typeface="Calibri" pitchFamily="34" charset="-122"/>
                 <a:cs typeface="Calibri" pitchFamily="34" charset="-120"/>
               </a:rPr>
-              <a:t>• Simon Property Group Inc. (corporation) is the General Partner with 87% of the LP.</a:t>
+              <a:t>• Simon Property Group Inc., a corporation, is the general partner with an 87% interest — and its only asset is that partnership stake.</a:t>
             </a:r>
             <a:endParaRPr lang="en-US" sz="1200" dirty="0"/>
           </a:p>
@@ -33419,7 +34325,7 @@
                 <a:ea typeface="Calibri" pitchFamily="34" charset="-122"/>
                 <a:cs typeface="Calibri" pitchFamily="34" charset="-120"/>
               </a:rPr>
-              <a:t>The LP shields Inc. shareholders from real-estate liability while keeping Inc.'s own shareholders behind limited liability. A GP that is itself a corporation — a common structure for REITs and fund sponsors.</a:t>
+              <a:t>The GP carries unlimited liability, but the GP is itself a company whose shareholders do not. The ultimate owners are shielded while profit and loss are still shared with around 200 limited partners. The founding family holds 8% of Inc.</a:t>
             </a:r>
             <a:endParaRPr lang="en-US" sz="1200" dirty="0"/>
           </a:p>
@@ -33526,7 +34432,7 @@
                 <a:ea typeface="Trebuchet MS" pitchFamily="34" charset="-122"/>
                 <a:cs typeface="Trebuchet MS" pitchFamily="34" charset="-120"/>
               </a:rPr>
-              <a:t>Public companies trade liquidity and price transparency for disclosure, listing costs, and the scrutiny of outside shareholders</a:t>
+              <a:t>Public companies trade liquidity and price transparency for disclosure, listing costs and the scrutiny of outside shareholders</a:t>
             </a:r>
             <a:endParaRPr lang="en-US" sz="1700" dirty="0"/>
           </a:p>
@@ -33630,7 +34536,7 @@
                 <a:ea typeface="Calibri" pitchFamily="34" charset="-122"/>
                 <a:cs typeface="Calibri" pitchFamily="34" charset="-120"/>
               </a:rPr>
-              <a:t>Source: CFA Institute, Curriculum Vol 3, Learning Module 1, §4 "Publicly vs. Privately Owned Corporate Issuers", pp. 21–30.</a:t>
+              <a:t>Source: CFA Institute, Curriculum Vol 3, Learning Module 1, §4 "Publicly vs. Privately Owned Corporate Issuers", Exhibits 10 and 16, pp. 20–32.</a:t>
             </a:r>
             <a:endParaRPr lang="en-US" sz="750" dirty="0"/>
           </a:p>
@@ -33672,7 +34578,7 @@
                 <a:ea typeface="Calibri" pitchFamily="34" charset="-122"/>
                 <a:cs typeface="Calibri" pitchFamily="34" charset="-120"/>
               </a:rPr>
-              <a:t>The decision to go public (or to go private) is ultimately a trade between access to capital and freedom from continuous public scrutiny.</a:t>
+              <a:t>Going public — or going private — is a trade between access to capital and freedom from continuous public scrutiny. The legal form itself does not change.</a:t>
             </a:r>
             <a:endParaRPr lang="en-US" sz="1300" dirty="0"/>
           </a:p>
@@ -33693,7 +34599,7 @@
           </p:nvPr>
         </p:nvGraphicFramePr>
         <p:xfrm>
-          <a:off x="320040" y="1188720"/>
+          <a:off x="320040" y="1170432"/>
           <a:ext cx="8503920" cy="914400"/>
         </p:xfrm>
         <a:graphic>
@@ -33823,7 +34729,7 @@
                           <a:ea typeface="Trebuchet MS" pitchFamily="34" charset="-122"/>
                           <a:cs typeface="Trebuchet MS" pitchFamily="34" charset="-120"/>
                         </a:rPr>
-                        <a:t>Private</a:t>
+                        <a:t>Private (unlisted)</a:t>
                       </a:r>
                       <a:endParaRPr lang="en-US" sz="1100" dirty="0">
                         <a:latin typeface="Trebuchet MS" charset="0"/>
@@ -33975,7 +34881,7 @@
                           <a:ea typeface="Consolas" pitchFamily="34" charset="-122"/>
                           <a:cs typeface="Consolas" pitchFamily="34" charset="-120"/>
                         </a:rPr>
-                        <a:t>Illiquid — negotiated block trades</a:t>
+                        <a:t>Illiquid — negotiated blocks</a:t>
                       </a:r>
                       <a:endParaRPr lang="en-US" sz="1100" dirty="0">
                         <a:latin typeface="Consolas" charset="0"/>
@@ -34077,7 +34983,7 @@
                           <a:ea typeface="Consolas" pitchFamily="34" charset="-122"/>
                           <a:cs typeface="Consolas" pitchFamily="34" charset="-120"/>
                         </a:rPr>
-                        <a:t>Real-time quote, regulated disclosure</a:t>
+                        <a:t>Real-time price, regulated news flow</a:t>
                       </a:r>
                       <a:endParaRPr lang="en-US" sz="1100" dirty="0">
                         <a:latin typeface="Consolas" charset="0"/>
@@ -34179,7 +35085,7 @@
                           <a:ea typeface="Calibri" pitchFamily="34" charset="-122"/>
                           <a:cs typeface="Calibri" pitchFamily="34" charset="-120"/>
                         </a:rPr>
-                        <a:t>Disclosure burden</a:t>
+                        <a:t>Disclosure</a:t>
                       </a:r>
                       <a:endParaRPr lang="en-US" sz="1100" dirty="0">
                         <a:latin typeface="Calibri" charset="0"/>
@@ -34229,7 +35135,7 @@
                           <a:ea typeface="Consolas" pitchFamily="34" charset="-122"/>
                           <a:cs typeface="Consolas" pitchFamily="34" charset="-120"/>
                         </a:rPr>
-                        <a:t>Quarterly 10-Q / interim audit, 10-K / annual</a:t>
+                        <a:t>Annual audited, interim reviewed</a:t>
                       </a:r>
                       <a:endParaRPr lang="en-US" sz="1100" dirty="0">
                         <a:latin typeface="Consolas" charset="0"/>
@@ -34279,7 +35185,7 @@
                           <a:ea typeface="Consolas" pitchFamily="34" charset="-122"/>
                           <a:cs typeface="Consolas" pitchFamily="34" charset="-120"/>
                         </a:rPr>
-                        <a:t>Bilateral with investors; often confidential</a:t>
+                        <a:t>Bilateral, often confidential</a:t>
                       </a:r>
                       <a:endParaRPr lang="en-US" sz="1100" dirty="0">
                         <a:latin typeface="Consolas" charset="0"/>
@@ -34483,7 +35389,7 @@
                           <a:ea typeface="Calibri" pitchFamily="34" charset="-122"/>
                           <a:cs typeface="Calibri" pitchFamily="34" charset="-120"/>
                         </a:rPr>
-                        <a:t>Typical shareholder base</a:t>
+                        <a:t>Shareholder base</a:t>
                       </a:r>
                       <a:endParaRPr lang="en-US" sz="1100" dirty="0">
                         <a:latin typeface="Calibri" charset="0"/>
@@ -34533,7 +35439,7 @@
                           <a:ea typeface="Consolas" pitchFamily="34" charset="-122"/>
                           <a:cs typeface="Consolas" pitchFamily="34" charset="-120"/>
                         </a:rPr>
-                        <a:t>Thousands to millions (retail + institutional)</a:t>
+                        <a:t>Thousands, retail + institutional</a:t>
                       </a:r>
                       <a:endParaRPr lang="en-US" sz="1100" dirty="0">
                         <a:latin typeface="Consolas" charset="0"/>
@@ -34583,7 +35489,7 @@
                           <a:ea typeface="Consolas" pitchFamily="34" charset="-122"/>
                           <a:cs typeface="Consolas" pitchFamily="34" charset="-120"/>
                         </a:rPr>
-                        <a:t>Founders, PE, strategic investors, family</a:t>
+                        <a:t>Founders, PE, family, strategics</a:t>
                       </a:r>
                       <a:endParaRPr lang="en-US" sz="1100" dirty="0">
                         <a:latin typeface="Consolas" charset="0"/>
@@ -34635,7 +35541,7 @@
                           <a:ea typeface="Calibri" pitchFamily="34" charset="-122"/>
                           <a:cs typeface="Calibri" pitchFamily="34" charset="-120"/>
                         </a:rPr>
-                        <a:t>Governance scrutiny</a:t>
+                        <a:t>Free float</a:t>
                       </a:r>
                       <a:endParaRPr lang="en-US" sz="1100" dirty="0">
                         <a:latin typeface="Calibri" charset="0"/>
@@ -34685,7 +35591,7 @@
                           <a:ea typeface="Consolas" pitchFamily="34" charset="-122"/>
                           <a:cs typeface="Consolas" pitchFamily="34" charset="-120"/>
                         </a:rPr>
-                        <a:t>Activists, proxy fights, say-on-pay votes</a:t>
+                        <a:t>Shares not held by insiders trade</a:t>
                       </a:r>
                       <a:endParaRPr lang="en-US" sz="1100" dirty="0">
                         <a:latin typeface="Consolas" charset="0"/>
@@ -34735,7 +35641,7 @@
                           <a:ea typeface="Consolas" pitchFamily="34" charset="-122"/>
                           <a:cs typeface="Consolas" pitchFamily="34" charset="-120"/>
                         </a:rPr>
-                        <a:t>Insulated from public governance pressure</a:t>
+                        <a:t>None — accredited investors only</a:t>
                       </a:r>
                       <a:endParaRPr lang="en-US" sz="1100" dirty="0">
                         <a:latin typeface="Consolas" charset="0"/>
@@ -34769,6 +35675,158 @@
                   </a:tcPr>
                 </a:tc>
               </a:tr>
+              <a:tr h="274320">
+                <a:tc>
+                  <a:txBody>
+                    <a:bodyPr/>
+                    <a:lstStyle/>
+                    <a:p>
+                      <a:pPr algn="l" indent="0" marL="0">
+                        <a:buNone/>
+                      </a:pPr>
+                      <a:r>
+                        <a:rPr lang="en-US" sz="1100" dirty="0">
+                          <a:solidFill>
+                            <a:srgbClr val="334155"/>
+                          </a:solidFill>
+                          <a:latin typeface="Calibri" pitchFamily="34" charset="0"/>
+                          <a:ea typeface="Calibri" pitchFamily="34" charset="-122"/>
+                          <a:cs typeface="Calibri" pitchFamily="34" charset="-120"/>
+                        </a:rPr>
+                        <a:t>Governance scrutiny</a:t>
+                      </a:r>
+                      <a:endParaRPr lang="en-US" sz="1100" dirty="0">
+                        <a:latin typeface="Calibri" charset="0"/>
+                        <a:ea typeface="Calibri" charset="0"/>
+                        <a:cs typeface="Calibri" charset="0"/>
+                      </a:endParaRPr>
+                    </a:p>
+                  </a:txBody>
+                  <a:tcPr marL="91440" marR="91440" marT="45720" marB="45720" anchor="ctr">
+                    <a:lnL w="0" cap="flat" cmpd="sng" algn="ctr">
+                      <a:noFill/>
+                    </a:lnL>
+                    <a:lnR w="0" cap="flat" cmpd="sng" algn="ctr">
+                      <a:noFill/>
+                    </a:lnR>
+                    <a:lnT w="0" cap="flat" cmpd="sng" algn="ctr">
+                      <a:noFill/>
+                    </a:lnT>
+                    <a:lnB w="3175" cap="flat" cmpd="sng" algn="ctr">
+                      <a:solidFill>
+                        <a:srgbClr val="D0D8E8"/>
+                      </a:solidFill>
+                      <a:prstDash val="solid"/>
+                      <a:round/>
+                      <a:headEnd type="none" w="med" len="med"/>
+                      <a:tailEnd type="none" w="med" len="med"/>
+                    </a:lnB>
+                    <a:solidFill>
+                      <a:srgbClr val="FFFFFF"/>
+                    </a:solidFill>
+                  </a:tcPr>
+                </a:tc>
+                <a:tc>
+                  <a:txBody>
+                    <a:bodyPr/>
+                    <a:lstStyle/>
+                    <a:p>
+                      <a:pPr algn="ctr" indent="0" marL="0">
+                        <a:buNone/>
+                      </a:pPr>
+                      <a:r>
+                        <a:rPr lang="en-US" sz="1100" dirty="0">
+                          <a:solidFill>
+                            <a:srgbClr val="334155"/>
+                          </a:solidFill>
+                          <a:latin typeface="Consolas" pitchFamily="34" charset="0"/>
+                          <a:ea typeface="Consolas" pitchFamily="34" charset="-122"/>
+                          <a:cs typeface="Consolas" pitchFamily="34" charset="-120"/>
+                        </a:rPr>
+                        <a:t>Activists, proxy fights, say-on-pay</a:t>
+                      </a:r>
+                      <a:endParaRPr lang="en-US" sz="1100" dirty="0">
+                        <a:latin typeface="Consolas" charset="0"/>
+                        <a:ea typeface="Consolas" charset="0"/>
+                        <a:cs typeface="Consolas" charset="0"/>
+                      </a:endParaRPr>
+                    </a:p>
+                  </a:txBody>
+                  <a:tcPr marL="91440" marR="91440" marT="45720" marB="45720" anchor="ctr">
+                    <a:lnL w="0" cap="flat" cmpd="sng" algn="ctr">
+                      <a:noFill/>
+                    </a:lnL>
+                    <a:lnR w="0" cap="flat" cmpd="sng" algn="ctr">
+                      <a:noFill/>
+                    </a:lnR>
+                    <a:lnT w="0" cap="flat" cmpd="sng" algn="ctr">
+                      <a:noFill/>
+                    </a:lnT>
+                    <a:lnB w="3175" cap="flat" cmpd="sng" algn="ctr">
+                      <a:solidFill>
+                        <a:srgbClr val="D0D8E8"/>
+                      </a:solidFill>
+                      <a:prstDash val="solid"/>
+                      <a:round/>
+                      <a:headEnd type="none" w="med" len="med"/>
+                      <a:tailEnd type="none" w="med" len="med"/>
+                    </a:lnB>
+                    <a:solidFill>
+                      <a:srgbClr val="FFFFFF"/>
+                    </a:solidFill>
+                  </a:tcPr>
+                </a:tc>
+                <a:tc>
+                  <a:txBody>
+                    <a:bodyPr/>
+                    <a:lstStyle/>
+                    <a:p>
+                      <a:pPr algn="ctr" indent="0" marL="0">
+                        <a:buNone/>
+                      </a:pPr>
+                      <a:r>
+                        <a:rPr lang="en-US" sz="1100" dirty="0">
+                          <a:solidFill>
+                            <a:srgbClr val="334155"/>
+                          </a:solidFill>
+                          <a:latin typeface="Consolas" pitchFamily="34" charset="0"/>
+                          <a:ea typeface="Consolas" pitchFamily="34" charset="-122"/>
+                          <a:cs typeface="Consolas" pitchFamily="34" charset="-120"/>
+                        </a:rPr>
+                        <a:t>Largely insulated from markets</a:t>
+                      </a:r>
+                      <a:endParaRPr lang="en-US" sz="1100" dirty="0">
+                        <a:latin typeface="Consolas" charset="0"/>
+                        <a:ea typeface="Consolas" charset="0"/>
+                        <a:cs typeface="Consolas" charset="0"/>
+                      </a:endParaRPr>
+                    </a:p>
+                  </a:txBody>
+                  <a:tcPr marL="91440" marR="91440" marT="45720" marB="45720" anchor="ctr">
+                    <a:lnL w="0" cap="flat" cmpd="sng" algn="ctr">
+                      <a:noFill/>
+                    </a:lnL>
+                    <a:lnR w="0" cap="flat" cmpd="sng" algn="ctr">
+                      <a:noFill/>
+                    </a:lnR>
+                    <a:lnT w="0" cap="flat" cmpd="sng" algn="ctr">
+                      <a:noFill/>
+                    </a:lnT>
+                    <a:lnB w="3175" cap="flat" cmpd="sng" algn="ctr">
+                      <a:solidFill>
+                        <a:srgbClr val="D0D8E8"/>
+                      </a:solidFill>
+                      <a:prstDash val="solid"/>
+                      <a:round/>
+                      <a:headEnd type="none" w="med" len="med"/>
+                      <a:tailEnd type="none" w="med" len="med"/>
+                    </a:lnB>
+                    <a:solidFill>
+                      <a:srgbClr val="FFFFFF"/>
+                    </a:solidFill>
+                  </a:tcPr>
+                </a:tc>
+              </a:tr>
             </a:tbl>
           </a:graphicData>
         </a:graphic>
@@ -34781,8 +35839,8 @@
         </p:nvSpPr>
         <p:spPr>
           <a:xfrm>
-            <a:off x="320040" y="3566160"/>
-            <a:ext cx="8503920" cy="777240"/>
+            <a:off x="320040" y="3474720"/>
+            <a:ext cx="8503920" cy="914400"/>
           </a:xfrm>
           <a:prstGeom prst="rect">
             <a:avLst/>
@@ -34801,8 +35859,8 @@
         </p:nvSpPr>
         <p:spPr>
           <a:xfrm>
-            <a:off x="320040" y="3566160"/>
-            <a:ext cx="73152" cy="777240"/>
+            <a:off x="320040" y="3474720"/>
+            <a:ext cx="73152" cy="914400"/>
           </a:xfrm>
           <a:prstGeom prst="rect">
             <a:avLst/>
@@ -34821,7 +35879,7 @@
         </p:nvSpPr>
         <p:spPr>
           <a:xfrm>
-            <a:off x="457200" y="3611880"/>
+            <a:off x="457200" y="3520440"/>
             <a:ext cx="8275320" cy="256032"/>
           </a:xfrm>
           <a:prstGeom prst="rect">
@@ -34863,8 +35921,8 @@
         </p:nvSpPr>
         <p:spPr>
           <a:xfrm>
-            <a:off x="457200" y="3886200"/>
-            <a:ext cx="8275320" cy="411480"/>
+            <a:off x="457200" y="3794760"/>
+            <a:ext cx="8275320" cy="548640"/>
           </a:xfrm>
           <a:prstGeom prst="rect">
             <a:avLst/>
@@ -34891,7 +35949,7 @@
                 <a:ea typeface="Calibri" pitchFamily="34" charset="-122"/>
                 <a:cs typeface="Calibri" pitchFamily="34" charset="-120"/>
               </a:rPr>
-              <a:t>Private → Public: IPO · direct listing · SPAC reverse merger.     Public → Private: LBO · MBO · take-private tender offer.</a:t>
+              <a:t>Private → public, three routes (CFA Exhibit 16): IPO — underwritten, new shares issued, cash raised · direct listing — no underwriter, no new shares, existing holders sell · acquisition — either by a listed company or by a SPAC, the "blank cheque" shell that has replaced the 1990s reverse merger.     Public → private: investors buy in every listed share at a premium, usually with debt, then delist.</a:t>
             </a:r>
             <a:endParaRPr lang="en-US" sz="1200" dirty="0"/>
           </a:p>
@@ -35330,7 +36388,7 @@
                 <a:ea typeface="Calibri" pitchFamily="34" charset="-122"/>
                 <a:cs typeface="Calibri" pitchFamily="34" charset="-120"/>
               </a:rPr>
-              <a:t>Source: CFA Institute, Curriculum Vol 3, Learning Module 2, pp. 39–47.</a:t>
+              <a:t>Source: CFA Institute, Curriculum Vol 3, Learning Module 2, §2 "Financial Claims of Lenders and Shareholders", pp. 39–47.</a:t>
             </a:r>
             <a:endParaRPr lang="en-US" sz="750" dirty="0"/>
           </a:p>
@@ -35372,7 +36430,7 @@
                 <a:ea typeface="Calibri" pitchFamily="34" charset="-122"/>
                 <a:cs typeface="Calibri" pitchFamily="34" charset="-120"/>
               </a:rPr>
-              <a:t>Debt investors are paid in full or not at all; equity investors get whatever is left. Same cash-flow pool, fundamentally different payoff profile.</a:t>
+              <a:t>One pool of cash flow, two claims on it. Debtholders are paid in full or not at all; shareholders get whatever is left over.</a:t>
             </a:r>
             <a:endParaRPr lang="en-US" sz="1300" dirty="0"/>
           </a:p>
@@ -35401,9 +36459,9 @@
             <a:tbl>
               <a:tblPr/>
               <a:tblGrid>
-                <a:gridCol w="2286000"/>
-                <a:gridCol w="3291840"/>
-                <a:gridCol w="2926080"/>
+                <a:gridCol w="2103120"/>
+                <a:gridCol w="3200400"/>
+                <a:gridCol w="3200400"/>
               </a:tblGrid>
               <a:tr h="274320">
                 <a:tc>
@@ -35625,7 +36683,7 @@
                           <a:ea typeface="Consolas" pitchFamily="34" charset="-122"/>
                           <a:cs typeface="Consolas" pitchFamily="34" charset="-120"/>
                         </a:rPr>
-                        <a:t>Finite (e.g. 3m, 5y, 30y)</a:t>
+                        <a:t>Finite — 3m to 30y</a:t>
                       </a:r>
                       <a:endParaRPr lang="en-US" sz="1100" dirty="0">
                         <a:latin typeface="Consolas" charset="0"/>
@@ -35675,7 +36733,7 @@
                           <a:ea typeface="Consolas" pitchFamily="34" charset="-122"/>
                           <a:cs typeface="Consolas" pitchFamily="34" charset="-120"/>
                         </a:rPr>
-                        <a:t>Indefinite / permanent</a:t>
+                        <a:t>Permanent, no maturity</a:t>
                       </a:r>
                       <a:endParaRPr lang="en-US" sz="1100" dirty="0">
                         <a:latin typeface="Consolas" charset="0"/>
@@ -35777,7 +36835,7 @@
                           <a:ea typeface="Consolas" pitchFamily="34" charset="-122"/>
                           <a:cs typeface="Consolas" pitchFamily="34" charset="-120"/>
                         </a:rPr>
-                        <a:t>Fixed, priority</a:t>
+                        <a:t>Fixed and senior</a:t>
                       </a:r>
                       <a:endParaRPr lang="en-US" sz="1100" dirty="0">
                         <a:latin typeface="Consolas" charset="0"/>
@@ -35979,7 +37037,7 @@
                           <a:ea typeface="Consolas" pitchFamily="34" charset="-122"/>
                           <a:cs typeface="Consolas" pitchFamily="34" charset="-120"/>
                         </a:rPr>
-                        <a:t>Dividend if board declares — or buyback</a:t>
+                        <a:t>Dividend only if declared</a:t>
                       </a:r>
                       <a:endParaRPr lang="en-US" sz="1100" dirty="0">
                         <a:latin typeface="Consolas" charset="0"/>
@@ -36081,7 +37139,7 @@
                           <a:ea typeface="Consolas" pitchFamily="34" charset="-122"/>
                           <a:cs typeface="Consolas" pitchFamily="34" charset="-120"/>
                         </a:rPr>
-                        <a:t>Capped at promised rate</a:t>
+                        <a:t>Capped at the promised rate</a:t>
                       </a:r>
                       <a:endParaRPr lang="en-US" sz="1100" dirty="0">
                         <a:latin typeface="Consolas" charset="0"/>
@@ -36131,7 +37189,7 @@
                           <a:ea typeface="Consolas" pitchFamily="34" charset="-122"/>
                           <a:cs typeface="Consolas" pitchFamily="34" charset="-120"/>
                         </a:rPr>
-                        <a:t>Theoretically unlimited upside</a:t>
+                        <a:t>Unlimited in theory</a:t>
                       </a:r>
                       <a:endParaRPr lang="en-US" sz="1100" dirty="0">
                         <a:latin typeface="Consolas" charset="0"/>
@@ -36183,7 +37241,7 @@
                           <a:ea typeface="Calibri" pitchFamily="34" charset="-122"/>
                           <a:cs typeface="Calibri" pitchFamily="34" charset="-120"/>
                         </a:rPr>
-                        <a:t>Maximum loss</a:t>
+                        <a:t>Liquidation priority</a:t>
                       </a:r>
                       <a:endParaRPr lang="en-US" sz="1100" dirty="0">
                         <a:latin typeface="Calibri" charset="0"/>
@@ -36233,7 +37291,7 @@
                           <a:ea typeface="Consolas" pitchFamily="34" charset="-122"/>
                           <a:cs typeface="Consolas" pitchFamily="34" charset="-120"/>
                         </a:rPr>
-                        <a:t>Initial investment</a:t>
+                        <a:t>Paid before any equity claim</a:t>
                       </a:r>
                       <a:endParaRPr lang="en-US" sz="1100" dirty="0">
                         <a:latin typeface="Consolas" charset="0"/>
@@ -36283,7 +37341,7 @@
                           <a:ea typeface="Consolas" pitchFamily="34" charset="-122"/>
                           <a:cs typeface="Consolas" pitchFamily="34" charset="-120"/>
                         </a:rPr>
-                        <a:t>Initial investment (limited liability)</a:t>
+                        <a:t>Last in line — residual</a:t>
                       </a:r>
                       <a:endParaRPr lang="en-US" sz="1100" dirty="0">
                         <a:latin typeface="Consolas" charset="0"/>
@@ -36335,7 +37393,7 @@
                           <a:ea typeface="Calibri" pitchFamily="34" charset="-122"/>
                           <a:cs typeface="Calibri" pitchFamily="34" charset="-120"/>
                         </a:rPr>
-                        <a:t>Tax treatment of payout</a:t>
+                        <a:t>Tax treatment</a:t>
                       </a:r>
                       <a:endParaRPr lang="en-US" sz="1100" dirty="0">
                         <a:latin typeface="Calibri" charset="0"/>
@@ -36385,7 +37443,7 @@
                           <a:ea typeface="Consolas" pitchFamily="34" charset="-122"/>
                           <a:cs typeface="Consolas" pitchFamily="34" charset="-120"/>
                         </a:rPr>
-                        <a:t>Interest is tax-deductible for issuer</a:t>
+                        <a:t>Interest deductible for issuer</a:t>
                       </a:r>
                       <a:endParaRPr lang="en-US" sz="1100" dirty="0">
                         <a:latin typeface="Consolas" charset="0"/>
@@ -36435,7 +37493,7 @@
                           <a:ea typeface="Consolas" pitchFamily="34" charset="-122"/>
                           <a:cs typeface="Consolas" pitchFamily="34" charset="-120"/>
                         </a:rPr>
-                        <a:t>Dividends paid from after-tax profit</a:t>
+                        <a:t>Dividends paid post-tax</a:t>
                       </a:r>
                       <a:endParaRPr lang="en-US" sz="1100" dirty="0">
                         <a:latin typeface="Consolas" charset="0"/>
@@ -36587,7 +37645,7 @@
                           <a:ea typeface="Consolas" pitchFamily="34" charset="-122"/>
                           <a:cs typeface="Consolas" pitchFamily="34" charset="-120"/>
                         </a:rPr>
-                        <a:t>Yes — board elections, M&amp;A, etc.</a:t>
+                        <a:t>Yes — board, M&amp;A, charter</a:t>
                       </a:r>
                       <a:endParaRPr lang="en-US" sz="1100" dirty="0">
                         <a:latin typeface="Consolas" charset="0"/>
@@ -36639,7 +37697,7 @@
                           <a:ea typeface="Calibri" pitchFamily="34" charset="-122"/>
                           <a:cs typeface="Calibri" pitchFamily="34" charset="-120"/>
                         </a:rPr>
-                        <a:t>Issuer risk</a:t>
+                        <a:t>Risk to the issuer</a:t>
                       </a:r>
                       <a:endParaRPr lang="en-US" sz="1100" dirty="0">
                         <a:latin typeface="Calibri" charset="0"/>
@@ -36689,7 +37747,7 @@
                           <a:ea typeface="Consolas" pitchFamily="34" charset="-122"/>
                           <a:cs typeface="Consolas" pitchFamily="34" charset="-120"/>
                         </a:rPr>
-                        <a:t>Higher (obligation, bankruptcy)</a:t>
+                        <a:t>Higher — must be serviced</a:t>
                       </a:r>
                       <a:endParaRPr lang="en-US" sz="1100" dirty="0">
                         <a:latin typeface="Consolas" charset="0"/>
@@ -36739,7 +37797,7 @@
                           <a:ea typeface="Consolas" pitchFamily="34" charset="-122"/>
                           <a:cs typeface="Consolas" pitchFamily="34" charset="-120"/>
                         </a:rPr>
-                        <a:t>Lower (no repayment obligation)</a:t>
+                        <a:t>Lower — no obligation</a:t>
                       </a:r>
                       <a:endParaRPr lang="en-US" sz="1100" dirty="0">
                         <a:latin typeface="Consolas" charset="0"/>
@@ -36773,10 +37831,286 @@
                   </a:tcPr>
                 </a:tc>
               </a:tr>
+              <a:tr h="274320">
+                <a:tc>
+                  <a:txBody>
+                    <a:bodyPr/>
+                    <a:lstStyle/>
+                    <a:p>
+                      <a:pPr algn="l" indent="0" marL="0">
+                        <a:buNone/>
+                      </a:pPr>
+                      <a:r>
+                        <a:rPr lang="en-US" sz="1100" dirty="0">
+                          <a:solidFill>
+                            <a:srgbClr val="334155"/>
+                          </a:solidFill>
+                          <a:latin typeface="Calibri" pitchFamily="34" charset="0"/>
+                          <a:ea typeface="Calibri" pitchFamily="34" charset="-122"/>
+                          <a:cs typeface="Calibri" pitchFamily="34" charset="-120"/>
+                        </a:rPr>
+                        <a:t>Risk to the investor</a:t>
+                      </a:r>
+                      <a:endParaRPr lang="en-US" sz="1100" dirty="0">
+                        <a:latin typeface="Calibri" charset="0"/>
+                        <a:ea typeface="Calibri" charset="0"/>
+                        <a:cs typeface="Calibri" charset="0"/>
+                      </a:endParaRPr>
+                    </a:p>
+                  </a:txBody>
+                  <a:tcPr marL="91440" marR="91440" marT="45720" marB="45720" anchor="ctr">
+                    <a:lnL w="0" cap="flat" cmpd="sng" algn="ctr">
+                      <a:noFill/>
+                    </a:lnL>
+                    <a:lnR w="0" cap="flat" cmpd="sng" algn="ctr">
+                      <a:noFill/>
+                    </a:lnR>
+                    <a:lnT w="0" cap="flat" cmpd="sng" algn="ctr">
+                      <a:noFill/>
+                    </a:lnT>
+                    <a:lnB w="3175" cap="flat" cmpd="sng" algn="ctr">
+                      <a:solidFill>
+                        <a:srgbClr val="D0D8E8"/>
+                      </a:solidFill>
+                      <a:prstDash val="solid"/>
+                      <a:round/>
+                      <a:headEnd type="none" w="med" len="med"/>
+                      <a:tailEnd type="none" w="med" len="med"/>
+                    </a:lnB>
+                    <a:solidFill>
+                      <a:srgbClr val="FFFFFF"/>
+                    </a:solidFill>
+                  </a:tcPr>
+                </a:tc>
+                <a:tc>
+                  <a:txBody>
+                    <a:bodyPr/>
+                    <a:lstStyle/>
+                    <a:p>
+                      <a:pPr algn="ctr" indent="0" marL="0">
+                        <a:buNone/>
+                      </a:pPr>
+                      <a:r>
+                        <a:rPr lang="en-US" sz="1100" dirty="0">
+                          <a:solidFill>
+                            <a:srgbClr val="334155"/>
+                          </a:solidFill>
+                          <a:latin typeface="Consolas" pitchFamily="34" charset="0"/>
+                          <a:ea typeface="Consolas" pitchFamily="34" charset="-122"/>
+                          <a:cs typeface="Consolas" pitchFamily="34" charset="-120"/>
+                        </a:rPr>
+                        <a:t>Lower — priority, fixed</a:t>
+                      </a:r>
+                      <a:endParaRPr lang="en-US" sz="1100" dirty="0">
+                        <a:latin typeface="Consolas" charset="0"/>
+                        <a:ea typeface="Consolas" charset="0"/>
+                        <a:cs typeface="Consolas" charset="0"/>
+                      </a:endParaRPr>
+                    </a:p>
+                  </a:txBody>
+                  <a:tcPr marL="91440" marR="91440" marT="45720" marB="45720" anchor="ctr">
+                    <a:lnL w="0" cap="flat" cmpd="sng" algn="ctr">
+                      <a:noFill/>
+                    </a:lnL>
+                    <a:lnR w="0" cap="flat" cmpd="sng" algn="ctr">
+                      <a:noFill/>
+                    </a:lnR>
+                    <a:lnT w="0" cap="flat" cmpd="sng" algn="ctr">
+                      <a:noFill/>
+                    </a:lnT>
+                    <a:lnB w="3175" cap="flat" cmpd="sng" algn="ctr">
+                      <a:solidFill>
+                        <a:srgbClr val="D0D8E8"/>
+                      </a:solidFill>
+                      <a:prstDash val="solid"/>
+                      <a:round/>
+                      <a:headEnd type="none" w="med" len="med"/>
+                      <a:tailEnd type="none" w="med" len="med"/>
+                    </a:lnB>
+                    <a:solidFill>
+                      <a:srgbClr val="FFFFFF"/>
+                    </a:solidFill>
+                  </a:tcPr>
+                </a:tc>
+                <a:tc>
+                  <a:txBody>
+                    <a:bodyPr/>
+                    <a:lstStyle/>
+                    <a:p>
+                      <a:pPr algn="ctr" indent="0" marL="0">
+                        <a:buNone/>
+                      </a:pPr>
+                      <a:r>
+                        <a:rPr lang="en-US" sz="1100" dirty="0">
+                          <a:solidFill>
+                            <a:srgbClr val="334155"/>
+                          </a:solidFill>
+                          <a:latin typeface="Consolas" pitchFamily="34" charset="0"/>
+                          <a:ea typeface="Consolas" pitchFamily="34" charset="-122"/>
+                          <a:cs typeface="Consolas" pitchFamily="34" charset="-120"/>
+                        </a:rPr>
+                        <a:t>Higher — residual claim</a:t>
+                      </a:r>
+                      <a:endParaRPr lang="en-US" sz="1100" dirty="0">
+                        <a:latin typeface="Consolas" charset="0"/>
+                        <a:ea typeface="Consolas" charset="0"/>
+                        <a:cs typeface="Consolas" charset="0"/>
+                      </a:endParaRPr>
+                    </a:p>
+                  </a:txBody>
+                  <a:tcPr marL="91440" marR="91440" marT="45720" marB="45720" anchor="ctr">
+                    <a:lnL w="0" cap="flat" cmpd="sng" algn="ctr">
+                      <a:noFill/>
+                    </a:lnL>
+                    <a:lnR w="0" cap="flat" cmpd="sng" algn="ctr">
+                      <a:noFill/>
+                    </a:lnR>
+                    <a:lnT w="0" cap="flat" cmpd="sng" algn="ctr">
+                      <a:noFill/>
+                    </a:lnT>
+                    <a:lnB w="3175" cap="flat" cmpd="sng" algn="ctr">
+                      <a:solidFill>
+                        <a:srgbClr val="D0D8E8"/>
+                      </a:solidFill>
+                      <a:prstDash val="solid"/>
+                      <a:round/>
+                      <a:headEnd type="none" w="med" len="med"/>
+                      <a:tailEnd type="none" w="med" len="med"/>
+                    </a:lnB>
+                    <a:solidFill>
+                      <a:srgbClr val="FFFFFF"/>
+                    </a:solidFill>
+                  </a:tcPr>
+                </a:tc>
+              </a:tr>
             </a:tbl>
           </a:graphicData>
         </a:graphic>
       </p:graphicFrame>
+      <p:sp>
+        <p:nvSpPr>
+          <p:cNvPr id="10" name="Shape 7"/>
+          <p:cNvSpPr/>
+          <p:nvPr/>
+        </p:nvSpPr>
+        <p:spPr>
+          <a:xfrm>
+            <a:off x="320040" y="4005072"/>
+            <a:ext cx="8503920" cy="594360"/>
+          </a:xfrm>
+          <a:prstGeom prst="rect">
+            <a:avLst/>
+          </a:prstGeom>
+          <a:solidFill>
+            <a:srgbClr val="FEF0E7"/>
+          </a:solidFill>
+          <a:ln/>
+        </p:spPr>
+      </p:sp>
+      <p:sp>
+        <p:nvSpPr>
+          <p:cNvPr id="11" name="Shape 8"/>
+          <p:cNvSpPr/>
+          <p:nvPr/>
+        </p:nvSpPr>
+        <p:spPr>
+          <a:xfrm>
+            <a:off x="320040" y="4005072"/>
+            <a:ext cx="73152" cy="594360"/>
+          </a:xfrm>
+          <a:prstGeom prst="rect">
+            <a:avLst/>
+          </a:prstGeom>
+          <a:solidFill>
+            <a:srgbClr val="E8600A"/>
+          </a:solidFill>
+          <a:ln/>
+        </p:spPr>
+      </p:sp>
+      <p:sp>
+        <p:nvSpPr>
+          <p:cNvPr id="12" name="Text 9"/>
+          <p:cNvSpPr txBox="1"/>
+          <p:nvPr/>
+        </p:nvSpPr>
+        <p:spPr>
+          <a:xfrm>
+            <a:off x="457200" y="4050792"/>
+            <a:ext cx="8275320" cy="256032"/>
+          </a:xfrm>
+          <a:prstGeom prst="rect">
+            <a:avLst/>
+          </a:prstGeom>
+          <a:noFill/>
+          <a:ln/>
+        </p:spPr>
+        <p:txBody>
+          <a:bodyPr wrap="square" lIns="508" tIns="508" rIns="508" bIns="508" rtlCol="0" anchor="ctr">
+            <a:normAutofit/>
+            <a:spAutoFit/>
+          </a:bodyPr>
+          <a:lstStyle/>
+          <a:p>
+            <a:pPr algn="l" indent="0" marL="0">
+              <a:buNone/>
+            </a:pPr>
+            <a:r>
+              <a:rPr lang="en-US" sz="1100" b="1" spc="400" kern="0" dirty="0">
+                <a:solidFill>
+                  <a:srgbClr val="E8600A"/>
+                </a:solidFill>
+                <a:latin typeface="Trebuchet MS" pitchFamily="34" charset="0"/>
+                <a:ea typeface="Trebuchet MS" pitchFamily="34" charset="-122"/>
+                <a:cs typeface="Trebuchet MS" pitchFamily="34" charset="-120"/>
+              </a:rPr>
+              <a:t>THE SAME CASH FLOWS, MIRRORED RISK</a:t>
+            </a:r>
+            <a:endParaRPr lang="en-US" sz="1100" dirty="0"/>
+          </a:p>
+        </p:txBody>
+      </p:sp>
+      <p:sp>
+        <p:nvSpPr>
+          <p:cNvPr id="13" name="Text 10"/>
+          <p:cNvSpPr txBox="1"/>
+          <p:nvPr/>
+        </p:nvSpPr>
+        <p:spPr>
+          <a:xfrm>
+            <a:off x="457200" y="4325112"/>
+            <a:ext cx="8275320" cy="228600"/>
+          </a:xfrm>
+          <a:prstGeom prst="rect">
+            <a:avLst/>
+          </a:prstGeom>
+          <a:noFill/>
+          <a:ln/>
+        </p:spPr>
+        <p:txBody>
+          <a:bodyPr wrap="square" lIns="508" tIns="508" rIns="508" bIns="508" rtlCol="0" anchor="t">
+            <a:normAutofit/>
+            <a:spAutoFit/>
+          </a:bodyPr>
+          <a:lstStyle/>
+          <a:p>
+            <a:pPr algn="l" indent="0" marL="0">
+              <a:buNone/>
+            </a:pPr>
+            <a:r>
+              <a:rPr lang="en-US" sz="1200" dirty="0">
+                <a:solidFill>
+                  <a:srgbClr val="334155"/>
+                </a:solidFill>
+                <a:latin typeface="Calibri" pitchFamily="34" charset="0"/>
+                <a:ea typeface="Calibri" pitchFamily="34" charset="-122"/>
+                <a:cs typeface="Calibri" pitchFamily="34" charset="-120"/>
+              </a:rPr>
+              <a:t>Issuer view: debt is riskier — it must be serviced. Investor view: equity is riskier — it is residual.</a:t>
+            </a:r>
+            <a:endParaRPr lang="en-US" sz="1200" dirty="0"/>
+          </a:p>
+        </p:txBody>
+      </p:sp>
     </p:spTree>
   </p:cSld>
   <p:clrMapOvr>
